--- a/figures/resources/multichannel_images.pptx
+++ b/figures/resources/multichannel_images.pptx
@@ -7,6 +7,7 @@
   <p:sldIdLst>
     <p:sldId id="257" r:id="rId2"/>
     <p:sldId id="256" r:id="rId3"/>
+    <p:sldId id="258" r:id="rId4"/>
   </p:sldIdLst>
   <p:sldSz cx="12192000" cy="6858000"/>
   <p:notesSz cx="6858000" cy="9144000"/>
@@ -105,6 +106,11 @@
       </a:defRPr>
     </a:lvl9pPr>
   </p:defaultTextStyle>
+  <p:extLst>
+    <p:ext uri="{EFAFB233-063F-42B5-8137-9DF3F51BA10A}">
+      <p15:sldGuideLst xmlns:p15="http://schemas.microsoft.com/office/powerpoint/2012/main"/>
+    </p:ext>
+  </p:extLst>
 </p:presentation>
 </file>
 
@@ -257,7 +263,7 @@
           <a:p>
             <a:fld id="{D453E76C-F93A-5949-8232-824D624C7244}" type="datetimeFigureOut">
               <a:rPr lang="en-DE" smtClean="0"/>
-              <a:t>02.05.25</a:t>
+              <a:t>06/11/2026</a:t>
             </a:fld>
             <a:endParaRPr lang="en-DE"/>
           </a:p>
@@ -457,7 +463,7 @@
           <a:p>
             <a:fld id="{D453E76C-F93A-5949-8232-824D624C7244}" type="datetimeFigureOut">
               <a:rPr lang="en-DE" smtClean="0"/>
-              <a:t>02.05.25</a:t>
+              <a:t>06/11/2026</a:t>
             </a:fld>
             <a:endParaRPr lang="en-DE"/>
           </a:p>
@@ -667,7 +673,7 @@
           <a:p>
             <a:fld id="{D453E76C-F93A-5949-8232-824D624C7244}" type="datetimeFigureOut">
               <a:rPr lang="en-DE" smtClean="0"/>
-              <a:t>02.05.25</a:t>
+              <a:t>06/11/2026</a:t>
             </a:fld>
             <a:endParaRPr lang="en-DE"/>
           </a:p>
@@ -867,7 +873,7 @@
           <a:p>
             <a:fld id="{D453E76C-F93A-5949-8232-824D624C7244}" type="datetimeFigureOut">
               <a:rPr lang="en-DE" smtClean="0"/>
-              <a:t>02.05.25</a:t>
+              <a:t>06/11/2026</a:t>
             </a:fld>
             <a:endParaRPr lang="en-DE"/>
           </a:p>
@@ -1143,7 +1149,7 @@
           <a:p>
             <a:fld id="{D453E76C-F93A-5949-8232-824D624C7244}" type="datetimeFigureOut">
               <a:rPr lang="en-DE" smtClean="0"/>
-              <a:t>02.05.25</a:t>
+              <a:t>06/11/2026</a:t>
             </a:fld>
             <a:endParaRPr lang="en-DE"/>
           </a:p>
@@ -1411,7 +1417,7 @@
           <a:p>
             <a:fld id="{D453E76C-F93A-5949-8232-824D624C7244}" type="datetimeFigureOut">
               <a:rPr lang="en-DE" smtClean="0"/>
-              <a:t>02.05.25</a:t>
+              <a:t>06/11/2026</a:t>
             </a:fld>
             <a:endParaRPr lang="en-DE"/>
           </a:p>
@@ -1826,7 +1832,7 @@
           <a:p>
             <a:fld id="{D453E76C-F93A-5949-8232-824D624C7244}" type="datetimeFigureOut">
               <a:rPr lang="en-DE" smtClean="0"/>
-              <a:t>02.05.25</a:t>
+              <a:t>06/11/2026</a:t>
             </a:fld>
             <a:endParaRPr lang="en-DE"/>
           </a:p>
@@ -1968,7 +1974,7 @@
           <a:p>
             <a:fld id="{D453E76C-F93A-5949-8232-824D624C7244}" type="datetimeFigureOut">
               <a:rPr lang="en-DE" smtClean="0"/>
-              <a:t>02.05.25</a:t>
+              <a:t>06/11/2026</a:t>
             </a:fld>
             <a:endParaRPr lang="en-DE"/>
           </a:p>
@@ -2081,7 +2087,7 @@
           <a:p>
             <a:fld id="{D453E76C-F93A-5949-8232-824D624C7244}" type="datetimeFigureOut">
               <a:rPr lang="en-DE" smtClean="0"/>
-              <a:t>02.05.25</a:t>
+              <a:t>06/11/2026</a:t>
             </a:fld>
             <a:endParaRPr lang="en-DE"/>
           </a:p>
@@ -2394,7 +2400,7 @@
           <a:p>
             <a:fld id="{D453E76C-F93A-5949-8232-824D624C7244}" type="datetimeFigureOut">
               <a:rPr lang="en-DE" smtClean="0"/>
-              <a:t>02.05.25</a:t>
+              <a:t>06/11/2026</a:t>
             </a:fld>
             <a:endParaRPr lang="en-DE"/>
           </a:p>
@@ -2683,7 +2689,7 @@
           <a:p>
             <a:fld id="{D453E76C-F93A-5949-8232-824D624C7244}" type="datetimeFigureOut">
               <a:rPr lang="en-DE" smtClean="0"/>
-              <a:t>02.05.25</a:t>
+              <a:t>06/11/2026</a:t>
             </a:fld>
             <a:endParaRPr lang="en-DE"/>
           </a:p>
@@ -2926,7 +2932,7 @@
           <a:p>
             <a:fld id="{D453E76C-F93A-5949-8232-824D624C7244}" type="datetimeFigureOut">
               <a:rPr lang="en-DE" smtClean="0"/>
-              <a:t>02.05.25</a:t>
+              <a:t>06/11/2026</a:t>
             </a:fld>
             <a:endParaRPr lang="en-DE"/>
           </a:p>
@@ -5473,659 +5479,6 @@
           </p:txBody>
         </p:sp>
       </p:grpSp>
-      <p:grpSp>
-        <p:nvGrpSpPr>
-          <p:cNvPr id="118" name="Group 117">
-            <a:extLst>
-              <a:ext uri="{FF2B5EF4-FFF2-40B4-BE49-F238E27FC236}">
-                <a16:creationId xmlns:a16="http://schemas.microsoft.com/office/drawing/2014/main" id="{50EC6309-037F-72D3-16F0-8393FFFE47D7}"/>
-              </a:ext>
-            </a:extLst>
-          </p:cNvPr>
-          <p:cNvGrpSpPr/>
-          <p:nvPr/>
-        </p:nvGrpSpPr>
-        <p:grpSpPr>
-          <a:xfrm>
-            <a:off x="1175929" y="1356626"/>
-            <a:ext cx="1125253" cy="870582"/>
-            <a:chOff x="288758" y="1473802"/>
-            <a:chExt cx="968826" cy="749558"/>
-          </a:xfrm>
-        </p:grpSpPr>
-        <p:sp>
-          <p:nvSpPr>
-            <p:cNvPr id="106" name="Rectangle 105">
-              <a:extLst>
-                <a:ext uri="{FF2B5EF4-FFF2-40B4-BE49-F238E27FC236}">
-                  <a16:creationId xmlns:a16="http://schemas.microsoft.com/office/drawing/2014/main" id="{42D35C9C-C015-8075-E659-A9BEB96DEAB7}"/>
-                </a:ext>
-              </a:extLst>
-            </p:cNvPr>
-            <p:cNvSpPr/>
-            <p:nvPr/>
-          </p:nvSpPr>
-          <p:spPr>
-            <a:xfrm>
-              <a:off x="288758" y="1473802"/>
-              <a:ext cx="241560" cy="247507"/>
-            </a:xfrm>
-            <a:prstGeom prst="rect">
-              <a:avLst/>
-            </a:prstGeom>
-            <a:solidFill>
-              <a:schemeClr val="bg1"/>
-            </a:solidFill>
-          </p:spPr>
-          <p:style>
-            <a:lnRef idx="2">
-              <a:schemeClr val="accent1">
-                <a:shade val="15000"/>
-              </a:schemeClr>
-            </a:lnRef>
-            <a:fillRef idx="1">
-              <a:schemeClr val="accent1"/>
-            </a:fillRef>
-            <a:effectRef idx="0">
-              <a:schemeClr val="accent1"/>
-            </a:effectRef>
-            <a:fontRef idx="minor">
-              <a:schemeClr val="lt1"/>
-            </a:fontRef>
-          </p:style>
-          <p:txBody>
-            <a:bodyPr rtlCol="0" anchor="ctr"/>
-            <a:lstStyle/>
-            <a:p>
-              <a:pPr algn="ctr"/>
-              <a:endParaRPr lang="en-DE"/>
-            </a:p>
-          </p:txBody>
-        </p:sp>
-        <p:sp>
-          <p:nvSpPr>
-            <p:cNvPr id="107" name="Rectangle 106">
-              <a:extLst>
-                <a:ext uri="{FF2B5EF4-FFF2-40B4-BE49-F238E27FC236}">
-                  <a16:creationId xmlns:a16="http://schemas.microsoft.com/office/drawing/2014/main" id="{C4EB93BD-65A5-074F-B644-FF1F10F30C79}"/>
-                </a:ext>
-              </a:extLst>
-            </p:cNvPr>
-            <p:cNvSpPr/>
-            <p:nvPr/>
-          </p:nvSpPr>
-          <p:spPr>
-            <a:xfrm>
-              <a:off x="531611" y="1473802"/>
-              <a:ext cx="241560" cy="247507"/>
-            </a:xfrm>
-            <a:prstGeom prst="rect">
-              <a:avLst/>
-            </a:prstGeom>
-            <a:solidFill>
-              <a:schemeClr val="bg1">
-                <a:lumMod val="75000"/>
-              </a:schemeClr>
-            </a:solidFill>
-          </p:spPr>
-          <p:style>
-            <a:lnRef idx="2">
-              <a:schemeClr val="accent1">
-                <a:shade val="15000"/>
-              </a:schemeClr>
-            </a:lnRef>
-            <a:fillRef idx="1">
-              <a:schemeClr val="accent1"/>
-            </a:fillRef>
-            <a:effectRef idx="0">
-              <a:schemeClr val="accent1"/>
-            </a:effectRef>
-            <a:fontRef idx="minor">
-              <a:schemeClr val="lt1"/>
-            </a:fontRef>
-          </p:style>
-          <p:txBody>
-            <a:bodyPr rtlCol="0" anchor="ctr"/>
-            <a:lstStyle/>
-            <a:p>
-              <a:pPr algn="ctr"/>
-              <a:endParaRPr lang="en-DE"/>
-            </a:p>
-          </p:txBody>
-        </p:sp>
-        <p:sp>
-          <p:nvSpPr>
-            <p:cNvPr id="108" name="Rectangle 107">
-              <a:extLst>
-                <a:ext uri="{FF2B5EF4-FFF2-40B4-BE49-F238E27FC236}">
-                  <a16:creationId xmlns:a16="http://schemas.microsoft.com/office/drawing/2014/main" id="{7A43E1F3-7AA6-0FBD-BDFB-B974DD89C92A}"/>
-                </a:ext>
-              </a:extLst>
-            </p:cNvPr>
-            <p:cNvSpPr/>
-            <p:nvPr/>
-          </p:nvSpPr>
-          <p:spPr>
-            <a:xfrm>
-              <a:off x="774464" y="1473802"/>
-              <a:ext cx="241560" cy="247507"/>
-            </a:xfrm>
-            <a:prstGeom prst="rect">
-              <a:avLst/>
-            </a:prstGeom>
-            <a:solidFill>
-              <a:schemeClr val="bg1"/>
-            </a:solidFill>
-          </p:spPr>
-          <p:style>
-            <a:lnRef idx="2">
-              <a:schemeClr val="accent1">
-                <a:shade val="15000"/>
-              </a:schemeClr>
-            </a:lnRef>
-            <a:fillRef idx="1">
-              <a:schemeClr val="accent1"/>
-            </a:fillRef>
-            <a:effectRef idx="0">
-              <a:schemeClr val="accent1"/>
-            </a:effectRef>
-            <a:fontRef idx="minor">
-              <a:schemeClr val="lt1"/>
-            </a:fontRef>
-          </p:style>
-          <p:txBody>
-            <a:bodyPr rtlCol="0" anchor="ctr"/>
-            <a:lstStyle/>
-            <a:p>
-              <a:pPr algn="ctr"/>
-              <a:endParaRPr lang="en-DE"/>
-            </a:p>
-          </p:txBody>
-        </p:sp>
-        <p:sp>
-          <p:nvSpPr>
-            <p:cNvPr id="109" name="Rectangle 108">
-              <a:extLst>
-                <a:ext uri="{FF2B5EF4-FFF2-40B4-BE49-F238E27FC236}">
-                  <a16:creationId xmlns:a16="http://schemas.microsoft.com/office/drawing/2014/main" id="{843B0407-E657-E8C1-11B3-F849F13FE670}"/>
-                </a:ext>
-              </a:extLst>
-            </p:cNvPr>
-            <p:cNvSpPr/>
-            <p:nvPr/>
-          </p:nvSpPr>
-          <p:spPr>
-            <a:xfrm>
-              <a:off x="1016024" y="1473802"/>
-              <a:ext cx="241560" cy="247507"/>
-            </a:xfrm>
-            <a:prstGeom prst="rect">
-              <a:avLst/>
-            </a:prstGeom>
-            <a:solidFill>
-              <a:schemeClr val="bg1"/>
-            </a:solidFill>
-          </p:spPr>
-          <p:style>
-            <a:lnRef idx="2">
-              <a:schemeClr val="accent1">
-                <a:shade val="15000"/>
-              </a:schemeClr>
-            </a:lnRef>
-            <a:fillRef idx="1">
-              <a:schemeClr val="accent1"/>
-            </a:fillRef>
-            <a:effectRef idx="0">
-              <a:schemeClr val="accent1"/>
-            </a:effectRef>
-            <a:fontRef idx="minor">
-              <a:schemeClr val="lt1"/>
-            </a:fontRef>
-          </p:style>
-          <p:txBody>
-            <a:bodyPr rtlCol="0" anchor="ctr"/>
-            <a:lstStyle/>
-            <a:p>
-              <a:pPr algn="ctr"/>
-              <a:endParaRPr lang="en-DE"/>
-            </a:p>
-          </p:txBody>
-        </p:sp>
-        <p:sp>
-          <p:nvSpPr>
-            <p:cNvPr id="110" name="Rectangle 109">
-              <a:extLst>
-                <a:ext uri="{FF2B5EF4-FFF2-40B4-BE49-F238E27FC236}">
-                  <a16:creationId xmlns:a16="http://schemas.microsoft.com/office/drawing/2014/main" id="{8FFABF46-4831-079A-068B-E9D11ED88C6D}"/>
-                </a:ext>
-              </a:extLst>
-            </p:cNvPr>
-            <p:cNvSpPr/>
-            <p:nvPr/>
-          </p:nvSpPr>
-          <p:spPr>
-            <a:xfrm>
-              <a:off x="288758" y="1728346"/>
-              <a:ext cx="241560" cy="247507"/>
-            </a:xfrm>
-            <a:prstGeom prst="rect">
-              <a:avLst/>
-            </a:prstGeom>
-            <a:solidFill>
-              <a:schemeClr val="bg1"/>
-            </a:solidFill>
-          </p:spPr>
-          <p:style>
-            <a:lnRef idx="2">
-              <a:schemeClr val="accent1">
-                <a:shade val="15000"/>
-              </a:schemeClr>
-            </a:lnRef>
-            <a:fillRef idx="1">
-              <a:schemeClr val="accent1"/>
-            </a:fillRef>
-            <a:effectRef idx="0">
-              <a:schemeClr val="accent1"/>
-            </a:effectRef>
-            <a:fontRef idx="minor">
-              <a:schemeClr val="lt1"/>
-            </a:fontRef>
-          </p:style>
-          <p:txBody>
-            <a:bodyPr rtlCol="0" anchor="ctr"/>
-            <a:lstStyle/>
-            <a:p>
-              <a:pPr algn="ctr"/>
-              <a:endParaRPr lang="en-DE"/>
-            </a:p>
-          </p:txBody>
-        </p:sp>
-        <p:sp>
-          <p:nvSpPr>
-            <p:cNvPr id="111" name="Rectangle 110">
-              <a:extLst>
-                <a:ext uri="{FF2B5EF4-FFF2-40B4-BE49-F238E27FC236}">
-                  <a16:creationId xmlns:a16="http://schemas.microsoft.com/office/drawing/2014/main" id="{4439A069-1EEC-7D64-1E00-E70C1AFF2837}"/>
-                </a:ext>
-              </a:extLst>
-            </p:cNvPr>
-            <p:cNvSpPr/>
-            <p:nvPr/>
-          </p:nvSpPr>
-          <p:spPr>
-            <a:xfrm>
-              <a:off x="531611" y="1728346"/>
-              <a:ext cx="241560" cy="247507"/>
-            </a:xfrm>
-            <a:prstGeom prst="rect">
-              <a:avLst/>
-            </a:prstGeom>
-            <a:solidFill>
-              <a:schemeClr val="bg1"/>
-            </a:solidFill>
-          </p:spPr>
-          <p:style>
-            <a:lnRef idx="2">
-              <a:schemeClr val="accent1">
-                <a:shade val="15000"/>
-              </a:schemeClr>
-            </a:lnRef>
-            <a:fillRef idx="1">
-              <a:schemeClr val="accent1"/>
-            </a:fillRef>
-            <a:effectRef idx="0">
-              <a:schemeClr val="accent1"/>
-            </a:effectRef>
-            <a:fontRef idx="minor">
-              <a:schemeClr val="lt1"/>
-            </a:fontRef>
-          </p:style>
-          <p:txBody>
-            <a:bodyPr rtlCol="0" anchor="ctr"/>
-            <a:lstStyle/>
-            <a:p>
-              <a:pPr algn="ctr"/>
-              <a:endParaRPr lang="en-DE"/>
-            </a:p>
-          </p:txBody>
-        </p:sp>
-        <p:sp>
-          <p:nvSpPr>
-            <p:cNvPr id="112" name="Rectangle 111">
-              <a:extLst>
-                <a:ext uri="{FF2B5EF4-FFF2-40B4-BE49-F238E27FC236}">
-                  <a16:creationId xmlns:a16="http://schemas.microsoft.com/office/drawing/2014/main" id="{DCA09095-1852-ACAC-A948-9F7EC5F384CD}"/>
-                </a:ext>
-              </a:extLst>
-            </p:cNvPr>
-            <p:cNvSpPr/>
-            <p:nvPr/>
-          </p:nvSpPr>
-          <p:spPr>
-            <a:xfrm>
-              <a:off x="774464" y="1728346"/>
-              <a:ext cx="241560" cy="247507"/>
-            </a:xfrm>
-            <a:prstGeom prst="rect">
-              <a:avLst/>
-            </a:prstGeom>
-            <a:solidFill>
-              <a:schemeClr val="tx1">
-                <a:lumMod val="65000"/>
-                <a:lumOff val="35000"/>
-              </a:schemeClr>
-            </a:solidFill>
-          </p:spPr>
-          <p:style>
-            <a:lnRef idx="2">
-              <a:schemeClr val="accent1">
-                <a:shade val="15000"/>
-              </a:schemeClr>
-            </a:lnRef>
-            <a:fillRef idx="1">
-              <a:schemeClr val="accent1"/>
-            </a:fillRef>
-            <a:effectRef idx="0">
-              <a:schemeClr val="accent1"/>
-            </a:effectRef>
-            <a:fontRef idx="minor">
-              <a:schemeClr val="lt1"/>
-            </a:fontRef>
-          </p:style>
-          <p:txBody>
-            <a:bodyPr rtlCol="0" anchor="ctr"/>
-            <a:lstStyle/>
-            <a:p>
-              <a:pPr algn="ctr"/>
-              <a:endParaRPr lang="en-DE"/>
-            </a:p>
-          </p:txBody>
-        </p:sp>
-        <p:sp>
-          <p:nvSpPr>
-            <p:cNvPr id="113" name="Rectangle 112">
-              <a:extLst>
-                <a:ext uri="{FF2B5EF4-FFF2-40B4-BE49-F238E27FC236}">
-                  <a16:creationId xmlns:a16="http://schemas.microsoft.com/office/drawing/2014/main" id="{4B280FD6-BF40-05D9-4502-CA3A6904C205}"/>
-                </a:ext>
-              </a:extLst>
-            </p:cNvPr>
-            <p:cNvSpPr/>
-            <p:nvPr/>
-          </p:nvSpPr>
-          <p:spPr>
-            <a:xfrm>
-              <a:off x="1016024" y="1728346"/>
-              <a:ext cx="241560" cy="247507"/>
-            </a:xfrm>
-            <a:prstGeom prst="rect">
-              <a:avLst/>
-            </a:prstGeom>
-            <a:solidFill>
-              <a:schemeClr val="bg1"/>
-            </a:solidFill>
-          </p:spPr>
-          <p:style>
-            <a:lnRef idx="2">
-              <a:schemeClr val="accent1">
-                <a:shade val="15000"/>
-              </a:schemeClr>
-            </a:lnRef>
-            <a:fillRef idx="1">
-              <a:schemeClr val="accent1"/>
-            </a:fillRef>
-            <a:effectRef idx="0">
-              <a:schemeClr val="accent1"/>
-            </a:effectRef>
-            <a:fontRef idx="minor">
-              <a:schemeClr val="lt1"/>
-            </a:fontRef>
-          </p:style>
-          <p:txBody>
-            <a:bodyPr rtlCol="0" anchor="ctr"/>
-            <a:lstStyle/>
-            <a:p>
-              <a:pPr algn="ctr"/>
-              <a:endParaRPr lang="en-DE"/>
-            </a:p>
-          </p:txBody>
-        </p:sp>
-        <p:sp>
-          <p:nvSpPr>
-            <p:cNvPr id="114" name="Rectangle 113">
-              <a:extLst>
-                <a:ext uri="{FF2B5EF4-FFF2-40B4-BE49-F238E27FC236}">
-                  <a16:creationId xmlns:a16="http://schemas.microsoft.com/office/drawing/2014/main" id="{385AF1A6-AED9-2C60-BC7A-ED533744FB29}"/>
-                </a:ext>
-              </a:extLst>
-            </p:cNvPr>
-            <p:cNvSpPr/>
-            <p:nvPr/>
-          </p:nvSpPr>
-          <p:spPr>
-            <a:xfrm>
-              <a:off x="288758" y="1975853"/>
-              <a:ext cx="241560" cy="247507"/>
-            </a:xfrm>
-            <a:prstGeom prst="rect">
-              <a:avLst/>
-            </a:prstGeom>
-            <a:solidFill>
-              <a:schemeClr val="bg1">
-                <a:lumMod val="75000"/>
-              </a:schemeClr>
-            </a:solidFill>
-          </p:spPr>
-          <p:style>
-            <a:lnRef idx="2">
-              <a:schemeClr val="accent1">
-                <a:shade val="15000"/>
-              </a:schemeClr>
-            </a:lnRef>
-            <a:fillRef idx="1">
-              <a:schemeClr val="accent1"/>
-            </a:fillRef>
-            <a:effectRef idx="0">
-              <a:schemeClr val="accent1"/>
-            </a:effectRef>
-            <a:fontRef idx="minor">
-              <a:schemeClr val="lt1"/>
-            </a:fontRef>
-          </p:style>
-          <p:txBody>
-            <a:bodyPr rtlCol="0" anchor="ctr"/>
-            <a:lstStyle/>
-            <a:p>
-              <a:pPr algn="ctr"/>
-              <a:endParaRPr lang="en-DE"/>
-            </a:p>
-          </p:txBody>
-        </p:sp>
-        <p:sp>
-          <p:nvSpPr>
-            <p:cNvPr id="115" name="Rectangle 114">
-              <a:extLst>
-                <a:ext uri="{FF2B5EF4-FFF2-40B4-BE49-F238E27FC236}">
-                  <a16:creationId xmlns:a16="http://schemas.microsoft.com/office/drawing/2014/main" id="{5AC770B1-AE36-CD34-C13F-4F5BC339E74A}"/>
-                </a:ext>
-              </a:extLst>
-            </p:cNvPr>
-            <p:cNvSpPr/>
-            <p:nvPr/>
-          </p:nvSpPr>
-          <p:spPr>
-            <a:xfrm>
-              <a:off x="531611" y="1975853"/>
-              <a:ext cx="241560" cy="247507"/>
-            </a:xfrm>
-            <a:prstGeom prst="rect">
-              <a:avLst/>
-            </a:prstGeom>
-            <a:solidFill>
-              <a:schemeClr val="bg1"/>
-            </a:solidFill>
-          </p:spPr>
-          <p:style>
-            <a:lnRef idx="2">
-              <a:schemeClr val="accent1">
-                <a:shade val="15000"/>
-              </a:schemeClr>
-            </a:lnRef>
-            <a:fillRef idx="1">
-              <a:schemeClr val="accent1"/>
-            </a:fillRef>
-            <a:effectRef idx="0">
-              <a:schemeClr val="accent1"/>
-            </a:effectRef>
-            <a:fontRef idx="minor">
-              <a:schemeClr val="lt1"/>
-            </a:fontRef>
-          </p:style>
-          <p:txBody>
-            <a:bodyPr rtlCol="0" anchor="ctr"/>
-            <a:lstStyle/>
-            <a:p>
-              <a:pPr algn="ctr"/>
-              <a:endParaRPr lang="en-DE"/>
-            </a:p>
-          </p:txBody>
-        </p:sp>
-        <p:sp>
-          <p:nvSpPr>
-            <p:cNvPr id="116" name="Rectangle 115">
-              <a:extLst>
-                <a:ext uri="{FF2B5EF4-FFF2-40B4-BE49-F238E27FC236}">
-                  <a16:creationId xmlns:a16="http://schemas.microsoft.com/office/drawing/2014/main" id="{411AA053-4387-5BD5-6A8F-09545C419482}"/>
-                </a:ext>
-              </a:extLst>
-            </p:cNvPr>
-            <p:cNvSpPr/>
-            <p:nvPr/>
-          </p:nvSpPr>
-          <p:spPr>
-            <a:xfrm>
-              <a:off x="774464" y="1975853"/>
-              <a:ext cx="241560" cy="247507"/>
-            </a:xfrm>
-            <a:prstGeom prst="rect">
-              <a:avLst/>
-            </a:prstGeom>
-            <a:solidFill>
-              <a:schemeClr val="bg1"/>
-            </a:solidFill>
-          </p:spPr>
-          <p:style>
-            <a:lnRef idx="2">
-              <a:schemeClr val="accent1">
-                <a:shade val="15000"/>
-              </a:schemeClr>
-            </a:lnRef>
-            <a:fillRef idx="1">
-              <a:schemeClr val="accent1"/>
-            </a:fillRef>
-            <a:effectRef idx="0">
-              <a:schemeClr val="accent1"/>
-            </a:effectRef>
-            <a:fontRef idx="minor">
-              <a:schemeClr val="lt1"/>
-            </a:fontRef>
-          </p:style>
-          <p:txBody>
-            <a:bodyPr rtlCol="0" anchor="ctr"/>
-            <a:lstStyle/>
-            <a:p>
-              <a:pPr algn="ctr"/>
-              <a:endParaRPr lang="en-DE"/>
-            </a:p>
-          </p:txBody>
-        </p:sp>
-        <p:sp>
-          <p:nvSpPr>
-            <p:cNvPr id="117" name="Rectangle 116">
-              <a:extLst>
-                <a:ext uri="{FF2B5EF4-FFF2-40B4-BE49-F238E27FC236}">
-                  <a16:creationId xmlns:a16="http://schemas.microsoft.com/office/drawing/2014/main" id="{0C733731-F9A9-882D-6D2F-65442355F2E2}"/>
-                </a:ext>
-              </a:extLst>
-            </p:cNvPr>
-            <p:cNvSpPr/>
-            <p:nvPr/>
-          </p:nvSpPr>
-          <p:spPr>
-            <a:xfrm>
-              <a:off x="1016024" y="1975853"/>
-              <a:ext cx="241560" cy="247507"/>
-            </a:xfrm>
-            <a:prstGeom prst="rect">
-              <a:avLst/>
-            </a:prstGeom>
-            <a:solidFill>
-              <a:schemeClr val="bg2">
-                <a:lumMod val="50000"/>
-              </a:schemeClr>
-            </a:solidFill>
-          </p:spPr>
-          <p:style>
-            <a:lnRef idx="2">
-              <a:schemeClr val="accent1">
-                <a:shade val="15000"/>
-              </a:schemeClr>
-            </a:lnRef>
-            <a:fillRef idx="1">
-              <a:schemeClr val="accent1"/>
-            </a:fillRef>
-            <a:effectRef idx="0">
-              <a:schemeClr val="accent1"/>
-            </a:effectRef>
-            <a:fontRef idx="minor">
-              <a:schemeClr val="lt1"/>
-            </a:fontRef>
-          </p:style>
-          <p:txBody>
-            <a:bodyPr rtlCol="0" anchor="ctr"/>
-            <a:lstStyle/>
-            <a:p>
-              <a:pPr algn="ctr"/>
-              <a:endParaRPr lang="en-DE"/>
-            </a:p>
-          </p:txBody>
-        </p:sp>
-      </p:grpSp>
-      <p:sp>
-        <p:nvSpPr>
-          <p:cNvPr id="119" name="TextBox 118">
-            <a:extLst>
-              <a:ext uri="{FF2B5EF4-FFF2-40B4-BE49-F238E27FC236}">
-                <a16:creationId xmlns:a16="http://schemas.microsoft.com/office/drawing/2014/main" id="{F9CCB000-1962-9422-5FB6-239D625D80FF}"/>
-              </a:ext>
-            </a:extLst>
-          </p:cNvPr>
-          <p:cNvSpPr txBox="1"/>
-          <p:nvPr/>
-        </p:nvSpPr>
-        <p:spPr>
-          <a:xfrm>
-            <a:off x="1092267" y="793793"/>
-            <a:ext cx="444352" cy="369332"/>
-          </a:xfrm>
-          <a:prstGeom prst="rect">
-            <a:avLst/>
-          </a:prstGeom>
-          <a:noFill/>
-        </p:spPr>
-        <p:txBody>
-          <a:bodyPr wrap="none" rtlCol="0">
-            <a:spAutoFit/>
-          </a:bodyPr>
-          <a:lstStyle/>
-          <a:p>
-            <a:r>
-              <a:rPr lang="en-DE" dirty="0"/>
-              <a:t>2D</a:t>
-            </a:r>
-          </a:p>
-        </p:txBody>
-      </p:sp>
       <p:sp>
         <p:nvSpPr>
           <p:cNvPr id="120" name="TextBox 119">
@@ -6161,164 +5514,838 @@
           </a:p>
         </p:txBody>
       </p:sp>
-      <p:cxnSp>
-        <p:nvCxnSpPr>
-          <p:cNvPr id="123" name="Straight Arrow Connector 122">
+      <p:grpSp>
+        <p:nvGrpSpPr>
+          <p:cNvPr id="2" name="Group 1">
             <a:extLst>
               <a:ext uri="{FF2B5EF4-FFF2-40B4-BE49-F238E27FC236}">
-                <a16:creationId xmlns:a16="http://schemas.microsoft.com/office/drawing/2014/main" id="{64843B2C-A281-D176-CC92-0A52C6D4C903}"/>
+                <a16:creationId xmlns:a16="http://schemas.microsoft.com/office/drawing/2014/main" id="{7AFCA294-45DC-79E8-53DA-74F3F7275039}"/>
               </a:ext>
             </a:extLst>
           </p:cNvPr>
-          <p:cNvCxnSpPr/>
+          <p:cNvGrpSpPr/>
           <p:nvPr/>
-        </p:nvCxnSpPr>
-        <p:spPr>
+        </p:nvGrpSpPr>
+        <p:grpSpPr>
           <a:xfrm>
-            <a:off x="1152400" y="2338982"/>
-            <a:ext cx="1095324" cy="0"/>
+            <a:off x="791944" y="793793"/>
+            <a:ext cx="1509238" cy="1981126"/>
+            <a:chOff x="791944" y="793793"/>
+            <a:chExt cx="1509238" cy="1981126"/>
           </a:xfrm>
-          <a:prstGeom prst="straightConnector1">
-            <a:avLst/>
-          </a:prstGeom>
-          <a:ln>
-            <a:solidFill>
+        </p:grpSpPr>
+        <p:grpSp>
+          <p:nvGrpSpPr>
+            <p:cNvPr id="118" name="Group 117">
+              <a:extLst>
+                <a:ext uri="{FF2B5EF4-FFF2-40B4-BE49-F238E27FC236}">
+                  <a16:creationId xmlns:a16="http://schemas.microsoft.com/office/drawing/2014/main" id="{50EC6309-037F-72D3-16F0-8393FFFE47D7}"/>
+                </a:ext>
+              </a:extLst>
+            </p:cNvPr>
+            <p:cNvGrpSpPr/>
+            <p:nvPr/>
+          </p:nvGrpSpPr>
+          <p:grpSpPr>
+            <a:xfrm>
+              <a:off x="1175929" y="1356626"/>
+              <a:ext cx="1125253" cy="870582"/>
+              <a:chOff x="288758" y="1473802"/>
+              <a:chExt cx="968826" cy="749558"/>
+            </a:xfrm>
+          </p:grpSpPr>
+          <p:sp>
+            <p:nvSpPr>
+              <p:cNvPr id="106" name="Rectangle 105">
+                <a:extLst>
+                  <a:ext uri="{FF2B5EF4-FFF2-40B4-BE49-F238E27FC236}">
+                    <a16:creationId xmlns:a16="http://schemas.microsoft.com/office/drawing/2014/main" id="{42D35C9C-C015-8075-E659-A9BEB96DEAB7}"/>
+                  </a:ext>
+                </a:extLst>
+              </p:cNvPr>
+              <p:cNvSpPr/>
+              <p:nvPr/>
+            </p:nvSpPr>
+            <p:spPr>
+              <a:xfrm>
+                <a:off x="288758" y="1473802"/>
+                <a:ext cx="241560" cy="247507"/>
+              </a:xfrm>
+              <a:prstGeom prst="rect">
+                <a:avLst/>
+              </a:prstGeom>
+              <a:solidFill>
+                <a:schemeClr val="bg1"/>
+              </a:solidFill>
+            </p:spPr>
+            <p:style>
+              <a:lnRef idx="2">
+                <a:schemeClr val="accent1">
+                  <a:shade val="15000"/>
+                </a:schemeClr>
+              </a:lnRef>
+              <a:fillRef idx="1">
+                <a:schemeClr val="accent1"/>
+              </a:fillRef>
+              <a:effectRef idx="0">
+                <a:schemeClr val="accent1"/>
+              </a:effectRef>
+              <a:fontRef idx="minor">
+                <a:schemeClr val="lt1"/>
+              </a:fontRef>
+            </p:style>
+            <p:txBody>
+              <a:bodyPr rtlCol="0" anchor="ctr"/>
+              <a:lstStyle/>
+              <a:p>
+                <a:pPr algn="ctr"/>
+                <a:endParaRPr lang="en-DE"/>
+              </a:p>
+            </p:txBody>
+          </p:sp>
+          <p:sp>
+            <p:nvSpPr>
+              <p:cNvPr id="107" name="Rectangle 106">
+                <a:extLst>
+                  <a:ext uri="{FF2B5EF4-FFF2-40B4-BE49-F238E27FC236}">
+                    <a16:creationId xmlns:a16="http://schemas.microsoft.com/office/drawing/2014/main" id="{C4EB93BD-65A5-074F-B644-FF1F10F30C79}"/>
+                  </a:ext>
+                </a:extLst>
+              </p:cNvPr>
+              <p:cNvSpPr/>
+              <p:nvPr/>
+            </p:nvSpPr>
+            <p:spPr>
+              <a:xfrm>
+                <a:off x="531611" y="1473802"/>
+                <a:ext cx="241560" cy="247507"/>
+              </a:xfrm>
+              <a:prstGeom prst="rect">
+                <a:avLst/>
+              </a:prstGeom>
+              <a:solidFill>
+                <a:schemeClr val="bg1">
+                  <a:lumMod val="75000"/>
+                </a:schemeClr>
+              </a:solidFill>
+            </p:spPr>
+            <p:style>
+              <a:lnRef idx="2">
+                <a:schemeClr val="accent1">
+                  <a:shade val="15000"/>
+                </a:schemeClr>
+              </a:lnRef>
+              <a:fillRef idx="1">
+                <a:schemeClr val="accent1"/>
+              </a:fillRef>
+              <a:effectRef idx="0">
+                <a:schemeClr val="accent1"/>
+              </a:effectRef>
+              <a:fontRef idx="minor">
+                <a:schemeClr val="lt1"/>
+              </a:fontRef>
+            </p:style>
+            <p:txBody>
+              <a:bodyPr rtlCol="0" anchor="ctr"/>
+              <a:lstStyle/>
+              <a:p>
+                <a:pPr algn="ctr"/>
+                <a:endParaRPr lang="en-DE"/>
+              </a:p>
+            </p:txBody>
+          </p:sp>
+          <p:sp>
+            <p:nvSpPr>
+              <p:cNvPr id="108" name="Rectangle 107">
+                <a:extLst>
+                  <a:ext uri="{FF2B5EF4-FFF2-40B4-BE49-F238E27FC236}">
+                    <a16:creationId xmlns:a16="http://schemas.microsoft.com/office/drawing/2014/main" id="{7A43E1F3-7AA6-0FBD-BDFB-B974DD89C92A}"/>
+                  </a:ext>
+                </a:extLst>
+              </p:cNvPr>
+              <p:cNvSpPr/>
+              <p:nvPr/>
+            </p:nvSpPr>
+            <p:spPr>
+              <a:xfrm>
+                <a:off x="774464" y="1473802"/>
+                <a:ext cx="241560" cy="247507"/>
+              </a:xfrm>
+              <a:prstGeom prst="rect">
+                <a:avLst/>
+              </a:prstGeom>
+              <a:solidFill>
+                <a:schemeClr val="bg1"/>
+              </a:solidFill>
+            </p:spPr>
+            <p:style>
+              <a:lnRef idx="2">
+                <a:schemeClr val="accent1">
+                  <a:shade val="15000"/>
+                </a:schemeClr>
+              </a:lnRef>
+              <a:fillRef idx="1">
+                <a:schemeClr val="accent1"/>
+              </a:fillRef>
+              <a:effectRef idx="0">
+                <a:schemeClr val="accent1"/>
+              </a:effectRef>
+              <a:fontRef idx="minor">
+                <a:schemeClr val="lt1"/>
+              </a:fontRef>
+            </p:style>
+            <p:txBody>
+              <a:bodyPr rtlCol="0" anchor="ctr"/>
+              <a:lstStyle/>
+              <a:p>
+                <a:pPr algn="ctr"/>
+                <a:endParaRPr lang="en-DE"/>
+              </a:p>
+            </p:txBody>
+          </p:sp>
+          <p:sp>
+            <p:nvSpPr>
+              <p:cNvPr id="109" name="Rectangle 108">
+                <a:extLst>
+                  <a:ext uri="{FF2B5EF4-FFF2-40B4-BE49-F238E27FC236}">
+                    <a16:creationId xmlns:a16="http://schemas.microsoft.com/office/drawing/2014/main" id="{843B0407-E657-E8C1-11B3-F849F13FE670}"/>
+                  </a:ext>
+                </a:extLst>
+              </p:cNvPr>
+              <p:cNvSpPr/>
+              <p:nvPr/>
+            </p:nvSpPr>
+            <p:spPr>
+              <a:xfrm>
+                <a:off x="1016024" y="1473802"/>
+                <a:ext cx="241560" cy="247507"/>
+              </a:xfrm>
+              <a:prstGeom prst="rect">
+                <a:avLst/>
+              </a:prstGeom>
+              <a:solidFill>
+                <a:schemeClr val="bg1"/>
+              </a:solidFill>
+            </p:spPr>
+            <p:style>
+              <a:lnRef idx="2">
+                <a:schemeClr val="accent1">
+                  <a:shade val="15000"/>
+                </a:schemeClr>
+              </a:lnRef>
+              <a:fillRef idx="1">
+                <a:schemeClr val="accent1"/>
+              </a:fillRef>
+              <a:effectRef idx="0">
+                <a:schemeClr val="accent1"/>
+              </a:effectRef>
+              <a:fontRef idx="minor">
+                <a:schemeClr val="lt1"/>
+              </a:fontRef>
+            </p:style>
+            <p:txBody>
+              <a:bodyPr rtlCol="0" anchor="ctr"/>
+              <a:lstStyle/>
+              <a:p>
+                <a:pPr algn="ctr"/>
+                <a:endParaRPr lang="en-DE"/>
+              </a:p>
+            </p:txBody>
+          </p:sp>
+          <p:sp>
+            <p:nvSpPr>
+              <p:cNvPr id="110" name="Rectangle 109">
+                <a:extLst>
+                  <a:ext uri="{FF2B5EF4-FFF2-40B4-BE49-F238E27FC236}">
+                    <a16:creationId xmlns:a16="http://schemas.microsoft.com/office/drawing/2014/main" id="{8FFABF46-4831-079A-068B-E9D11ED88C6D}"/>
+                  </a:ext>
+                </a:extLst>
+              </p:cNvPr>
+              <p:cNvSpPr/>
+              <p:nvPr/>
+            </p:nvSpPr>
+            <p:spPr>
+              <a:xfrm>
+                <a:off x="288758" y="1728346"/>
+                <a:ext cx="241560" cy="247507"/>
+              </a:xfrm>
+              <a:prstGeom prst="rect">
+                <a:avLst/>
+              </a:prstGeom>
+              <a:solidFill>
+                <a:schemeClr val="bg1"/>
+              </a:solidFill>
+            </p:spPr>
+            <p:style>
+              <a:lnRef idx="2">
+                <a:schemeClr val="accent1">
+                  <a:shade val="15000"/>
+                </a:schemeClr>
+              </a:lnRef>
+              <a:fillRef idx="1">
+                <a:schemeClr val="accent1"/>
+              </a:fillRef>
+              <a:effectRef idx="0">
+                <a:schemeClr val="accent1"/>
+              </a:effectRef>
+              <a:fontRef idx="minor">
+                <a:schemeClr val="lt1"/>
+              </a:fontRef>
+            </p:style>
+            <p:txBody>
+              <a:bodyPr rtlCol="0" anchor="ctr"/>
+              <a:lstStyle/>
+              <a:p>
+                <a:pPr algn="ctr"/>
+                <a:endParaRPr lang="en-DE"/>
+              </a:p>
+            </p:txBody>
+          </p:sp>
+          <p:sp>
+            <p:nvSpPr>
+              <p:cNvPr id="111" name="Rectangle 110">
+                <a:extLst>
+                  <a:ext uri="{FF2B5EF4-FFF2-40B4-BE49-F238E27FC236}">
+                    <a16:creationId xmlns:a16="http://schemas.microsoft.com/office/drawing/2014/main" id="{4439A069-1EEC-7D64-1E00-E70C1AFF2837}"/>
+                  </a:ext>
+                </a:extLst>
+              </p:cNvPr>
+              <p:cNvSpPr/>
+              <p:nvPr/>
+            </p:nvSpPr>
+            <p:spPr>
+              <a:xfrm>
+                <a:off x="531611" y="1728346"/>
+                <a:ext cx="241560" cy="247507"/>
+              </a:xfrm>
+              <a:prstGeom prst="rect">
+                <a:avLst/>
+              </a:prstGeom>
+              <a:solidFill>
+                <a:schemeClr val="bg1"/>
+              </a:solidFill>
+            </p:spPr>
+            <p:style>
+              <a:lnRef idx="2">
+                <a:schemeClr val="accent1">
+                  <a:shade val="15000"/>
+                </a:schemeClr>
+              </a:lnRef>
+              <a:fillRef idx="1">
+                <a:schemeClr val="accent1"/>
+              </a:fillRef>
+              <a:effectRef idx="0">
+                <a:schemeClr val="accent1"/>
+              </a:effectRef>
+              <a:fontRef idx="minor">
+                <a:schemeClr val="lt1"/>
+              </a:fontRef>
+            </p:style>
+            <p:txBody>
+              <a:bodyPr rtlCol="0" anchor="ctr"/>
+              <a:lstStyle/>
+              <a:p>
+                <a:pPr algn="ctr"/>
+                <a:endParaRPr lang="en-DE"/>
+              </a:p>
+            </p:txBody>
+          </p:sp>
+          <p:sp>
+            <p:nvSpPr>
+              <p:cNvPr id="112" name="Rectangle 111">
+                <a:extLst>
+                  <a:ext uri="{FF2B5EF4-FFF2-40B4-BE49-F238E27FC236}">
+                    <a16:creationId xmlns:a16="http://schemas.microsoft.com/office/drawing/2014/main" id="{DCA09095-1852-ACAC-A948-9F7EC5F384CD}"/>
+                  </a:ext>
+                </a:extLst>
+              </p:cNvPr>
+              <p:cNvSpPr/>
+              <p:nvPr/>
+            </p:nvSpPr>
+            <p:spPr>
+              <a:xfrm>
+                <a:off x="774464" y="1728346"/>
+                <a:ext cx="241560" cy="247507"/>
+              </a:xfrm>
+              <a:prstGeom prst="rect">
+                <a:avLst/>
+              </a:prstGeom>
+              <a:solidFill>
+                <a:schemeClr val="tx1">
+                  <a:lumMod val="65000"/>
+                  <a:lumOff val="35000"/>
+                </a:schemeClr>
+              </a:solidFill>
+            </p:spPr>
+            <p:style>
+              <a:lnRef idx="2">
+                <a:schemeClr val="accent1">
+                  <a:shade val="15000"/>
+                </a:schemeClr>
+              </a:lnRef>
+              <a:fillRef idx="1">
+                <a:schemeClr val="accent1"/>
+              </a:fillRef>
+              <a:effectRef idx="0">
+                <a:schemeClr val="accent1"/>
+              </a:effectRef>
+              <a:fontRef idx="minor">
+                <a:schemeClr val="lt1"/>
+              </a:fontRef>
+            </p:style>
+            <p:txBody>
+              <a:bodyPr rtlCol="0" anchor="ctr"/>
+              <a:lstStyle/>
+              <a:p>
+                <a:pPr algn="ctr"/>
+                <a:endParaRPr lang="en-DE"/>
+              </a:p>
+            </p:txBody>
+          </p:sp>
+          <p:sp>
+            <p:nvSpPr>
+              <p:cNvPr id="113" name="Rectangle 112">
+                <a:extLst>
+                  <a:ext uri="{FF2B5EF4-FFF2-40B4-BE49-F238E27FC236}">
+                    <a16:creationId xmlns:a16="http://schemas.microsoft.com/office/drawing/2014/main" id="{4B280FD6-BF40-05D9-4502-CA3A6904C205}"/>
+                  </a:ext>
+                </a:extLst>
+              </p:cNvPr>
+              <p:cNvSpPr/>
+              <p:nvPr/>
+            </p:nvSpPr>
+            <p:spPr>
+              <a:xfrm>
+                <a:off x="1016024" y="1728346"/>
+                <a:ext cx="241560" cy="247507"/>
+              </a:xfrm>
+              <a:prstGeom prst="rect">
+                <a:avLst/>
+              </a:prstGeom>
+              <a:solidFill>
+                <a:schemeClr val="bg1"/>
+              </a:solidFill>
+            </p:spPr>
+            <p:style>
+              <a:lnRef idx="2">
+                <a:schemeClr val="accent1">
+                  <a:shade val="15000"/>
+                </a:schemeClr>
+              </a:lnRef>
+              <a:fillRef idx="1">
+                <a:schemeClr val="accent1"/>
+              </a:fillRef>
+              <a:effectRef idx="0">
+                <a:schemeClr val="accent1"/>
+              </a:effectRef>
+              <a:fontRef idx="minor">
+                <a:schemeClr val="lt1"/>
+              </a:fontRef>
+            </p:style>
+            <p:txBody>
+              <a:bodyPr rtlCol="0" anchor="ctr"/>
+              <a:lstStyle/>
+              <a:p>
+                <a:pPr algn="ctr"/>
+                <a:endParaRPr lang="en-DE"/>
+              </a:p>
+            </p:txBody>
+          </p:sp>
+          <p:sp>
+            <p:nvSpPr>
+              <p:cNvPr id="114" name="Rectangle 113">
+                <a:extLst>
+                  <a:ext uri="{FF2B5EF4-FFF2-40B4-BE49-F238E27FC236}">
+                    <a16:creationId xmlns:a16="http://schemas.microsoft.com/office/drawing/2014/main" id="{385AF1A6-AED9-2C60-BC7A-ED533744FB29}"/>
+                  </a:ext>
+                </a:extLst>
+              </p:cNvPr>
+              <p:cNvSpPr/>
+              <p:nvPr/>
+            </p:nvSpPr>
+            <p:spPr>
+              <a:xfrm>
+                <a:off x="288758" y="1975853"/>
+                <a:ext cx="241560" cy="247507"/>
+              </a:xfrm>
+              <a:prstGeom prst="rect">
+                <a:avLst/>
+              </a:prstGeom>
+              <a:solidFill>
+                <a:schemeClr val="bg1">
+                  <a:lumMod val="75000"/>
+                </a:schemeClr>
+              </a:solidFill>
+            </p:spPr>
+            <p:style>
+              <a:lnRef idx="2">
+                <a:schemeClr val="accent1">
+                  <a:shade val="15000"/>
+                </a:schemeClr>
+              </a:lnRef>
+              <a:fillRef idx="1">
+                <a:schemeClr val="accent1"/>
+              </a:fillRef>
+              <a:effectRef idx="0">
+                <a:schemeClr val="accent1"/>
+              </a:effectRef>
+              <a:fontRef idx="minor">
+                <a:schemeClr val="lt1"/>
+              </a:fontRef>
+            </p:style>
+            <p:txBody>
+              <a:bodyPr rtlCol="0" anchor="ctr"/>
+              <a:lstStyle/>
+              <a:p>
+                <a:pPr algn="ctr"/>
+                <a:endParaRPr lang="en-DE"/>
+              </a:p>
+            </p:txBody>
+          </p:sp>
+          <p:sp>
+            <p:nvSpPr>
+              <p:cNvPr id="115" name="Rectangle 114">
+                <a:extLst>
+                  <a:ext uri="{FF2B5EF4-FFF2-40B4-BE49-F238E27FC236}">
+                    <a16:creationId xmlns:a16="http://schemas.microsoft.com/office/drawing/2014/main" id="{5AC770B1-AE36-CD34-C13F-4F5BC339E74A}"/>
+                  </a:ext>
+                </a:extLst>
+              </p:cNvPr>
+              <p:cNvSpPr/>
+              <p:nvPr/>
+            </p:nvSpPr>
+            <p:spPr>
+              <a:xfrm>
+                <a:off x="531611" y="1975853"/>
+                <a:ext cx="241560" cy="247507"/>
+              </a:xfrm>
+              <a:prstGeom prst="rect">
+                <a:avLst/>
+              </a:prstGeom>
+              <a:solidFill>
+                <a:schemeClr val="bg1"/>
+              </a:solidFill>
+            </p:spPr>
+            <p:style>
+              <a:lnRef idx="2">
+                <a:schemeClr val="accent1">
+                  <a:shade val="15000"/>
+                </a:schemeClr>
+              </a:lnRef>
+              <a:fillRef idx="1">
+                <a:schemeClr val="accent1"/>
+              </a:fillRef>
+              <a:effectRef idx="0">
+                <a:schemeClr val="accent1"/>
+              </a:effectRef>
+              <a:fontRef idx="minor">
+                <a:schemeClr val="lt1"/>
+              </a:fontRef>
+            </p:style>
+            <p:txBody>
+              <a:bodyPr rtlCol="0" anchor="ctr"/>
+              <a:lstStyle/>
+              <a:p>
+                <a:pPr algn="ctr"/>
+                <a:endParaRPr lang="en-DE"/>
+              </a:p>
+            </p:txBody>
+          </p:sp>
+          <p:sp>
+            <p:nvSpPr>
+              <p:cNvPr id="116" name="Rectangle 115">
+                <a:extLst>
+                  <a:ext uri="{FF2B5EF4-FFF2-40B4-BE49-F238E27FC236}">
+                    <a16:creationId xmlns:a16="http://schemas.microsoft.com/office/drawing/2014/main" id="{411AA053-4387-5BD5-6A8F-09545C419482}"/>
+                  </a:ext>
+                </a:extLst>
+              </p:cNvPr>
+              <p:cNvSpPr/>
+              <p:nvPr/>
+            </p:nvSpPr>
+            <p:spPr>
+              <a:xfrm>
+                <a:off x="774464" y="1975853"/>
+                <a:ext cx="241560" cy="247507"/>
+              </a:xfrm>
+              <a:prstGeom prst="rect">
+                <a:avLst/>
+              </a:prstGeom>
+              <a:solidFill>
+                <a:schemeClr val="bg1"/>
+              </a:solidFill>
+            </p:spPr>
+            <p:style>
+              <a:lnRef idx="2">
+                <a:schemeClr val="accent1">
+                  <a:shade val="15000"/>
+                </a:schemeClr>
+              </a:lnRef>
+              <a:fillRef idx="1">
+                <a:schemeClr val="accent1"/>
+              </a:fillRef>
+              <a:effectRef idx="0">
+                <a:schemeClr val="accent1"/>
+              </a:effectRef>
+              <a:fontRef idx="minor">
+                <a:schemeClr val="lt1"/>
+              </a:fontRef>
+            </p:style>
+            <p:txBody>
+              <a:bodyPr rtlCol="0" anchor="ctr"/>
+              <a:lstStyle/>
+              <a:p>
+                <a:pPr algn="ctr"/>
+                <a:endParaRPr lang="en-DE"/>
+              </a:p>
+            </p:txBody>
+          </p:sp>
+          <p:sp>
+            <p:nvSpPr>
+              <p:cNvPr id="117" name="Rectangle 116">
+                <a:extLst>
+                  <a:ext uri="{FF2B5EF4-FFF2-40B4-BE49-F238E27FC236}">
+                    <a16:creationId xmlns:a16="http://schemas.microsoft.com/office/drawing/2014/main" id="{0C733731-F9A9-882D-6D2F-65442355F2E2}"/>
+                  </a:ext>
+                </a:extLst>
+              </p:cNvPr>
+              <p:cNvSpPr/>
+              <p:nvPr/>
+            </p:nvSpPr>
+            <p:spPr>
+              <a:xfrm>
+                <a:off x="1016024" y="1975853"/>
+                <a:ext cx="241560" cy="247507"/>
+              </a:xfrm>
+              <a:prstGeom prst="rect">
+                <a:avLst/>
+              </a:prstGeom>
+              <a:solidFill>
+                <a:schemeClr val="bg2">
+                  <a:lumMod val="50000"/>
+                </a:schemeClr>
+              </a:solidFill>
+            </p:spPr>
+            <p:style>
+              <a:lnRef idx="2">
+                <a:schemeClr val="accent1">
+                  <a:shade val="15000"/>
+                </a:schemeClr>
+              </a:lnRef>
+              <a:fillRef idx="1">
+                <a:schemeClr val="accent1"/>
+              </a:fillRef>
+              <a:effectRef idx="0">
+                <a:schemeClr val="accent1"/>
+              </a:effectRef>
+              <a:fontRef idx="minor">
+                <a:schemeClr val="lt1"/>
+              </a:fontRef>
+            </p:style>
+            <p:txBody>
+              <a:bodyPr rtlCol="0" anchor="ctr"/>
+              <a:lstStyle/>
+              <a:p>
+                <a:pPr algn="ctr"/>
+                <a:endParaRPr lang="en-DE"/>
+              </a:p>
+            </p:txBody>
+          </p:sp>
+        </p:grpSp>
+        <p:sp>
+          <p:nvSpPr>
+            <p:cNvPr id="119" name="TextBox 118">
+              <a:extLst>
+                <a:ext uri="{FF2B5EF4-FFF2-40B4-BE49-F238E27FC236}">
+                  <a16:creationId xmlns:a16="http://schemas.microsoft.com/office/drawing/2014/main" id="{F9CCB000-1962-9422-5FB6-239D625D80FF}"/>
+                </a:ext>
+              </a:extLst>
+            </p:cNvPr>
+            <p:cNvSpPr txBox="1"/>
+            <p:nvPr/>
+          </p:nvSpPr>
+          <p:spPr>
+            <a:xfrm>
+              <a:off x="1092267" y="793793"/>
+              <a:ext cx="444352" cy="369332"/>
+            </a:xfrm>
+            <a:prstGeom prst="rect">
+              <a:avLst/>
+            </a:prstGeom>
+            <a:noFill/>
+          </p:spPr>
+          <p:txBody>
+            <a:bodyPr wrap="none" rtlCol="0">
+              <a:spAutoFit/>
+            </a:bodyPr>
+            <a:lstStyle/>
+            <a:p>
+              <a:r>
+                <a:rPr lang="en-DE" dirty="0"/>
+                <a:t>2D</a:t>
+              </a:r>
+            </a:p>
+          </p:txBody>
+        </p:sp>
+        <p:cxnSp>
+          <p:nvCxnSpPr>
+            <p:cNvPr id="123" name="Straight Arrow Connector 122">
+              <a:extLst>
+                <a:ext uri="{FF2B5EF4-FFF2-40B4-BE49-F238E27FC236}">
+                  <a16:creationId xmlns:a16="http://schemas.microsoft.com/office/drawing/2014/main" id="{64843B2C-A281-D176-CC92-0A52C6D4C903}"/>
+                </a:ext>
+              </a:extLst>
+            </p:cNvPr>
+            <p:cNvCxnSpPr/>
+            <p:nvPr/>
+          </p:nvCxnSpPr>
+          <p:spPr>
+            <a:xfrm>
+              <a:off x="1152400" y="2338982"/>
+              <a:ext cx="1095324" cy="0"/>
+            </a:xfrm>
+            <a:prstGeom prst="straightConnector1">
+              <a:avLst/>
+            </a:prstGeom>
+            <a:ln>
+              <a:solidFill>
+                <a:schemeClr val="tx1"/>
+              </a:solidFill>
+              <a:headEnd type="triangle" w="med" len="med"/>
+              <a:tailEnd type="triangle" w="med" len="med"/>
+            </a:ln>
+          </p:spPr>
+          <p:style>
+            <a:lnRef idx="1">
+              <a:schemeClr val="accent1"/>
+            </a:lnRef>
+            <a:fillRef idx="0">
+              <a:schemeClr val="accent1"/>
+            </a:fillRef>
+            <a:effectRef idx="0">
+              <a:schemeClr val="accent1"/>
+            </a:effectRef>
+            <a:fontRef idx="minor">
               <a:schemeClr val="tx1"/>
-            </a:solidFill>
-            <a:headEnd type="triangle" w="med" len="med"/>
-            <a:tailEnd type="triangle" w="med" len="med"/>
-          </a:ln>
-        </p:spPr>
-        <p:style>
-          <a:lnRef idx="1">
-            <a:schemeClr val="accent1"/>
-          </a:lnRef>
-          <a:fillRef idx="0">
-            <a:schemeClr val="accent1"/>
-          </a:fillRef>
-          <a:effectRef idx="0">
-            <a:schemeClr val="accent1"/>
-          </a:effectRef>
-          <a:fontRef idx="minor">
-            <a:schemeClr val="tx1"/>
-          </a:fontRef>
-        </p:style>
-      </p:cxnSp>
-      <p:cxnSp>
-        <p:nvCxnSpPr>
-          <p:cNvPr id="124" name="Straight Arrow Connector 123">
-            <a:extLst>
-              <a:ext uri="{FF2B5EF4-FFF2-40B4-BE49-F238E27FC236}">
-                <a16:creationId xmlns:a16="http://schemas.microsoft.com/office/drawing/2014/main" id="{AD179542-B81B-E3E4-BF32-C11B670187A7}"/>
-              </a:ext>
-            </a:extLst>
-          </p:cNvPr>
-          <p:cNvCxnSpPr>
-            <a:cxnSpLocks/>
-          </p:cNvCxnSpPr>
-          <p:nvPr/>
-        </p:nvCxnSpPr>
-        <p:spPr>
-          <a:xfrm flipV="1">
-            <a:off x="1073232" y="1325584"/>
-            <a:ext cx="0" cy="940840"/>
-          </a:xfrm>
-          <a:prstGeom prst="straightConnector1">
-            <a:avLst/>
-          </a:prstGeom>
-          <a:ln>
-            <a:solidFill>
+            </a:fontRef>
+          </p:style>
+        </p:cxnSp>
+        <p:cxnSp>
+          <p:nvCxnSpPr>
+            <p:cNvPr id="124" name="Straight Arrow Connector 123">
+              <a:extLst>
+                <a:ext uri="{FF2B5EF4-FFF2-40B4-BE49-F238E27FC236}">
+                  <a16:creationId xmlns:a16="http://schemas.microsoft.com/office/drawing/2014/main" id="{AD179542-B81B-E3E4-BF32-C11B670187A7}"/>
+                </a:ext>
+              </a:extLst>
+            </p:cNvPr>
+            <p:cNvCxnSpPr>
+              <a:cxnSpLocks/>
+            </p:cNvCxnSpPr>
+            <p:nvPr/>
+          </p:nvCxnSpPr>
+          <p:spPr>
+            <a:xfrm flipV="1">
+              <a:off x="1073232" y="1325584"/>
+              <a:ext cx="0" cy="940840"/>
+            </a:xfrm>
+            <a:prstGeom prst="straightConnector1">
+              <a:avLst/>
+            </a:prstGeom>
+            <a:ln>
+              <a:solidFill>
+                <a:schemeClr val="tx1"/>
+              </a:solidFill>
+              <a:headEnd type="triangle" w="med" len="med"/>
+              <a:tailEnd type="triangle" w="med" len="med"/>
+            </a:ln>
+          </p:spPr>
+          <p:style>
+            <a:lnRef idx="1">
+              <a:schemeClr val="accent1"/>
+            </a:lnRef>
+            <a:fillRef idx="0">
+              <a:schemeClr val="accent1"/>
+            </a:fillRef>
+            <a:effectRef idx="0">
+              <a:schemeClr val="accent1"/>
+            </a:effectRef>
+            <a:fontRef idx="minor">
               <a:schemeClr val="tx1"/>
-            </a:solidFill>
-            <a:headEnd type="triangle" w="med" len="med"/>
-            <a:tailEnd type="triangle" w="med" len="med"/>
-          </a:ln>
-        </p:spPr>
-        <p:style>
-          <a:lnRef idx="1">
-            <a:schemeClr val="accent1"/>
-          </a:lnRef>
-          <a:fillRef idx="0">
-            <a:schemeClr val="accent1"/>
-          </a:fillRef>
-          <a:effectRef idx="0">
-            <a:schemeClr val="accent1"/>
-          </a:effectRef>
-          <a:fontRef idx="minor">
-            <a:schemeClr val="tx1"/>
-          </a:fontRef>
-        </p:style>
-      </p:cxnSp>
-      <p:sp>
-        <p:nvSpPr>
-          <p:cNvPr id="127" name="TextBox 126">
-            <a:extLst>
-              <a:ext uri="{FF2B5EF4-FFF2-40B4-BE49-F238E27FC236}">
-                <a16:creationId xmlns:a16="http://schemas.microsoft.com/office/drawing/2014/main" id="{D9F0A4A8-20FA-6BEA-A5BC-8FDFD76D2782}"/>
-              </a:ext>
-            </a:extLst>
-          </p:cNvPr>
-          <p:cNvSpPr txBox="1"/>
-          <p:nvPr/>
-        </p:nvSpPr>
-        <p:spPr>
-          <a:xfrm>
-            <a:off x="1607466" y="2405587"/>
-            <a:ext cx="304892" cy="369332"/>
-          </a:xfrm>
-          <a:prstGeom prst="rect">
-            <a:avLst/>
-          </a:prstGeom>
-          <a:noFill/>
-        </p:spPr>
-        <p:txBody>
-          <a:bodyPr wrap="none" rtlCol="0">
-            <a:spAutoFit/>
-          </a:bodyPr>
-          <a:lstStyle/>
-          <a:p>
-            <a:r>
-              <a:rPr lang="en-DE" dirty="0"/>
-              <a:t>X</a:t>
-            </a:r>
-          </a:p>
-        </p:txBody>
-      </p:sp>
-      <p:sp>
-        <p:nvSpPr>
-          <p:cNvPr id="128" name="TextBox 127">
-            <a:extLst>
-              <a:ext uri="{FF2B5EF4-FFF2-40B4-BE49-F238E27FC236}">
-                <a16:creationId xmlns:a16="http://schemas.microsoft.com/office/drawing/2014/main" id="{0A9BE715-4007-D9DF-B935-D16AA8B45DBB}"/>
-              </a:ext>
-            </a:extLst>
-          </p:cNvPr>
-          <p:cNvSpPr txBox="1"/>
-          <p:nvPr/>
-        </p:nvSpPr>
-        <p:spPr>
-          <a:xfrm>
-            <a:off x="791944" y="1500361"/>
-            <a:ext cx="304892" cy="369332"/>
-          </a:xfrm>
-          <a:prstGeom prst="rect">
-            <a:avLst/>
-          </a:prstGeom>
-          <a:noFill/>
-        </p:spPr>
-        <p:txBody>
-          <a:bodyPr wrap="none" rtlCol="0">
-            <a:spAutoFit/>
-          </a:bodyPr>
-          <a:lstStyle/>
-          <a:p>
-            <a:r>
-              <a:rPr lang="en-DE" dirty="0"/>
-              <a:t>Y</a:t>
-            </a:r>
-          </a:p>
-        </p:txBody>
-      </p:sp>
+            </a:fontRef>
+          </p:style>
+        </p:cxnSp>
+        <p:sp>
+          <p:nvSpPr>
+            <p:cNvPr id="127" name="TextBox 126">
+              <a:extLst>
+                <a:ext uri="{FF2B5EF4-FFF2-40B4-BE49-F238E27FC236}">
+                  <a16:creationId xmlns:a16="http://schemas.microsoft.com/office/drawing/2014/main" id="{D9F0A4A8-20FA-6BEA-A5BC-8FDFD76D2782}"/>
+                </a:ext>
+              </a:extLst>
+            </p:cNvPr>
+            <p:cNvSpPr txBox="1"/>
+            <p:nvPr/>
+          </p:nvSpPr>
+          <p:spPr>
+            <a:xfrm>
+              <a:off x="1607466" y="2405587"/>
+              <a:ext cx="304892" cy="369332"/>
+            </a:xfrm>
+            <a:prstGeom prst="rect">
+              <a:avLst/>
+            </a:prstGeom>
+            <a:noFill/>
+          </p:spPr>
+          <p:txBody>
+            <a:bodyPr wrap="none" rtlCol="0">
+              <a:spAutoFit/>
+            </a:bodyPr>
+            <a:lstStyle/>
+            <a:p>
+              <a:r>
+                <a:rPr lang="en-DE" dirty="0"/>
+                <a:t>X</a:t>
+              </a:r>
+            </a:p>
+          </p:txBody>
+        </p:sp>
+        <p:sp>
+          <p:nvSpPr>
+            <p:cNvPr id="128" name="TextBox 127">
+              <a:extLst>
+                <a:ext uri="{FF2B5EF4-FFF2-40B4-BE49-F238E27FC236}">
+                  <a16:creationId xmlns:a16="http://schemas.microsoft.com/office/drawing/2014/main" id="{0A9BE715-4007-D9DF-B935-D16AA8B45DBB}"/>
+                </a:ext>
+              </a:extLst>
+            </p:cNvPr>
+            <p:cNvSpPr txBox="1"/>
+            <p:nvPr/>
+          </p:nvSpPr>
+          <p:spPr>
+            <a:xfrm>
+              <a:off x="791944" y="1500361"/>
+              <a:ext cx="304892" cy="369332"/>
+            </a:xfrm>
+            <a:prstGeom prst="rect">
+              <a:avLst/>
+            </a:prstGeom>
+            <a:noFill/>
+          </p:spPr>
+          <p:txBody>
+            <a:bodyPr wrap="none" rtlCol="0">
+              <a:spAutoFit/>
+            </a:bodyPr>
+            <a:lstStyle/>
+            <a:p>
+              <a:r>
+                <a:rPr lang="en-DE" dirty="0"/>
+                <a:t>Y</a:t>
+              </a:r>
+            </a:p>
+          </p:txBody>
+        </p:sp>
+      </p:grpSp>
       <p:cxnSp>
         <p:nvCxnSpPr>
           <p:cNvPr id="129" name="Straight Arrow Connector 128">
@@ -8724,6 +8751,5275 @@
 </p:sld>
 </file>
 
+<file path=ppt/slides/slide3.xml><?xml version="1.0" encoding="utf-8"?>
+<p:sld xmlns:a="http://schemas.openxmlformats.org/drawingml/2006/main" xmlns:r="http://schemas.openxmlformats.org/officeDocument/2006/relationships" xmlns:p="http://schemas.openxmlformats.org/presentationml/2006/main">
+  <p:cSld>
+    <p:spTree>
+      <p:nvGrpSpPr>
+        <p:cNvPr id="1" name=""/>
+        <p:cNvGrpSpPr/>
+        <p:nvPr/>
+      </p:nvGrpSpPr>
+      <p:grpSpPr>
+        <a:xfrm>
+          <a:off x="0" y="0"/>
+          <a:ext cx="0" cy="0"/>
+          <a:chOff x="0" y="0"/>
+          <a:chExt cx="0" cy="0"/>
+        </a:xfrm>
+      </p:grpSpPr>
+      <p:pic>
+        <p:nvPicPr>
+          <p:cNvPr id="8" name="Picture 7">
+            <a:extLst>
+              <a:ext uri="{FF2B5EF4-FFF2-40B4-BE49-F238E27FC236}">
+                <a16:creationId xmlns:a16="http://schemas.microsoft.com/office/drawing/2014/main" id="{F6B8B5B3-394A-0739-1F6E-293CFD4861D2}"/>
+              </a:ext>
+            </a:extLst>
+          </p:cNvPr>
+          <p:cNvPicPr>
+            <a:picLocks noChangeAspect="1"/>
+          </p:cNvPicPr>
+          <p:nvPr/>
+        </p:nvPicPr>
+        <p:blipFill>
+          <a:blip r:embed="rId2"/>
+          <a:stretch>
+            <a:fillRect/>
+          </a:stretch>
+        </p:blipFill>
+        <p:spPr>
+          <a:xfrm>
+            <a:off x="8204418" y="1676096"/>
+            <a:ext cx="3505807" cy="3505807"/>
+          </a:xfrm>
+          <a:prstGeom prst="rect">
+            <a:avLst/>
+          </a:prstGeom>
+        </p:spPr>
+      </p:pic>
+      <p:sp>
+        <p:nvSpPr>
+          <p:cNvPr id="12" name="TextBox 11">
+            <a:extLst>
+              <a:ext uri="{FF2B5EF4-FFF2-40B4-BE49-F238E27FC236}">
+                <a16:creationId xmlns:a16="http://schemas.microsoft.com/office/drawing/2014/main" id="{A25ED7E9-99AA-4FF3-6A14-B6C681050230}"/>
+              </a:ext>
+            </a:extLst>
+          </p:cNvPr>
+          <p:cNvSpPr txBox="1"/>
+          <p:nvPr/>
+        </p:nvSpPr>
+        <p:spPr>
+          <a:xfrm>
+            <a:off x="1784122" y="225669"/>
+            <a:ext cx="1122423" cy="369332"/>
+          </a:xfrm>
+          <a:prstGeom prst="rect">
+            <a:avLst/>
+          </a:prstGeom>
+          <a:noFill/>
+        </p:spPr>
+        <p:txBody>
+          <a:bodyPr wrap="none" rtlCol="0">
+            <a:spAutoFit/>
+          </a:bodyPr>
+          <a:lstStyle/>
+          <a:p>
+            <a:r>
+              <a:rPr lang="en-DE" dirty="0"/>
+              <a:t>Channel 1</a:t>
+            </a:r>
+          </a:p>
+        </p:txBody>
+      </p:sp>
+      <p:sp>
+        <p:nvSpPr>
+          <p:cNvPr id="13" name="TextBox 12">
+            <a:extLst>
+              <a:ext uri="{FF2B5EF4-FFF2-40B4-BE49-F238E27FC236}">
+                <a16:creationId xmlns:a16="http://schemas.microsoft.com/office/drawing/2014/main" id="{7908F974-950C-5CC5-89ED-B1700459BF42}"/>
+              </a:ext>
+            </a:extLst>
+          </p:cNvPr>
+          <p:cNvSpPr txBox="1"/>
+          <p:nvPr/>
+        </p:nvSpPr>
+        <p:spPr>
+          <a:xfrm>
+            <a:off x="1849784" y="2263375"/>
+            <a:ext cx="1122423" cy="369332"/>
+          </a:xfrm>
+          <a:prstGeom prst="rect">
+            <a:avLst/>
+          </a:prstGeom>
+          <a:noFill/>
+        </p:spPr>
+        <p:txBody>
+          <a:bodyPr wrap="none" rtlCol="0">
+            <a:spAutoFit/>
+          </a:bodyPr>
+          <a:lstStyle/>
+          <a:p>
+            <a:r>
+              <a:rPr lang="en-DE" dirty="0"/>
+              <a:t>Channel 2</a:t>
+            </a:r>
+          </a:p>
+        </p:txBody>
+      </p:sp>
+      <p:sp>
+        <p:nvSpPr>
+          <p:cNvPr id="14" name="TextBox 13">
+            <a:extLst>
+              <a:ext uri="{FF2B5EF4-FFF2-40B4-BE49-F238E27FC236}">
+                <a16:creationId xmlns:a16="http://schemas.microsoft.com/office/drawing/2014/main" id="{0AEECFD9-8D97-1157-0537-39CC3D6E7289}"/>
+              </a:ext>
+            </a:extLst>
+          </p:cNvPr>
+          <p:cNvSpPr txBox="1"/>
+          <p:nvPr/>
+        </p:nvSpPr>
+        <p:spPr>
+          <a:xfrm>
+            <a:off x="1817537" y="4095922"/>
+            <a:ext cx="1122423" cy="369332"/>
+          </a:xfrm>
+          <a:prstGeom prst="rect">
+            <a:avLst/>
+          </a:prstGeom>
+          <a:noFill/>
+        </p:spPr>
+        <p:txBody>
+          <a:bodyPr wrap="none" rtlCol="0">
+            <a:spAutoFit/>
+          </a:bodyPr>
+          <a:lstStyle/>
+          <a:p>
+            <a:r>
+              <a:rPr lang="en-DE" dirty="0"/>
+              <a:t>Channel 3</a:t>
+            </a:r>
+          </a:p>
+        </p:txBody>
+      </p:sp>
+      <p:sp>
+        <p:nvSpPr>
+          <p:cNvPr id="140" name="TextBox 139">
+            <a:extLst>
+              <a:ext uri="{FF2B5EF4-FFF2-40B4-BE49-F238E27FC236}">
+                <a16:creationId xmlns:a16="http://schemas.microsoft.com/office/drawing/2014/main" id="{1AE7B45C-5B8D-D486-676D-7B5673B444B9}"/>
+              </a:ext>
+            </a:extLst>
+          </p:cNvPr>
+          <p:cNvSpPr txBox="1"/>
+          <p:nvPr/>
+        </p:nvSpPr>
+        <p:spPr>
+          <a:xfrm>
+            <a:off x="8740226" y="1209160"/>
+            <a:ext cx="2605650" cy="369332"/>
+          </a:xfrm>
+          <a:prstGeom prst="rect">
+            <a:avLst/>
+          </a:prstGeom>
+          <a:noFill/>
+        </p:spPr>
+        <p:txBody>
+          <a:bodyPr wrap="none" rtlCol="0">
+            <a:spAutoFit/>
+          </a:bodyPr>
+          <a:lstStyle/>
+          <a:p>
+            <a:r>
+              <a:rPr lang="en-DE" dirty="0"/>
+              <a:t>Merged/</a:t>
+            </a:r>
+            <a:r>
+              <a:rPr lang="en-US" dirty="0"/>
+              <a:t>c</a:t>
+            </a:r>
+            <a:r>
+              <a:rPr lang="en-DE" dirty="0"/>
+              <a:t>omposite image</a:t>
+            </a:r>
+          </a:p>
+        </p:txBody>
+      </p:sp>
+      <p:grpSp>
+        <p:nvGrpSpPr>
+          <p:cNvPr id="237" name="Group 236">
+            <a:extLst>
+              <a:ext uri="{FF2B5EF4-FFF2-40B4-BE49-F238E27FC236}">
+                <a16:creationId xmlns:a16="http://schemas.microsoft.com/office/drawing/2014/main" id="{E19B6BF0-A657-8E45-4109-CC6043FF70AA}"/>
+              </a:ext>
+            </a:extLst>
+          </p:cNvPr>
+          <p:cNvGrpSpPr/>
+          <p:nvPr/>
+        </p:nvGrpSpPr>
+        <p:grpSpPr>
+          <a:xfrm>
+            <a:off x="5276245" y="4408155"/>
+            <a:ext cx="1357441" cy="532485"/>
+            <a:chOff x="177794" y="3163330"/>
+            <a:chExt cx="1357441" cy="532485"/>
+          </a:xfrm>
+          <a:solidFill>
+            <a:srgbClr val="00F3F0"/>
+          </a:solidFill>
+        </p:grpSpPr>
+        <p:sp>
+          <p:nvSpPr>
+            <p:cNvPr id="238" name="Cube 237">
+              <a:extLst>
+                <a:ext uri="{FF2B5EF4-FFF2-40B4-BE49-F238E27FC236}">
+                  <a16:creationId xmlns:a16="http://schemas.microsoft.com/office/drawing/2014/main" id="{3B98B188-E272-322E-F7C2-014FE34350A8}"/>
+                </a:ext>
+              </a:extLst>
+            </p:cNvPr>
+            <p:cNvSpPr/>
+            <p:nvPr/>
+          </p:nvSpPr>
+          <p:spPr>
+            <a:xfrm>
+              <a:off x="344688" y="3163330"/>
+              <a:ext cx="370702" cy="370702"/>
+            </a:xfrm>
+            <a:prstGeom prst="cube">
+              <a:avLst/>
+            </a:prstGeom>
+            <a:grpFill/>
+            <a:ln>
+              <a:solidFill>
+                <a:schemeClr val="tx1"/>
+              </a:solidFill>
+            </a:ln>
+          </p:spPr>
+          <p:style>
+            <a:lnRef idx="1">
+              <a:schemeClr val="accent5"/>
+            </a:lnRef>
+            <a:fillRef idx="2">
+              <a:schemeClr val="accent5"/>
+            </a:fillRef>
+            <a:effectRef idx="1">
+              <a:schemeClr val="accent5"/>
+            </a:effectRef>
+            <a:fontRef idx="minor">
+              <a:schemeClr val="dk1"/>
+            </a:fontRef>
+          </p:style>
+          <p:txBody>
+            <a:bodyPr rtlCol="0" anchor="ctr"/>
+            <a:lstStyle/>
+            <a:p>
+              <a:pPr algn="ctr"/>
+              <a:endParaRPr lang="en-DE"/>
+            </a:p>
+          </p:txBody>
+        </p:sp>
+        <p:sp>
+          <p:nvSpPr>
+            <p:cNvPr id="239" name="Cube 238">
+              <a:extLst>
+                <a:ext uri="{FF2B5EF4-FFF2-40B4-BE49-F238E27FC236}">
+                  <a16:creationId xmlns:a16="http://schemas.microsoft.com/office/drawing/2014/main" id="{82209A2D-F216-9DEB-ED47-985AC26F2313}"/>
+                </a:ext>
+              </a:extLst>
+            </p:cNvPr>
+            <p:cNvSpPr/>
+            <p:nvPr/>
+          </p:nvSpPr>
+          <p:spPr>
+            <a:xfrm>
+              <a:off x="616535" y="3163330"/>
+              <a:ext cx="370702" cy="370702"/>
+            </a:xfrm>
+            <a:prstGeom prst="cube">
+              <a:avLst/>
+            </a:prstGeom>
+            <a:grpFill/>
+            <a:ln>
+              <a:solidFill>
+                <a:schemeClr val="tx1"/>
+              </a:solidFill>
+            </a:ln>
+          </p:spPr>
+          <p:style>
+            <a:lnRef idx="1">
+              <a:schemeClr val="accent5"/>
+            </a:lnRef>
+            <a:fillRef idx="2">
+              <a:schemeClr val="accent5"/>
+            </a:fillRef>
+            <a:effectRef idx="1">
+              <a:schemeClr val="accent5"/>
+            </a:effectRef>
+            <a:fontRef idx="minor">
+              <a:schemeClr val="dk1"/>
+            </a:fontRef>
+          </p:style>
+          <p:txBody>
+            <a:bodyPr rtlCol="0" anchor="ctr"/>
+            <a:lstStyle/>
+            <a:p>
+              <a:pPr algn="ctr"/>
+              <a:endParaRPr lang="en-DE"/>
+            </a:p>
+          </p:txBody>
+        </p:sp>
+        <p:sp>
+          <p:nvSpPr>
+            <p:cNvPr id="240" name="Cube 239">
+              <a:extLst>
+                <a:ext uri="{FF2B5EF4-FFF2-40B4-BE49-F238E27FC236}">
+                  <a16:creationId xmlns:a16="http://schemas.microsoft.com/office/drawing/2014/main" id="{3D1732B0-11CD-0A2F-C366-957F382C7BD7}"/>
+                </a:ext>
+              </a:extLst>
+            </p:cNvPr>
+            <p:cNvSpPr/>
+            <p:nvPr/>
+          </p:nvSpPr>
+          <p:spPr>
+            <a:xfrm>
+              <a:off x="888382" y="3163330"/>
+              <a:ext cx="370702" cy="370702"/>
+            </a:xfrm>
+            <a:prstGeom prst="cube">
+              <a:avLst/>
+            </a:prstGeom>
+            <a:grpFill/>
+            <a:ln>
+              <a:solidFill>
+                <a:schemeClr val="tx1"/>
+              </a:solidFill>
+            </a:ln>
+          </p:spPr>
+          <p:style>
+            <a:lnRef idx="1">
+              <a:schemeClr val="accent5"/>
+            </a:lnRef>
+            <a:fillRef idx="2">
+              <a:schemeClr val="accent5"/>
+            </a:fillRef>
+            <a:effectRef idx="1">
+              <a:schemeClr val="accent5"/>
+            </a:effectRef>
+            <a:fontRef idx="minor">
+              <a:schemeClr val="dk1"/>
+            </a:fontRef>
+          </p:style>
+          <p:txBody>
+            <a:bodyPr rtlCol="0" anchor="ctr"/>
+            <a:lstStyle/>
+            <a:p>
+              <a:pPr algn="ctr"/>
+              <a:endParaRPr lang="en-DE"/>
+            </a:p>
+          </p:txBody>
+        </p:sp>
+        <p:sp>
+          <p:nvSpPr>
+            <p:cNvPr id="241" name="Cube 240">
+              <a:extLst>
+                <a:ext uri="{FF2B5EF4-FFF2-40B4-BE49-F238E27FC236}">
+                  <a16:creationId xmlns:a16="http://schemas.microsoft.com/office/drawing/2014/main" id="{8821E0B8-3487-06ED-0601-DA7BE01B997F}"/>
+                </a:ext>
+              </a:extLst>
+            </p:cNvPr>
+            <p:cNvSpPr/>
+            <p:nvPr/>
+          </p:nvSpPr>
+          <p:spPr>
+            <a:xfrm>
+              <a:off x="261435" y="3243649"/>
+              <a:ext cx="370702" cy="370702"/>
+            </a:xfrm>
+            <a:prstGeom prst="cube">
+              <a:avLst/>
+            </a:prstGeom>
+            <a:grpFill/>
+            <a:ln>
+              <a:solidFill>
+                <a:schemeClr val="tx1"/>
+              </a:solidFill>
+            </a:ln>
+          </p:spPr>
+          <p:style>
+            <a:lnRef idx="1">
+              <a:schemeClr val="accent5"/>
+            </a:lnRef>
+            <a:fillRef idx="2">
+              <a:schemeClr val="accent5"/>
+            </a:fillRef>
+            <a:effectRef idx="1">
+              <a:schemeClr val="accent5"/>
+            </a:effectRef>
+            <a:fontRef idx="minor">
+              <a:schemeClr val="dk1"/>
+            </a:fontRef>
+          </p:style>
+          <p:txBody>
+            <a:bodyPr rtlCol="0" anchor="ctr"/>
+            <a:lstStyle/>
+            <a:p>
+              <a:pPr algn="ctr"/>
+              <a:endParaRPr lang="en-DE"/>
+            </a:p>
+          </p:txBody>
+        </p:sp>
+        <p:sp>
+          <p:nvSpPr>
+            <p:cNvPr id="242" name="Cube 241">
+              <a:extLst>
+                <a:ext uri="{FF2B5EF4-FFF2-40B4-BE49-F238E27FC236}">
+                  <a16:creationId xmlns:a16="http://schemas.microsoft.com/office/drawing/2014/main" id="{A50AF0AA-D563-EB4E-4D1C-4F10F8E35DBC}"/>
+                </a:ext>
+              </a:extLst>
+            </p:cNvPr>
+            <p:cNvSpPr/>
+            <p:nvPr/>
+          </p:nvSpPr>
+          <p:spPr>
+            <a:xfrm>
+              <a:off x="533282" y="3243649"/>
+              <a:ext cx="370702" cy="370702"/>
+            </a:xfrm>
+            <a:prstGeom prst="cube">
+              <a:avLst/>
+            </a:prstGeom>
+            <a:grpFill/>
+            <a:ln>
+              <a:solidFill>
+                <a:schemeClr val="tx1"/>
+              </a:solidFill>
+            </a:ln>
+          </p:spPr>
+          <p:style>
+            <a:lnRef idx="1">
+              <a:schemeClr val="accent5"/>
+            </a:lnRef>
+            <a:fillRef idx="2">
+              <a:schemeClr val="accent5"/>
+            </a:fillRef>
+            <a:effectRef idx="1">
+              <a:schemeClr val="accent5"/>
+            </a:effectRef>
+            <a:fontRef idx="minor">
+              <a:schemeClr val="dk1"/>
+            </a:fontRef>
+          </p:style>
+          <p:txBody>
+            <a:bodyPr rtlCol="0" anchor="ctr"/>
+            <a:lstStyle/>
+            <a:p>
+              <a:pPr algn="ctr"/>
+              <a:endParaRPr lang="en-DE"/>
+            </a:p>
+          </p:txBody>
+        </p:sp>
+        <p:sp>
+          <p:nvSpPr>
+            <p:cNvPr id="243" name="Cube 242">
+              <a:extLst>
+                <a:ext uri="{FF2B5EF4-FFF2-40B4-BE49-F238E27FC236}">
+                  <a16:creationId xmlns:a16="http://schemas.microsoft.com/office/drawing/2014/main" id="{1E14C2DC-7B8C-89B6-72FC-BAE4E9734968}"/>
+                </a:ext>
+              </a:extLst>
+            </p:cNvPr>
+            <p:cNvSpPr/>
+            <p:nvPr/>
+          </p:nvSpPr>
+          <p:spPr>
+            <a:xfrm>
+              <a:off x="811616" y="3243649"/>
+              <a:ext cx="370702" cy="370702"/>
+            </a:xfrm>
+            <a:prstGeom prst="cube">
+              <a:avLst/>
+            </a:prstGeom>
+            <a:grpFill/>
+            <a:ln>
+              <a:solidFill>
+                <a:schemeClr val="tx1"/>
+              </a:solidFill>
+            </a:ln>
+          </p:spPr>
+          <p:style>
+            <a:lnRef idx="1">
+              <a:schemeClr val="accent5"/>
+            </a:lnRef>
+            <a:fillRef idx="2">
+              <a:schemeClr val="accent5"/>
+            </a:fillRef>
+            <a:effectRef idx="1">
+              <a:schemeClr val="accent5"/>
+            </a:effectRef>
+            <a:fontRef idx="minor">
+              <a:schemeClr val="dk1"/>
+            </a:fontRef>
+          </p:style>
+          <p:txBody>
+            <a:bodyPr rtlCol="0" anchor="ctr"/>
+            <a:lstStyle/>
+            <a:p>
+              <a:pPr algn="ctr"/>
+              <a:endParaRPr lang="en-DE"/>
+            </a:p>
+          </p:txBody>
+        </p:sp>
+        <p:sp>
+          <p:nvSpPr>
+            <p:cNvPr id="244" name="Cube 243">
+              <a:extLst>
+                <a:ext uri="{FF2B5EF4-FFF2-40B4-BE49-F238E27FC236}">
+                  <a16:creationId xmlns:a16="http://schemas.microsoft.com/office/drawing/2014/main" id="{A1E97B22-193D-E3B7-3CD0-5BAA41AF6EAE}"/>
+                </a:ext>
+              </a:extLst>
+            </p:cNvPr>
+            <p:cNvSpPr/>
+            <p:nvPr/>
+          </p:nvSpPr>
+          <p:spPr>
+            <a:xfrm>
+              <a:off x="177794" y="3323968"/>
+              <a:ext cx="370702" cy="370702"/>
+            </a:xfrm>
+            <a:prstGeom prst="cube">
+              <a:avLst/>
+            </a:prstGeom>
+            <a:grpFill/>
+            <a:ln>
+              <a:solidFill>
+                <a:schemeClr val="tx1"/>
+              </a:solidFill>
+            </a:ln>
+          </p:spPr>
+          <p:style>
+            <a:lnRef idx="1">
+              <a:schemeClr val="accent5"/>
+            </a:lnRef>
+            <a:fillRef idx="2">
+              <a:schemeClr val="accent5"/>
+            </a:fillRef>
+            <a:effectRef idx="1">
+              <a:schemeClr val="accent5"/>
+            </a:effectRef>
+            <a:fontRef idx="minor">
+              <a:schemeClr val="dk1"/>
+            </a:fontRef>
+          </p:style>
+          <p:txBody>
+            <a:bodyPr rtlCol="0" anchor="ctr"/>
+            <a:lstStyle/>
+            <a:p>
+              <a:pPr algn="ctr"/>
+              <a:endParaRPr lang="en-DE"/>
+            </a:p>
+          </p:txBody>
+        </p:sp>
+        <p:sp>
+          <p:nvSpPr>
+            <p:cNvPr id="245" name="Cube 244">
+              <a:extLst>
+                <a:ext uri="{FF2B5EF4-FFF2-40B4-BE49-F238E27FC236}">
+                  <a16:creationId xmlns:a16="http://schemas.microsoft.com/office/drawing/2014/main" id="{9867FB8E-6FEB-D7FD-1ACC-DC7E3792E572}"/>
+                </a:ext>
+              </a:extLst>
+            </p:cNvPr>
+            <p:cNvSpPr/>
+            <p:nvPr/>
+          </p:nvSpPr>
+          <p:spPr>
+            <a:xfrm>
+              <a:off x="458368" y="3323968"/>
+              <a:ext cx="370702" cy="370702"/>
+            </a:xfrm>
+            <a:prstGeom prst="cube">
+              <a:avLst/>
+            </a:prstGeom>
+            <a:grpFill/>
+            <a:ln>
+              <a:solidFill>
+                <a:schemeClr val="tx1"/>
+              </a:solidFill>
+            </a:ln>
+          </p:spPr>
+          <p:style>
+            <a:lnRef idx="1">
+              <a:schemeClr val="accent5"/>
+            </a:lnRef>
+            <a:fillRef idx="2">
+              <a:schemeClr val="accent5"/>
+            </a:fillRef>
+            <a:effectRef idx="1">
+              <a:schemeClr val="accent5"/>
+            </a:effectRef>
+            <a:fontRef idx="minor">
+              <a:schemeClr val="dk1"/>
+            </a:fontRef>
+          </p:style>
+          <p:txBody>
+            <a:bodyPr rtlCol="0" anchor="ctr"/>
+            <a:lstStyle/>
+            <a:p>
+              <a:pPr algn="ctr"/>
+              <a:endParaRPr lang="en-DE"/>
+            </a:p>
+          </p:txBody>
+        </p:sp>
+        <p:sp>
+          <p:nvSpPr>
+            <p:cNvPr id="246" name="Cube 245">
+              <a:extLst>
+                <a:ext uri="{FF2B5EF4-FFF2-40B4-BE49-F238E27FC236}">
+                  <a16:creationId xmlns:a16="http://schemas.microsoft.com/office/drawing/2014/main" id="{883E4FFF-EFE6-8F09-F85D-0414476E71B1}"/>
+                </a:ext>
+              </a:extLst>
+            </p:cNvPr>
+            <p:cNvSpPr/>
+            <p:nvPr/>
+          </p:nvSpPr>
+          <p:spPr>
+            <a:xfrm>
+              <a:off x="737090" y="3323968"/>
+              <a:ext cx="370702" cy="370702"/>
+            </a:xfrm>
+            <a:prstGeom prst="cube">
+              <a:avLst/>
+            </a:prstGeom>
+            <a:grpFill/>
+            <a:ln>
+              <a:solidFill>
+                <a:schemeClr val="tx1"/>
+              </a:solidFill>
+            </a:ln>
+          </p:spPr>
+          <p:style>
+            <a:lnRef idx="1">
+              <a:schemeClr val="accent5"/>
+            </a:lnRef>
+            <a:fillRef idx="2">
+              <a:schemeClr val="accent5"/>
+            </a:fillRef>
+            <a:effectRef idx="1">
+              <a:schemeClr val="accent5"/>
+            </a:effectRef>
+            <a:fontRef idx="minor">
+              <a:schemeClr val="dk1"/>
+            </a:fontRef>
+          </p:style>
+          <p:txBody>
+            <a:bodyPr rtlCol="0" anchor="ctr"/>
+            <a:lstStyle/>
+            <a:p>
+              <a:pPr algn="ctr"/>
+              <a:endParaRPr lang="en-DE"/>
+            </a:p>
+          </p:txBody>
+        </p:sp>
+        <p:sp>
+          <p:nvSpPr>
+            <p:cNvPr id="247" name="Cube 246">
+              <a:extLst>
+                <a:ext uri="{FF2B5EF4-FFF2-40B4-BE49-F238E27FC236}">
+                  <a16:creationId xmlns:a16="http://schemas.microsoft.com/office/drawing/2014/main" id="{3DA69C0A-F4BE-04FA-D000-B78620C600C0}"/>
+                </a:ext>
+              </a:extLst>
+            </p:cNvPr>
+            <p:cNvSpPr/>
+            <p:nvPr/>
+          </p:nvSpPr>
+          <p:spPr>
+            <a:xfrm>
+              <a:off x="1164533" y="3164475"/>
+              <a:ext cx="370702" cy="370702"/>
+            </a:xfrm>
+            <a:prstGeom prst="cube">
+              <a:avLst/>
+            </a:prstGeom>
+            <a:grpFill/>
+            <a:ln>
+              <a:solidFill>
+                <a:schemeClr val="tx1"/>
+              </a:solidFill>
+            </a:ln>
+          </p:spPr>
+          <p:style>
+            <a:lnRef idx="1">
+              <a:schemeClr val="accent5"/>
+            </a:lnRef>
+            <a:fillRef idx="2">
+              <a:schemeClr val="accent5"/>
+            </a:fillRef>
+            <a:effectRef idx="1">
+              <a:schemeClr val="accent5"/>
+            </a:effectRef>
+            <a:fontRef idx="minor">
+              <a:schemeClr val="dk1"/>
+            </a:fontRef>
+          </p:style>
+          <p:txBody>
+            <a:bodyPr rtlCol="0" anchor="ctr"/>
+            <a:lstStyle/>
+            <a:p>
+              <a:pPr algn="ctr"/>
+              <a:endParaRPr lang="en-DE"/>
+            </a:p>
+          </p:txBody>
+        </p:sp>
+        <p:sp>
+          <p:nvSpPr>
+            <p:cNvPr id="248" name="Cube 247">
+              <a:extLst>
+                <a:ext uri="{FF2B5EF4-FFF2-40B4-BE49-F238E27FC236}">
+                  <a16:creationId xmlns:a16="http://schemas.microsoft.com/office/drawing/2014/main" id="{54A62FE5-4F64-B42E-B1AF-22F1C89B859C}"/>
+                </a:ext>
+              </a:extLst>
+            </p:cNvPr>
+            <p:cNvSpPr/>
+            <p:nvPr/>
+          </p:nvSpPr>
+          <p:spPr>
+            <a:xfrm>
+              <a:off x="1087767" y="3251669"/>
+              <a:ext cx="370702" cy="370702"/>
+            </a:xfrm>
+            <a:prstGeom prst="cube">
+              <a:avLst/>
+            </a:prstGeom>
+            <a:grpFill/>
+            <a:ln>
+              <a:solidFill>
+                <a:schemeClr val="tx1"/>
+              </a:solidFill>
+            </a:ln>
+          </p:spPr>
+          <p:style>
+            <a:lnRef idx="1">
+              <a:schemeClr val="accent5"/>
+            </a:lnRef>
+            <a:fillRef idx="2">
+              <a:schemeClr val="accent5"/>
+            </a:fillRef>
+            <a:effectRef idx="1">
+              <a:schemeClr val="accent5"/>
+            </a:effectRef>
+            <a:fontRef idx="minor">
+              <a:schemeClr val="dk1"/>
+            </a:fontRef>
+          </p:style>
+          <p:txBody>
+            <a:bodyPr rtlCol="0" anchor="ctr"/>
+            <a:lstStyle/>
+            <a:p>
+              <a:pPr algn="ctr"/>
+              <a:endParaRPr lang="en-DE"/>
+            </a:p>
+          </p:txBody>
+        </p:sp>
+        <p:sp>
+          <p:nvSpPr>
+            <p:cNvPr id="249" name="Cube 248">
+              <a:extLst>
+                <a:ext uri="{FF2B5EF4-FFF2-40B4-BE49-F238E27FC236}">
+                  <a16:creationId xmlns:a16="http://schemas.microsoft.com/office/drawing/2014/main" id="{89106EEE-E186-2572-B151-9EF23A7ECB0C}"/>
+                </a:ext>
+              </a:extLst>
+            </p:cNvPr>
+            <p:cNvSpPr/>
+            <p:nvPr/>
+          </p:nvSpPr>
+          <p:spPr>
+            <a:xfrm>
+              <a:off x="1013241" y="3325113"/>
+              <a:ext cx="370702" cy="370702"/>
+            </a:xfrm>
+            <a:prstGeom prst="cube">
+              <a:avLst/>
+            </a:prstGeom>
+            <a:grpFill/>
+            <a:ln>
+              <a:solidFill>
+                <a:schemeClr val="tx1"/>
+              </a:solidFill>
+            </a:ln>
+          </p:spPr>
+          <p:style>
+            <a:lnRef idx="1">
+              <a:schemeClr val="accent5"/>
+            </a:lnRef>
+            <a:fillRef idx="2">
+              <a:schemeClr val="accent5"/>
+            </a:fillRef>
+            <a:effectRef idx="1">
+              <a:schemeClr val="accent5"/>
+            </a:effectRef>
+            <a:fontRef idx="minor">
+              <a:schemeClr val="dk1"/>
+            </a:fontRef>
+          </p:style>
+          <p:txBody>
+            <a:bodyPr rtlCol="0" anchor="ctr"/>
+            <a:lstStyle/>
+            <a:p>
+              <a:pPr algn="ctr"/>
+              <a:endParaRPr lang="en-DE"/>
+            </a:p>
+          </p:txBody>
+        </p:sp>
+      </p:grpSp>
+      <p:grpSp>
+        <p:nvGrpSpPr>
+          <p:cNvPr id="250" name="Group 249">
+            <a:extLst>
+              <a:ext uri="{FF2B5EF4-FFF2-40B4-BE49-F238E27FC236}">
+                <a16:creationId xmlns:a16="http://schemas.microsoft.com/office/drawing/2014/main" id="{2F86B98E-4E02-E4F0-5F1E-6543E20D8699}"/>
+              </a:ext>
+            </a:extLst>
+          </p:cNvPr>
+          <p:cNvGrpSpPr/>
+          <p:nvPr/>
+        </p:nvGrpSpPr>
+        <p:grpSpPr>
+          <a:xfrm>
+            <a:off x="5276245" y="4044612"/>
+            <a:ext cx="1357441" cy="532485"/>
+            <a:chOff x="177794" y="3163330"/>
+            <a:chExt cx="1357441" cy="532485"/>
+          </a:xfrm>
+          <a:solidFill>
+            <a:srgbClr val="FFFF00"/>
+          </a:solidFill>
+        </p:grpSpPr>
+        <p:sp>
+          <p:nvSpPr>
+            <p:cNvPr id="251" name="Cube 250">
+              <a:extLst>
+                <a:ext uri="{FF2B5EF4-FFF2-40B4-BE49-F238E27FC236}">
+                  <a16:creationId xmlns:a16="http://schemas.microsoft.com/office/drawing/2014/main" id="{B3E8B8A3-C090-360F-8767-E06F36583F3C}"/>
+                </a:ext>
+              </a:extLst>
+            </p:cNvPr>
+            <p:cNvSpPr/>
+            <p:nvPr/>
+          </p:nvSpPr>
+          <p:spPr>
+            <a:xfrm>
+              <a:off x="344688" y="3163330"/>
+              <a:ext cx="370702" cy="370702"/>
+            </a:xfrm>
+            <a:prstGeom prst="cube">
+              <a:avLst/>
+            </a:prstGeom>
+            <a:grpFill/>
+          </p:spPr>
+          <p:style>
+            <a:lnRef idx="2">
+              <a:schemeClr val="accent1">
+                <a:shade val="15000"/>
+              </a:schemeClr>
+            </a:lnRef>
+            <a:fillRef idx="1">
+              <a:schemeClr val="accent1"/>
+            </a:fillRef>
+            <a:effectRef idx="0">
+              <a:schemeClr val="accent1"/>
+            </a:effectRef>
+            <a:fontRef idx="minor">
+              <a:schemeClr val="lt1"/>
+            </a:fontRef>
+          </p:style>
+          <p:txBody>
+            <a:bodyPr rtlCol="0" anchor="ctr"/>
+            <a:lstStyle/>
+            <a:p>
+              <a:pPr algn="ctr"/>
+              <a:endParaRPr lang="en-DE"/>
+            </a:p>
+          </p:txBody>
+        </p:sp>
+        <p:sp>
+          <p:nvSpPr>
+            <p:cNvPr id="252" name="Cube 251">
+              <a:extLst>
+                <a:ext uri="{FF2B5EF4-FFF2-40B4-BE49-F238E27FC236}">
+                  <a16:creationId xmlns:a16="http://schemas.microsoft.com/office/drawing/2014/main" id="{7B853F4C-389E-F738-7C94-918C852F0759}"/>
+                </a:ext>
+              </a:extLst>
+            </p:cNvPr>
+            <p:cNvSpPr/>
+            <p:nvPr/>
+          </p:nvSpPr>
+          <p:spPr>
+            <a:xfrm>
+              <a:off x="616535" y="3163330"/>
+              <a:ext cx="370702" cy="370702"/>
+            </a:xfrm>
+            <a:prstGeom prst="cube">
+              <a:avLst/>
+            </a:prstGeom>
+            <a:grpFill/>
+          </p:spPr>
+          <p:style>
+            <a:lnRef idx="2">
+              <a:schemeClr val="accent1">
+                <a:shade val="15000"/>
+              </a:schemeClr>
+            </a:lnRef>
+            <a:fillRef idx="1">
+              <a:schemeClr val="accent1"/>
+            </a:fillRef>
+            <a:effectRef idx="0">
+              <a:schemeClr val="accent1"/>
+            </a:effectRef>
+            <a:fontRef idx="minor">
+              <a:schemeClr val="lt1"/>
+            </a:fontRef>
+          </p:style>
+          <p:txBody>
+            <a:bodyPr rtlCol="0" anchor="ctr"/>
+            <a:lstStyle/>
+            <a:p>
+              <a:pPr algn="ctr"/>
+              <a:endParaRPr lang="en-DE"/>
+            </a:p>
+          </p:txBody>
+        </p:sp>
+        <p:sp>
+          <p:nvSpPr>
+            <p:cNvPr id="253" name="Cube 252">
+              <a:extLst>
+                <a:ext uri="{FF2B5EF4-FFF2-40B4-BE49-F238E27FC236}">
+                  <a16:creationId xmlns:a16="http://schemas.microsoft.com/office/drawing/2014/main" id="{6A17760F-AEF3-892B-0936-EC1B513B47A5}"/>
+                </a:ext>
+              </a:extLst>
+            </p:cNvPr>
+            <p:cNvSpPr/>
+            <p:nvPr/>
+          </p:nvSpPr>
+          <p:spPr>
+            <a:xfrm>
+              <a:off x="888382" y="3163330"/>
+              <a:ext cx="370702" cy="370702"/>
+            </a:xfrm>
+            <a:prstGeom prst="cube">
+              <a:avLst/>
+            </a:prstGeom>
+            <a:grpFill/>
+          </p:spPr>
+          <p:style>
+            <a:lnRef idx="2">
+              <a:schemeClr val="accent1">
+                <a:shade val="15000"/>
+              </a:schemeClr>
+            </a:lnRef>
+            <a:fillRef idx="1">
+              <a:schemeClr val="accent1"/>
+            </a:fillRef>
+            <a:effectRef idx="0">
+              <a:schemeClr val="accent1"/>
+            </a:effectRef>
+            <a:fontRef idx="minor">
+              <a:schemeClr val="lt1"/>
+            </a:fontRef>
+          </p:style>
+          <p:txBody>
+            <a:bodyPr rtlCol="0" anchor="ctr"/>
+            <a:lstStyle/>
+            <a:p>
+              <a:pPr algn="ctr"/>
+              <a:endParaRPr lang="en-DE"/>
+            </a:p>
+          </p:txBody>
+        </p:sp>
+        <p:sp>
+          <p:nvSpPr>
+            <p:cNvPr id="254" name="Cube 253">
+              <a:extLst>
+                <a:ext uri="{FF2B5EF4-FFF2-40B4-BE49-F238E27FC236}">
+                  <a16:creationId xmlns:a16="http://schemas.microsoft.com/office/drawing/2014/main" id="{12AB3D69-2D4D-35FA-2E55-C5677A3797C0}"/>
+                </a:ext>
+              </a:extLst>
+            </p:cNvPr>
+            <p:cNvSpPr/>
+            <p:nvPr/>
+          </p:nvSpPr>
+          <p:spPr>
+            <a:xfrm>
+              <a:off x="261435" y="3243649"/>
+              <a:ext cx="370702" cy="370702"/>
+            </a:xfrm>
+            <a:prstGeom prst="cube">
+              <a:avLst/>
+            </a:prstGeom>
+            <a:grpFill/>
+          </p:spPr>
+          <p:style>
+            <a:lnRef idx="2">
+              <a:schemeClr val="accent1">
+                <a:shade val="15000"/>
+              </a:schemeClr>
+            </a:lnRef>
+            <a:fillRef idx="1">
+              <a:schemeClr val="accent1"/>
+            </a:fillRef>
+            <a:effectRef idx="0">
+              <a:schemeClr val="accent1"/>
+            </a:effectRef>
+            <a:fontRef idx="minor">
+              <a:schemeClr val="lt1"/>
+            </a:fontRef>
+          </p:style>
+          <p:txBody>
+            <a:bodyPr rtlCol="0" anchor="ctr"/>
+            <a:lstStyle/>
+            <a:p>
+              <a:pPr algn="ctr"/>
+              <a:endParaRPr lang="en-DE"/>
+            </a:p>
+          </p:txBody>
+        </p:sp>
+        <p:sp>
+          <p:nvSpPr>
+            <p:cNvPr id="255" name="Cube 254">
+              <a:extLst>
+                <a:ext uri="{FF2B5EF4-FFF2-40B4-BE49-F238E27FC236}">
+                  <a16:creationId xmlns:a16="http://schemas.microsoft.com/office/drawing/2014/main" id="{206F1A56-4079-91C1-EBF7-2C3E94570070}"/>
+                </a:ext>
+              </a:extLst>
+            </p:cNvPr>
+            <p:cNvSpPr/>
+            <p:nvPr/>
+          </p:nvSpPr>
+          <p:spPr>
+            <a:xfrm>
+              <a:off x="533282" y="3243649"/>
+              <a:ext cx="370702" cy="370702"/>
+            </a:xfrm>
+            <a:prstGeom prst="cube">
+              <a:avLst/>
+            </a:prstGeom>
+            <a:grpFill/>
+          </p:spPr>
+          <p:style>
+            <a:lnRef idx="2">
+              <a:schemeClr val="accent1">
+                <a:shade val="15000"/>
+              </a:schemeClr>
+            </a:lnRef>
+            <a:fillRef idx="1">
+              <a:schemeClr val="accent1"/>
+            </a:fillRef>
+            <a:effectRef idx="0">
+              <a:schemeClr val="accent1"/>
+            </a:effectRef>
+            <a:fontRef idx="minor">
+              <a:schemeClr val="lt1"/>
+            </a:fontRef>
+          </p:style>
+          <p:txBody>
+            <a:bodyPr rtlCol="0" anchor="ctr"/>
+            <a:lstStyle/>
+            <a:p>
+              <a:pPr algn="ctr"/>
+              <a:endParaRPr lang="en-DE"/>
+            </a:p>
+          </p:txBody>
+        </p:sp>
+        <p:sp>
+          <p:nvSpPr>
+            <p:cNvPr id="256" name="Cube 255">
+              <a:extLst>
+                <a:ext uri="{FF2B5EF4-FFF2-40B4-BE49-F238E27FC236}">
+                  <a16:creationId xmlns:a16="http://schemas.microsoft.com/office/drawing/2014/main" id="{4F48A1DF-405D-017B-2F5C-79AD5964BBA8}"/>
+                </a:ext>
+              </a:extLst>
+            </p:cNvPr>
+            <p:cNvSpPr/>
+            <p:nvPr/>
+          </p:nvSpPr>
+          <p:spPr>
+            <a:xfrm>
+              <a:off x="811616" y="3243649"/>
+              <a:ext cx="370702" cy="370702"/>
+            </a:xfrm>
+            <a:prstGeom prst="cube">
+              <a:avLst/>
+            </a:prstGeom>
+            <a:grpFill/>
+          </p:spPr>
+          <p:style>
+            <a:lnRef idx="2">
+              <a:schemeClr val="accent1">
+                <a:shade val="15000"/>
+              </a:schemeClr>
+            </a:lnRef>
+            <a:fillRef idx="1">
+              <a:schemeClr val="accent1"/>
+            </a:fillRef>
+            <a:effectRef idx="0">
+              <a:schemeClr val="accent1"/>
+            </a:effectRef>
+            <a:fontRef idx="minor">
+              <a:schemeClr val="lt1"/>
+            </a:fontRef>
+          </p:style>
+          <p:txBody>
+            <a:bodyPr rtlCol="0" anchor="ctr"/>
+            <a:lstStyle/>
+            <a:p>
+              <a:pPr algn="ctr"/>
+              <a:endParaRPr lang="en-DE"/>
+            </a:p>
+          </p:txBody>
+        </p:sp>
+        <p:sp>
+          <p:nvSpPr>
+            <p:cNvPr id="257" name="Cube 256">
+              <a:extLst>
+                <a:ext uri="{FF2B5EF4-FFF2-40B4-BE49-F238E27FC236}">
+                  <a16:creationId xmlns:a16="http://schemas.microsoft.com/office/drawing/2014/main" id="{EAC04822-8ADF-4386-5547-0F4676065CFE}"/>
+                </a:ext>
+              </a:extLst>
+            </p:cNvPr>
+            <p:cNvSpPr/>
+            <p:nvPr/>
+          </p:nvSpPr>
+          <p:spPr>
+            <a:xfrm>
+              <a:off x="177794" y="3323968"/>
+              <a:ext cx="370702" cy="370702"/>
+            </a:xfrm>
+            <a:prstGeom prst="cube">
+              <a:avLst/>
+            </a:prstGeom>
+            <a:grpFill/>
+          </p:spPr>
+          <p:style>
+            <a:lnRef idx="2">
+              <a:schemeClr val="accent1">
+                <a:shade val="15000"/>
+              </a:schemeClr>
+            </a:lnRef>
+            <a:fillRef idx="1">
+              <a:schemeClr val="accent1"/>
+            </a:fillRef>
+            <a:effectRef idx="0">
+              <a:schemeClr val="accent1"/>
+            </a:effectRef>
+            <a:fontRef idx="minor">
+              <a:schemeClr val="lt1"/>
+            </a:fontRef>
+          </p:style>
+          <p:txBody>
+            <a:bodyPr rtlCol="0" anchor="ctr"/>
+            <a:lstStyle/>
+            <a:p>
+              <a:pPr algn="ctr"/>
+              <a:endParaRPr lang="en-DE"/>
+            </a:p>
+          </p:txBody>
+        </p:sp>
+        <p:sp>
+          <p:nvSpPr>
+            <p:cNvPr id="258" name="Cube 257">
+              <a:extLst>
+                <a:ext uri="{FF2B5EF4-FFF2-40B4-BE49-F238E27FC236}">
+                  <a16:creationId xmlns:a16="http://schemas.microsoft.com/office/drawing/2014/main" id="{7E29390A-B101-FCFE-ACD9-D4823F16AFBC}"/>
+                </a:ext>
+              </a:extLst>
+            </p:cNvPr>
+            <p:cNvSpPr/>
+            <p:nvPr/>
+          </p:nvSpPr>
+          <p:spPr>
+            <a:xfrm>
+              <a:off x="458368" y="3323968"/>
+              <a:ext cx="370702" cy="370702"/>
+            </a:xfrm>
+            <a:prstGeom prst="cube">
+              <a:avLst/>
+            </a:prstGeom>
+            <a:grpFill/>
+          </p:spPr>
+          <p:style>
+            <a:lnRef idx="2">
+              <a:schemeClr val="accent1">
+                <a:shade val="15000"/>
+              </a:schemeClr>
+            </a:lnRef>
+            <a:fillRef idx="1">
+              <a:schemeClr val="accent1"/>
+            </a:fillRef>
+            <a:effectRef idx="0">
+              <a:schemeClr val="accent1"/>
+            </a:effectRef>
+            <a:fontRef idx="minor">
+              <a:schemeClr val="lt1"/>
+            </a:fontRef>
+          </p:style>
+          <p:txBody>
+            <a:bodyPr rtlCol="0" anchor="ctr"/>
+            <a:lstStyle/>
+            <a:p>
+              <a:pPr algn="ctr"/>
+              <a:endParaRPr lang="en-DE"/>
+            </a:p>
+          </p:txBody>
+        </p:sp>
+        <p:sp>
+          <p:nvSpPr>
+            <p:cNvPr id="259" name="Cube 258">
+              <a:extLst>
+                <a:ext uri="{FF2B5EF4-FFF2-40B4-BE49-F238E27FC236}">
+                  <a16:creationId xmlns:a16="http://schemas.microsoft.com/office/drawing/2014/main" id="{0D4B48D6-2DF7-AF2B-B569-FF9BB92CCB27}"/>
+                </a:ext>
+              </a:extLst>
+            </p:cNvPr>
+            <p:cNvSpPr/>
+            <p:nvPr/>
+          </p:nvSpPr>
+          <p:spPr>
+            <a:xfrm>
+              <a:off x="737090" y="3323968"/>
+              <a:ext cx="370702" cy="370702"/>
+            </a:xfrm>
+            <a:prstGeom prst="cube">
+              <a:avLst/>
+            </a:prstGeom>
+            <a:grpFill/>
+          </p:spPr>
+          <p:style>
+            <a:lnRef idx="2">
+              <a:schemeClr val="accent1">
+                <a:shade val="15000"/>
+              </a:schemeClr>
+            </a:lnRef>
+            <a:fillRef idx="1">
+              <a:schemeClr val="accent1"/>
+            </a:fillRef>
+            <a:effectRef idx="0">
+              <a:schemeClr val="accent1"/>
+            </a:effectRef>
+            <a:fontRef idx="minor">
+              <a:schemeClr val="lt1"/>
+            </a:fontRef>
+          </p:style>
+          <p:txBody>
+            <a:bodyPr rtlCol="0" anchor="ctr"/>
+            <a:lstStyle/>
+            <a:p>
+              <a:pPr algn="ctr"/>
+              <a:endParaRPr lang="en-DE"/>
+            </a:p>
+          </p:txBody>
+        </p:sp>
+        <p:sp>
+          <p:nvSpPr>
+            <p:cNvPr id="260" name="Cube 259">
+              <a:extLst>
+                <a:ext uri="{FF2B5EF4-FFF2-40B4-BE49-F238E27FC236}">
+                  <a16:creationId xmlns:a16="http://schemas.microsoft.com/office/drawing/2014/main" id="{6DAB9112-490F-3EC1-E0F1-4D57F9236652}"/>
+                </a:ext>
+              </a:extLst>
+            </p:cNvPr>
+            <p:cNvSpPr/>
+            <p:nvPr/>
+          </p:nvSpPr>
+          <p:spPr>
+            <a:xfrm>
+              <a:off x="1164533" y="3164475"/>
+              <a:ext cx="370702" cy="370702"/>
+            </a:xfrm>
+            <a:prstGeom prst="cube">
+              <a:avLst/>
+            </a:prstGeom>
+            <a:grpFill/>
+          </p:spPr>
+          <p:style>
+            <a:lnRef idx="2">
+              <a:schemeClr val="accent1">
+                <a:shade val="15000"/>
+              </a:schemeClr>
+            </a:lnRef>
+            <a:fillRef idx="1">
+              <a:schemeClr val="accent1"/>
+            </a:fillRef>
+            <a:effectRef idx="0">
+              <a:schemeClr val="accent1"/>
+            </a:effectRef>
+            <a:fontRef idx="minor">
+              <a:schemeClr val="lt1"/>
+            </a:fontRef>
+          </p:style>
+          <p:txBody>
+            <a:bodyPr rtlCol="0" anchor="ctr"/>
+            <a:lstStyle/>
+            <a:p>
+              <a:pPr algn="ctr"/>
+              <a:endParaRPr lang="en-DE"/>
+            </a:p>
+          </p:txBody>
+        </p:sp>
+        <p:sp>
+          <p:nvSpPr>
+            <p:cNvPr id="261" name="Cube 260">
+              <a:extLst>
+                <a:ext uri="{FF2B5EF4-FFF2-40B4-BE49-F238E27FC236}">
+                  <a16:creationId xmlns:a16="http://schemas.microsoft.com/office/drawing/2014/main" id="{EE689643-1205-4A30-CA26-2FFFE62F22FA}"/>
+                </a:ext>
+              </a:extLst>
+            </p:cNvPr>
+            <p:cNvSpPr/>
+            <p:nvPr/>
+          </p:nvSpPr>
+          <p:spPr>
+            <a:xfrm>
+              <a:off x="1087767" y="3251669"/>
+              <a:ext cx="370702" cy="370702"/>
+            </a:xfrm>
+            <a:prstGeom prst="cube">
+              <a:avLst/>
+            </a:prstGeom>
+            <a:grpFill/>
+          </p:spPr>
+          <p:style>
+            <a:lnRef idx="2">
+              <a:schemeClr val="accent1">
+                <a:shade val="15000"/>
+              </a:schemeClr>
+            </a:lnRef>
+            <a:fillRef idx="1">
+              <a:schemeClr val="accent1"/>
+            </a:fillRef>
+            <a:effectRef idx="0">
+              <a:schemeClr val="accent1"/>
+            </a:effectRef>
+            <a:fontRef idx="minor">
+              <a:schemeClr val="lt1"/>
+            </a:fontRef>
+          </p:style>
+          <p:txBody>
+            <a:bodyPr rtlCol="0" anchor="ctr"/>
+            <a:lstStyle/>
+            <a:p>
+              <a:pPr algn="ctr"/>
+              <a:endParaRPr lang="en-DE"/>
+            </a:p>
+          </p:txBody>
+        </p:sp>
+        <p:sp>
+          <p:nvSpPr>
+            <p:cNvPr id="262" name="Cube 261">
+              <a:extLst>
+                <a:ext uri="{FF2B5EF4-FFF2-40B4-BE49-F238E27FC236}">
+                  <a16:creationId xmlns:a16="http://schemas.microsoft.com/office/drawing/2014/main" id="{3CF6AC98-E7BB-9B3D-3940-A38209173E76}"/>
+                </a:ext>
+              </a:extLst>
+            </p:cNvPr>
+            <p:cNvSpPr/>
+            <p:nvPr/>
+          </p:nvSpPr>
+          <p:spPr>
+            <a:xfrm>
+              <a:off x="1013241" y="3325113"/>
+              <a:ext cx="370702" cy="370702"/>
+            </a:xfrm>
+            <a:prstGeom prst="cube">
+              <a:avLst/>
+            </a:prstGeom>
+            <a:grpFill/>
+          </p:spPr>
+          <p:style>
+            <a:lnRef idx="2">
+              <a:schemeClr val="accent1">
+                <a:shade val="15000"/>
+              </a:schemeClr>
+            </a:lnRef>
+            <a:fillRef idx="1">
+              <a:schemeClr val="accent1"/>
+            </a:fillRef>
+            <a:effectRef idx="0">
+              <a:schemeClr val="accent1"/>
+            </a:effectRef>
+            <a:fontRef idx="minor">
+              <a:schemeClr val="lt1"/>
+            </a:fontRef>
+          </p:style>
+          <p:txBody>
+            <a:bodyPr rtlCol="0" anchor="ctr"/>
+            <a:lstStyle/>
+            <a:p>
+              <a:pPr algn="ctr"/>
+              <a:endParaRPr lang="en-DE"/>
+            </a:p>
+          </p:txBody>
+        </p:sp>
+      </p:grpSp>
+      <p:grpSp>
+        <p:nvGrpSpPr>
+          <p:cNvPr id="263" name="Group 262">
+            <a:extLst>
+              <a:ext uri="{FF2B5EF4-FFF2-40B4-BE49-F238E27FC236}">
+                <a16:creationId xmlns:a16="http://schemas.microsoft.com/office/drawing/2014/main" id="{40494867-B54E-8BCD-8B2E-9697B21E419D}"/>
+              </a:ext>
+            </a:extLst>
+          </p:cNvPr>
+          <p:cNvGrpSpPr/>
+          <p:nvPr/>
+        </p:nvGrpSpPr>
+        <p:grpSpPr>
+          <a:xfrm>
+            <a:off x="5277132" y="3683433"/>
+            <a:ext cx="1357441" cy="532485"/>
+            <a:chOff x="177794" y="3163330"/>
+            <a:chExt cx="1357441" cy="532485"/>
+          </a:xfrm>
+          <a:solidFill>
+            <a:srgbClr val="FF00FF"/>
+          </a:solidFill>
+        </p:grpSpPr>
+        <p:sp>
+          <p:nvSpPr>
+            <p:cNvPr id="264" name="Cube 263">
+              <a:extLst>
+                <a:ext uri="{FF2B5EF4-FFF2-40B4-BE49-F238E27FC236}">
+                  <a16:creationId xmlns:a16="http://schemas.microsoft.com/office/drawing/2014/main" id="{F35EC3C7-219C-6374-6AC6-8498F7A22DF2}"/>
+                </a:ext>
+              </a:extLst>
+            </p:cNvPr>
+            <p:cNvSpPr/>
+            <p:nvPr/>
+          </p:nvSpPr>
+          <p:spPr>
+            <a:xfrm>
+              <a:off x="344688" y="3163330"/>
+              <a:ext cx="370702" cy="370702"/>
+            </a:xfrm>
+            <a:prstGeom prst="cube">
+              <a:avLst/>
+            </a:prstGeom>
+            <a:grpFill/>
+          </p:spPr>
+          <p:style>
+            <a:lnRef idx="2">
+              <a:schemeClr val="accent4">
+                <a:shade val="15000"/>
+              </a:schemeClr>
+            </a:lnRef>
+            <a:fillRef idx="1">
+              <a:schemeClr val="accent4"/>
+            </a:fillRef>
+            <a:effectRef idx="0">
+              <a:schemeClr val="accent4"/>
+            </a:effectRef>
+            <a:fontRef idx="minor">
+              <a:schemeClr val="lt1"/>
+            </a:fontRef>
+          </p:style>
+          <p:txBody>
+            <a:bodyPr rtlCol="0" anchor="ctr"/>
+            <a:lstStyle/>
+            <a:p>
+              <a:pPr algn="ctr"/>
+              <a:endParaRPr lang="en-DE"/>
+            </a:p>
+          </p:txBody>
+        </p:sp>
+        <p:sp>
+          <p:nvSpPr>
+            <p:cNvPr id="265" name="Cube 264">
+              <a:extLst>
+                <a:ext uri="{FF2B5EF4-FFF2-40B4-BE49-F238E27FC236}">
+                  <a16:creationId xmlns:a16="http://schemas.microsoft.com/office/drawing/2014/main" id="{F9658BEC-CA8C-280B-B94B-93BF5A606BBF}"/>
+                </a:ext>
+              </a:extLst>
+            </p:cNvPr>
+            <p:cNvSpPr/>
+            <p:nvPr/>
+          </p:nvSpPr>
+          <p:spPr>
+            <a:xfrm>
+              <a:off x="616535" y="3163330"/>
+              <a:ext cx="370702" cy="370702"/>
+            </a:xfrm>
+            <a:prstGeom prst="cube">
+              <a:avLst/>
+            </a:prstGeom>
+            <a:grpFill/>
+          </p:spPr>
+          <p:style>
+            <a:lnRef idx="2">
+              <a:schemeClr val="accent4">
+                <a:shade val="15000"/>
+              </a:schemeClr>
+            </a:lnRef>
+            <a:fillRef idx="1">
+              <a:schemeClr val="accent4"/>
+            </a:fillRef>
+            <a:effectRef idx="0">
+              <a:schemeClr val="accent4"/>
+            </a:effectRef>
+            <a:fontRef idx="minor">
+              <a:schemeClr val="lt1"/>
+            </a:fontRef>
+          </p:style>
+          <p:txBody>
+            <a:bodyPr rtlCol="0" anchor="ctr"/>
+            <a:lstStyle/>
+            <a:p>
+              <a:pPr algn="ctr"/>
+              <a:endParaRPr lang="en-DE"/>
+            </a:p>
+          </p:txBody>
+        </p:sp>
+        <p:sp>
+          <p:nvSpPr>
+            <p:cNvPr id="266" name="Cube 265">
+              <a:extLst>
+                <a:ext uri="{FF2B5EF4-FFF2-40B4-BE49-F238E27FC236}">
+                  <a16:creationId xmlns:a16="http://schemas.microsoft.com/office/drawing/2014/main" id="{36AF560D-C19C-AA13-C56A-763ED1DB257D}"/>
+                </a:ext>
+              </a:extLst>
+            </p:cNvPr>
+            <p:cNvSpPr/>
+            <p:nvPr/>
+          </p:nvSpPr>
+          <p:spPr>
+            <a:xfrm>
+              <a:off x="888382" y="3163330"/>
+              <a:ext cx="370702" cy="370702"/>
+            </a:xfrm>
+            <a:prstGeom prst="cube">
+              <a:avLst/>
+            </a:prstGeom>
+            <a:grpFill/>
+          </p:spPr>
+          <p:style>
+            <a:lnRef idx="2">
+              <a:schemeClr val="accent4">
+                <a:shade val="15000"/>
+              </a:schemeClr>
+            </a:lnRef>
+            <a:fillRef idx="1">
+              <a:schemeClr val="accent4"/>
+            </a:fillRef>
+            <a:effectRef idx="0">
+              <a:schemeClr val="accent4"/>
+            </a:effectRef>
+            <a:fontRef idx="minor">
+              <a:schemeClr val="lt1"/>
+            </a:fontRef>
+          </p:style>
+          <p:txBody>
+            <a:bodyPr rtlCol="0" anchor="ctr"/>
+            <a:lstStyle/>
+            <a:p>
+              <a:pPr algn="ctr"/>
+              <a:endParaRPr lang="en-DE"/>
+            </a:p>
+          </p:txBody>
+        </p:sp>
+        <p:sp>
+          <p:nvSpPr>
+            <p:cNvPr id="267" name="Cube 266">
+              <a:extLst>
+                <a:ext uri="{FF2B5EF4-FFF2-40B4-BE49-F238E27FC236}">
+                  <a16:creationId xmlns:a16="http://schemas.microsoft.com/office/drawing/2014/main" id="{87D3DC06-CE4B-E125-8350-A8D7DD070354}"/>
+                </a:ext>
+              </a:extLst>
+            </p:cNvPr>
+            <p:cNvSpPr/>
+            <p:nvPr/>
+          </p:nvSpPr>
+          <p:spPr>
+            <a:xfrm>
+              <a:off x="261435" y="3243649"/>
+              <a:ext cx="370702" cy="370702"/>
+            </a:xfrm>
+            <a:prstGeom prst="cube">
+              <a:avLst/>
+            </a:prstGeom>
+            <a:grpFill/>
+          </p:spPr>
+          <p:style>
+            <a:lnRef idx="2">
+              <a:schemeClr val="accent4">
+                <a:shade val="15000"/>
+              </a:schemeClr>
+            </a:lnRef>
+            <a:fillRef idx="1">
+              <a:schemeClr val="accent4"/>
+            </a:fillRef>
+            <a:effectRef idx="0">
+              <a:schemeClr val="accent4"/>
+            </a:effectRef>
+            <a:fontRef idx="minor">
+              <a:schemeClr val="lt1"/>
+            </a:fontRef>
+          </p:style>
+          <p:txBody>
+            <a:bodyPr rtlCol="0" anchor="ctr"/>
+            <a:lstStyle/>
+            <a:p>
+              <a:pPr algn="ctr"/>
+              <a:endParaRPr lang="en-DE"/>
+            </a:p>
+          </p:txBody>
+        </p:sp>
+        <p:sp>
+          <p:nvSpPr>
+            <p:cNvPr id="268" name="Cube 267">
+              <a:extLst>
+                <a:ext uri="{FF2B5EF4-FFF2-40B4-BE49-F238E27FC236}">
+                  <a16:creationId xmlns:a16="http://schemas.microsoft.com/office/drawing/2014/main" id="{96FBDD2C-63B2-FA22-2C7E-AEB189817E5B}"/>
+                </a:ext>
+              </a:extLst>
+            </p:cNvPr>
+            <p:cNvSpPr/>
+            <p:nvPr/>
+          </p:nvSpPr>
+          <p:spPr>
+            <a:xfrm>
+              <a:off x="533282" y="3243649"/>
+              <a:ext cx="370702" cy="370702"/>
+            </a:xfrm>
+            <a:prstGeom prst="cube">
+              <a:avLst/>
+            </a:prstGeom>
+            <a:grpFill/>
+          </p:spPr>
+          <p:style>
+            <a:lnRef idx="2">
+              <a:schemeClr val="accent4">
+                <a:shade val="15000"/>
+              </a:schemeClr>
+            </a:lnRef>
+            <a:fillRef idx="1">
+              <a:schemeClr val="accent4"/>
+            </a:fillRef>
+            <a:effectRef idx="0">
+              <a:schemeClr val="accent4"/>
+            </a:effectRef>
+            <a:fontRef idx="minor">
+              <a:schemeClr val="lt1"/>
+            </a:fontRef>
+          </p:style>
+          <p:txBody>
+            <a:bodyPr rtlCol="0" anchor="ctr"/>
+            <a:lstStyle/>
+            <a:p>
+              <a:pPr algn="ctr"/>
+              <a:endParaRPr lang="en-DE"/>
+            </a:p>
+          </p:txBody>
+        </p:sp>
+        <p:sp>
+          <p:nvSpPr>
+            <p:cNvPr id="269" name="Cube 268">
+              <a:extLst>
+                <a:ext uri="{FF2B5EF4-FFF2-40B4-BE49-F238E27FC236}">
+                  <a16:creationId xmlns:a16="http://schemas.microsoft.com/office/drawing/2014/main" id="{5CD4DB09-654D-FBC4-07AA-3B5F4C691CB7}"/>
+                </a:ext>
+              </a:extLst>
+            </p:cNvPr>
+            <p:cNvSpPr/>
+            <p:nvPr/>
+          </p:nvSpPr>
+          <p:spPr>
+            <a:xfrm>
+              <a:off x="811616" y="3243649"/>
+              <a:ext cx="370702" cy="370702"/>
+            </a:xfrm>
+            <a:prstGeom prst="cube">
+              <a:avLst/>
+            </a:prstGeom>
+            <a:grpFill/>
+          </p:spPr>
+          <p:style>
+            <a:lnRef idx="2">
+              <a:schemeClr val="accent4">
+                <a:shade val="15000"/>
+              </a:schemeClr>
+            </a:lnRef>
+            <a:fillRef idx="1">
+              <a:schemeClr val="accent4"/>
+            </a:fillRef>
+            <a:effectRef idx="0">
+              <a:schemeClr val="accent4"/>
+            </a:effectRef>
+            <a:fontRef idx="minor">
+              <a:schemeClr val="lt1"/>
+            </a:fontRef>
+          </p:style>
+          <p:txBody>
+            <a:bodyPr rtlCol="0" anchor="ctr"/>
+            <a:lstStyle/>
+            <a:p>
+              <a:pPr algn="ctr"/>
+              <a:endParaRPr lang="en-DE"/>
+            </a:p>
+          </p:txBody>
+        </p:sp>
+        <p:sp>
+          <p:nvSpPr>
+            <p:cNvPr id="270" name="Cube 269">
+              <a:extLst>
+                <a:ext uri="{FF2B5EF4-FFF2-40B4-BE49-F238E27FC236}">
+                  <a16:creationId xmlns:a16="http://schemas.microsoft.com/office/drawing/2014/main" id="{A7025712-DD97-D100-540C-AD36857D43AD}"/>
+                </a:ext>
+              </a:extLst>
+            </p:cNvPr>
+            <p:cNvSpPr/>
+            <p:nvPr/>
+          </p:nvSpPr>
+          <p:spPr>
+            <a:xfrm>
+              <a:off x="177794" y="3323968"/>
+              <a:ext cx="370702" cy="370702"/>
+            </a:xfrm>
+            <a:prstGeom prst="cube">
+              <a:avLst/>
+            </a:prstGeom>
+            <a:grpFill/>
+          </p:spPr>
+          <p:style>
+            <a:lnRef idx="2">
+              <a:schemeClr val="accent4">
+                <a:shade val="15000"/>
+              </a:schemeClr>
+            </a:lnRef>
+            <a:fillRef idx="1">
+              <a:schemeClr val="accent4"/>
+            </a:fillRef>
+            <a:effectRef idx="0">
+              <a:schemeClr val="accent4"/>
+            </a:effectRef>
+            <a:fontRef idx="minor">
+              <a:schemeClr val="lt1"/>
+            </a:fontRef>
+          </p:style>
+          <p:txBody>
+            <a:bodyPr rtlCol="0" anchor="ctr"/>
+            <a:lstStyle/>
+            <a:p>
+              <a:pPr algn="ctr"/>
+              <a:endParaRPr lang="en-DE"/>
+            </a:p>
+          </p:txBody>
+        </p:sp>
+        <p:sp>
+          <p:nvSpPr>
+            <p:cNvPr id="271" name="Cube 270">
+              <a:extLst>
+                <a:ext uri="{FF2B5EF4-FFF2-40B4-BE49-F238E27FC236}">
+                  <a16:creationId xmlns:a16="http://schemas.microsoft.com/office/drawing/2014/main" id="{68B2B86E-10D7-79B3-98C0-EA19940903C5}"/>
+                </a:ext>
+              </a:extLst>
+            </p:cNvPr>
+            <p:cNvSpPr/>
+            <p:nvPr/>
+          </p:nvSpPr>
+          <p:spPr>
+            <a:xfrm>
+              <a:off x="458368" y="3323968"/>
+              <a:ext cx="370702" cy="370702"/>
+            </a:xfrm>
+            <a:prstGeom prst="cube">
+              <a:avLst/>
+            </a:prstGeom>
+            <a:grpFill/>
+          </p:spPr>
+          <p:style>
+            <a:lnRef idx="2">
+              <a:schemeClr val="accent4">
+                <a:shade val="15000"/>
+              </a:schemeClr>
+            </a:lnRef>
+            <a:fillRef idx="1">
+              <a:schemeClr val="accent4"/>
+            </a:fillRef>
+            <a:effectRef idx="0">
+              <a:schemeClr val="accent4"/>
+            </a:effectRef>
+            <a:fontRef idx="minor">
+              <a:schemeClr val="lt1"/>
+            </a:fontRef>
+          </p:style>
+          <p:txBody>
+            <a:bodyPr rtlCol="0" anchor="ctr"/>
+            <a:lstStyle/>
+            <a:p>
+              <a:pPr algn="ctr"/>
+              <a:endParaRPr lang="en-DE"/>
+            </a:p>
+          </p:txBody>
+        </p:sp>
+        <p:sp>
+          <p:nvSpPr>
+            <p:cNvPr id="272" name="Cube 271">
+              <a:extLst>
+                <a:ext uri="{FF2B5EF4-FFF2-40B4-BE49-F238E27FC236}">
+                  <a16:creationId xmlns:a16="http://schemas.microsoft.com/office/drawing/2014/main" id="{09AA5B9C-612A-8F14-2747-D5DEA245B9E6}"/>
+                </a:ext>
+              </a:extLst>
+            </p:cNvPr>
+            <p:cNvSpPr/>
+            <p:nvPr/>
+          </p:nvSpPr>
+          <p:spPr>
+            <a:xfrm>
+              <a:off x="737090" y="3323968"/>
+              <a:ext cx="370702" cy="370702"/>
+            </a:xfrm>
+            <a:prstGeom prst="cube">
+              <a:avLst/>
+            </a:prstGeom>
+            <a:grpFill/>
+          </p:spPr>
+          <p:style>
+            <a:lnRef idx="2">
+              <a:schemeClr val="accent4">
+                <a:shade val="15000"/>
+              </a:schemeClr>
+            </a:lnRef>
+            <a:fillRef idx="1">
+              <a:schemeClr val="accent4"/>
+            </a:fillRef>
+            <a:effectRef idx="0">
+              <a:schemeClr val="accent4"/>
+            </a:effectRef>
+            <a:fontRef idx="minor">
+              <a:schemeClr val="lt1"/>
+            </a:fontRef>
+          </p:style>
+          <p:txBody>
+            <a:bodyPr rtlCol="0" anchor="ctr"/>
+            <a:lstStyle/>
+            <a:p>
+              <a:pPr algn="ctr"/>
+              <a:endParaRPr lang="en-DE"/>
+            </a:p>
+          </p:txBody>
+        </p:sp>
+        <p:sp>
+          <p:nvSpPr>
+            <p:cNvPr id="273" name="Cube 272">
+              <a:extLst>
+                <a:ext uri="{FF2B5EF4-FFF2-40B4-BE49-F238E27FC236}">
+                  <a16:creationId xmlns:a16="http://schemas.microsoft.com/office/drawing/2014/main" id="{DD378668-E275-8F7C-14B4-D43EC1DC0F3B}"/>
+                </a:ext>
+              </a:extLst>
+            </p:cNvPr>
+            <p:cNvSpPr/>
+            <p:nvPr/>
+          </p:nvSpPr>
+          <p:spPr>
+            <a:xfrm>
+              <a:off x="1164533" y="3164475"/>
+              <a:ext cx="370702" cy="370702"/>
+            </a:xfrm>
+            <a:prstGeom prst="cube">
+              <a:avLst/>
+            </a:prstGeom>
+            <a:grpFill/>
+          </p:spPr>
+          <p:style>
+            <a:lnRef idx="2">
+              <a:schemeClr val="accent4">
+                <a:shade val="15000"/>
+              </a:schemeClr>
+            </a:lnRef>
+            <a:fillRef idx="1">
+              <a:schemeClr val="accent4"/>
+            </a:fillRef>
+            <a:effectRef idx="0">
+              <a:schemeClr val="accent4"/>
+            </a:effectRef>
+            <a:fontRef idx="minor">
+              <a:schemeClr val="lt1"/>
+            </a:fontRef>
+          </p:style>
+          <p:txBody>
+            <a:bodyPr rtlCol="0" anchor="ctr"/>
+            <a:lstStyle/>
+            <a:p>
+              <a:pPr algn="ctr"/>
+              <a:endParaRPr lang="en-DE"/>
+            </a:p>
+          </p:txBody>
+        </p:sp>
+        <p:sp>
+          <p:nvSpPr>
+            <p:cNvPr id="274" name="Cube 273">
+              <a:extLst>
+                <a:ext uri="{FF2B5EF4-FFF2-40B4-BE49-F238E27FC236}">
+                  <a16:creationId xmlns:a16="http://schemas.microsoft.com/office/drawing/2014/main" id="{85495FC5-5C48-2765-39EF-E346929241DB}"/>
+                </a:ext>
+              </a:extLst>
+            </p:cNvPr>
+            <p:cNvSpPr/>
+            <p:nvPr/>
+          </p:nvSpPr>
+          <p:spPr>
+            <a:xfrm>
+              <a:off x="1087767" y="3251669"/>
+              <a:ext cx="370702" cy="370702"/>
+            </a:xfrm>
+            <a:prstGeom prst="cube">
+              <a:avLst/>
+            </a:prstGeom>
+            <a:grpFill/>
+          </p:spPr>
+          <p:style>
+            <a:lnRef idx="2">
+              <a:schemeClr val="accent4">
+                <a:shade val="15000"/>
+              </a:schemeClr>
+            </a:lnRef>
+            <a:fillRef idx="1">
+              <a:schemeClr val="accent4"/>
+            </a:fillRef>
+            <a:effectRef idx="0">
+              <a:schemeClr val="accent4"/>
+            </a:effectRef>
+            <a:fontRef idx="minor">
+              <a:schemeClr val="lt1"/>
+            </a:fontRef>
+          </p:style>
+          <p:txBody>
+            <a:bodyPr rtlCol="0" anchor="ctr"/>
+            <a:lstStyle/>
+            <a:p>
+              <a:pPr algn="ctr"/>
+              <a:endParaRPr lang="en-DE"/>
+            </a:p>
+          </p:txBody>
+        </p:sp>
+        <p:sp>
+          <p:nvSpPr>
+            <p:cNvPr id="275" name="Cube 274">
+              <a:extLst>
+                <a:ext uri="{FF2B5EF4-FFF2-40B4-BE49-F238E27FC236}">
+                  <a16:creationId xmlns:a16="http://schemas.microsoft.com/office/drawing/2014/main" id="{8D26E3F9-D1F1-CECF-A223-46A42B773515}"/>
+                </a:ext>
+              </a:extLst>
+            </p:cNvPr>
+            <p:cNvSpPr/>
+            <p:nvPr/>
+          </p:nvSpPr>
+          <p:spPr>
+            <a:xfrm>
+              <a:off x="1013241" y="3325113"/>
+              <a:ext cx="370702" cy="370702"/>
+            </a:xfrm>
+            <a:prstGeom prst="cube">
+              <a:avLst/>
+            </a:prstGeom>
+            <a:grpFill/>
+          </p:spPr>
+          <p:style>
+            <a:lnRef idx="2">
+              <a:schemeClr val="accent4">
+                <a:shade val="15000"/>
+              </a:schemeClr>
+            </a:lnRef>
+            <a:fillRef idx="1">
+              <a:schemeClr val="accent4"/>
+            </a:fillRef>
+            <a:effectRef idx="0">
+              <a:schemeClr val="accent4"/>
+            </a:effectRef>
+            <a:fontRef idx="minor">
+              <a:schemeClr val="lt1"/>
+            </a:fontRef>
+          </p:style>
+          <p:txBody>
+            <a:bodyPr rtlCol="0" anchor="ctr"/>
+            <a:lstStyle/>
+            <a:p>
+              <a:pPr algn="ctr"/>
+              <a:endParaRPr lang="en-DE"/>
+            </a:p>
+          </p:txBody>
+        </p:sp>
+      </p:grpSp>
+      <p:grpSp>
+        <p:nvGrpSpPr>
+          <p:cNvPr id="284" name="Group 283">
+            <a:extLst>
+              <a:ext uri="{FF2B5EF4-FFF2-40B4-BE49-F238E27FC236}">
+                <a16:creationId xmlns:a16="http://schemas.microsoft.com/office/drawing/2014/main" id="{ADDC9FB5-513D-CC3B-5725-072483F00B86}"/>
+              </a:ext>
+            </a:extLst>
+          </p:cNvPr>
+          <p:cNvGrpSpPr/>
+          <p:nvPr/>
+        </p:nvGrpSpPr>
+        <p:grpSpPr>
+          <a:xfrm>
+            <a:off x="4936807" y="3491879"/>
+            <a:ext cx="1409499" cy="1906085"/>
+            <a:chOff x="840196" y="3664896"/>
+            <a:chExt cx="1409499" cy="1906085"/>
+          </a:xfrm>
+        </p:grpSpPr>
+        <p:cxnSp>
+          <p:nvCxnSpPr>
+            <p:cNvPr id="278" name="Straight Arrow Connector 277">
+              <a:extLst>
+                <a:ext uri="{FF2B5EF4-FFF2-40B4-BE49-F238E27FC236}">
+                  <a16:creationId xmlns:a16="http://schemas.microsoft.com/office/drawing/2014/main" id="{42356330-65C4-9822-E5D9-55DFDEEB8A59}"/>
+                </a:ext>
+              </a:extLst>
+            </p:cNvPr>
+            <p:cNvCxnSpPr>
+              <a:cxnSpLocks/>
+            </p:cNvCxnSpPr>
+            <p:nvPr/>
+          </p:nvCxnSpPr>
+          <p:spPr>
+            <a:xfrm>
+              <a:off x="1154371" y="5220084"/>
+              <a:ext cx="1095324" cy="0"/>
+            </a:xfrm>
+            <a:prstGeom prst="straightConnector1">
+              <a:avLst/>
+            </a:prstGeom>
+            <a:ln>
+              <a:solidFill>
+                <a:schemeClr val="tx1"/>
+              </a:solidFill>
+              <a:headEnd type="triangle" w="med" len="med"/>
+              <a:tailEnd type="triangle" w="med" len="med"/>
+            </a:ln>
+          </p:spPr>
+          <p:style>
+            <a:lnRef idx="1">
+              <a:schemeClr val="accent1"/>
+            </a:lnRef>
+            <a:fillRef idx="0">
+              <a:schemeClr val="accent1"/>
+            </a:fillRef>
+            <a:effectRef idx="0">
+              <a:schemeClr val="accent1"/>
+            </a:effectRef>
+            <a:fontRef idx="minor">
+              <a:schemeClr val="tx1"/>
+            </a:fontRef>
+          </p:style>
+        </p:cxnSp>
+        <p:sp>
+          <p:nvSpPr>
+            <p:cNvPr id="279" name="TextBox 278">
+              <a:extLst>
+                <a:ext uri="{FF2B5EF4-FFF2-40B4-BE49-F238E27FC236}">
+                  <a16:creationId xmlns:a16="http://schemas.microsoft.com/office/drawing/2014/main" id="{D53B3E84-8367-2FD5-3F76-8B75145007B4}"/>
+                </a:ext>
+              </a:extLst>
+            </p:cNvPr>
+            <p:cNvSpPr txBox="1"/>
+            <p:nvPr/>
+          </p:nvSpPr>
+          <p:spPr>
+            <a:xfrm>
+              <a:off x="1640031" y="5201649"/>
+              <a:ext cx="304892" cy="369332"/>
+            </a:xfrm>
+            <a:prstGeom prst="rect">
+              <a:avLst/>
+            </a:prstGeom>
+            <a:noFill/>
+          </p:spPr>
+          <p:txBody>
+            <a:bodyPr wrap="square" rtlCol="0">
+              <a:spAutoFit/>
+            </a:bodyPr>
+            <a:lstStyle/>
+            <a:p>
+              <a:r>
+                <a:rPr lang="en-DE" dirty="0"/>
+                <a:t>X</a:t>
+              </a:r>
+            </a:p>
+          </p:txBody>
+        </p:sp>
+        <p:cxnSp>
+          <p:nvCxnSpPr>
+            <p:cNvPr id="280" name="Straight Arrow Connector 279">
+              <a:extLst>
+                <a:ext uri="{FF2B5EF4-FFF2-40B4-BE49-F238E27FC236}">
+                  <a16:creationId xmlns:a16="http://schemas.microsoft.com/office/drawing/2014/main" id="{79A3F3D8-0358-8D89-C291-5204A9F992FB}"/>
+                </a:ext>
+              </a:extLst>
+            </p:cNvPr>
+            <p:cNvCxnSpPr>
+              <a:cxnSpLocks/>
+            </p:cNvCxnSpPr>
+            <p:nvPr/>
+          </p:nvCxnSpPr>
+          <p:spPr>
+            <a:xfrm flipV="1">
+              <a:off x="1104805" y="3754633"/>
+              <a:ext cx="316681" cy="342562"/>
+            </a:xfrm>
+            <a:prstGeom prst="straightConnector1">
+              <a:avLst/>
+            </a:prstGeom>
+            <a:ln>
+              <a:solidFill>
+                <a:schemeClr val="tx1"/>
+              </a:solidFill>
+              <a:headEnd type="triangle" w="med" len="med"/>
+              <a:tailEnd type="triangle" w="med" len="med"/>
+            </a:ln>
+          </p:spPr>
+          <p:style>
+            <a:lnRef idx="1">
+              <a:schemeClr val="accent1"/>
+            </a:lnRef>
+            <a:fillRef idx="0">
+              <a:schemeClr val="accent1"/>
+            </a:fillRef>
+            <a:effectRef idx="0">
+              <a:schemeClr val="accent1"/>
+            </a:effectRef>
+            <a:fontRef idx="minor">
+              <a:schemeClr val="tx1"/>
+            </a:fontRef>
+          </p:style>
+        </p:cxnSp>
+        <p:sp>
+          <p:nvSpPr>
+            <p:cNvPr id="281" name="TextBox 280">
+              <a:extLst>
+                <a:ext uri="{FF2B5EF4-FFF2-40B4-BE49-F238E27FC236}">
+                  <a16:creationId xmlns:a16="http://schemas.microsoft.com/office/drawing/2014/main" id="{5DDD66A0-5A25-365F-C64C-7C7C1E3900E7}"/>
+                </a:ext>
+              </a:extLst>
+            </p:cNvPr>
+            <p:cNvSpPr txBox="1"/>
+            <p:nvPr/>
+          </p:nvSpPr>
+          <p:spPr>
+            <a:xfrm>
+              <a:off x="990581" y="3664896"/>
+              <a:ext cx="304892" cy="369332"/>
+            </a:xfrm>
+            <a:prstGeom prst="rect">
+              <a:avLst/>
+            </a:prstGeom>
+            <a:noFill/>
+          </p:spPr>
+          <p:txBody>
+            <a:bodyPr wrap="square" rtlCol="0">
+              <a:spAutoFit/>
+            </a:bodyPr>
+            <a:lstStyle/>
+            <a:p>
+              <a:r>
+                <a:rPr lang="en-DE" dirty="0"/>
+                <a:t>Y</a:t>
+              </a:r>
+            </a:p>
+          </p:txBody>
+        </p:sp>
+        <p:cxnSp>
+          <p:nvCxnSpPr>
+            <p:cNvPr id="282" name="Straight Arrow Connector 281">
+              <a:extLst>
+                <a:ext uri="{FF2B5EF4-FFF2-40B4-BE49-F238E27FC236}">
+                  <a16:creationId xmlns:a16="http://schemas.microsoft.com/office/drawing/2014/main" id="{B403E6BE-7D3A-CF0D-D4F8-2D450324DF43}"/>
+                </a:ext>
+              </a:extLst>
+            </p:cNvPr>
+            <p:cNvCxnSpPr>
+              <a:cxnSpLocks/>
+            </p:cNvCxnSpPr>
+            <p:nvPr/>
+          </p:nvCxnSpPr>
+          <p:spPr>
+            <a:xfrm flipV="1">
+              <a:off x="1102474" y="4166181"/>
+              <a:ext cx="0" cy="940840"/>
+            </a:xfrm>
+            <a:prstGeom prst="straightConnector1">
+              <a:avLst/>
+            </a:prstGeom>
+            <a:ln>
+              <a:solidFill>
+                <a:schemeClr val="tx1"/>
+              </a:solidFill>
+              <a:headEnd type="triangle" w="med" len="med"/>
+              <a:tailEnd type="triangle" w="med" len="med"/>
+            </a:ln>
+          </p:spPr>
+          <p:style>
+            <a:lnRef idx="1">
+              <a:schemeClr val="accent1"/>
+            </a:lnRef>
+            <a:fillRef idx="0">
+              <a:schemeClr val="accent1"/>
+            </a:fillRef>
+            <a:effectRef idx="0">
+              <a:schemeClr val="accent1"/>
+            </a:effectRef>
+            <a:fontRef idx="minor">
+              <a:schemeClr val="tx1"/>
+            </a:fontRef>
+          </p:style>
+        </p:cxnSp>
+        <p:sp>
+          <p:nvSpPr>
+            <p:cNvPr id="283" name="TextBox 282">
+              <a:extLst>
+                <a:ext uri="{FF2B5EF4-FFF2-40B4-BE49-F238E27FC236}">
+                  <a16:creationId xmlns:a16="http://schemas.microsoft.com/office/drawing/2014/main" id="{D03D1CB9-1CBB-A920-19E1-DF01B43F0B29}"/>
+                </a:ext>
+              </a:extLst>
+            </p:cNvPr>
+            <p:cNvSpPr txBox="1"/>
+            <p:nvPr/>
+          </p:nvSpPr>
+          <p:spPr>
+            <a:xfrm>
+              <a:off x="840196" y="4451935"/>
+              <a:ext cx="308098" cy="369332"/>
+            </a:xfrm>
+            <a:prstGeom prst="rect">
+              <a:avLst/>
+            </a:prstGeom>
+            <a:noFill/>
+          </p:spPr>
+          <p:txBody>
+            <a:bodyPr wrap="square" rtlCol="0">
+              <a:spAutoFit/>
+            </a:bodyPr>
+            <a:lstStyle/>
+            <a:p>
+              <a:r>
+                <a:rPr lang="en-DE" dirty="0"/>
+                <a:t>C</a:t>
+              </a:r>
+            </a:p>
+          </p:txBody>
+        </p:sp>
+      </p:grpSp>
+      <p:grpSp>
+        <p:nvGrpSpPr>
+          <p:cNvPr id="17" name="Group 16">
+            <a:extLst>
+              <a:ext uri="{FF2B5EF4-FFF2-40B4-BE49-F238E27FC236}">
+                <a16:creationId xmlns:a16="http://schemas.microsoft.com/office/drawing/2014/main" id="{128F101C-C3BC-FFDF-18C9-DED048945C71}"/>
+              </a:ext>
+            </a:extLst>
+          </p:cNvPr>
+          <p:cNvGrpSpPr/>
+          <p:nvPr/>
+        </p:nvGrpSpPr>
+        <p:grpSpPr>
+          <a:xfrm>
+            <a:off x="4694349" y="526923"/>
+            <a:ext cx="2642027" cy="3604808"/>
+            <a:chOff x="4565660" y="384413"/>
+            <a:chExt cx="2642027" cy="3604808"/>
+          </a:xfrm>
+        </p:grpSpPr>
+        <p:pic>
+          <p:nvPicPr>
+            <p:cNvPr id="11" name="Picture 10">
+              <a:extLst>
+                <a:ext uri="{FF2B5EF4-FFF2-40B4-BE49-F238E27FC236}">
+                  <a16:creationId xmlns:a16="http://schemas.microsoft.com/office/drawing/2014/main" id="{91B17D9E-456E-BD02-6FF7-86381C533B7A}"/>
+                </a:ext>
+              </a:extLst>
+            </p:cNvPr>
+            <p:cNvPicPr>
+              <a:picLocks noChangeAspect="1"/>
+            </p:cNvPicPr>
+            <p:nvPr/>
+          </p:nvPicPr>
+          <p:blipFill>
+            <a:blip r:embed="rId3"/>
+            <a:stretch>
+              <a:fillRect/>
+            </a:stretch>
+          </p:blipFill>
+          <p:spPr>
+            <a:xfrm rot="21164862">
+              <a:off x="4565660" y="1444654"/>
+              <a:ext cx="2617171" cy="2544567"/>
+            </a:xfrm>
+            <a:prstGeom prst="rect">
+              <a:avLst/>
+            </a:prstGeom>
+            <a:ln w="38100">
+              <a:solidFill>
+                <a:srgbClr val="00F3F0"/>
+              </a:solidFill>
+            </a:ln>
+            <a:scene3d>
+              <a:camera prst="isometricOffAxis2Top"/>
+              <a:lightRig rig="threePt" dir="t"/>
+            </a:scene3d>
+          </p:spPr>
+        </p:pic>
+        <p:pic>
+          <p:nvPicPr>
+            <p:cNvPr id="10" name="Picture 9">
+              <a:extLst>
+                <a:ext uri="{FF2B5EF4-FFF2-40B4-BE49-F238E27FC236}">
+                  <a16:creationId xmlns:a16="http://schemas.microsoft.com/office/drawing/2014/main" id="{F17BFCE1-89BA-1244-A1A5-84260D57DC0E}"/>
+                </a:ext>
+              </a:extLst>
+            </p:cNvPr>
+            <p:cNvPicPr>
+              <a:picLocks noChangeAspect="1"/>
+            </p:cNvPicPr>
+            <p:nvPr/>
+          </p:nvPicPr>
+          <p:blipFill>
+            <a:blip r:embed="rId4"/>
+            <a:stretch>
+              <a:fillRect/>
+            </a:stretch>
+          </p:blipFill>
+          <p:spPr>
+            <a:xfrm rot="21238882">
+              <a:off x="4570300" y="940301"/>
+              <a:ext cx="2617171" cy="2544567"/>
+            </a:xfrm>
+            <a:prstGeom prst="rect">
+              <a:avLst/>
+            </a:prstGeom>
+            <a:ln w="38100">
+              <a:solidFill>
+                <a:srgbClr val="FFFF00"/>
+              </a:solidFill>
+            </a:ln>
+            <a:scene3d>
+              <a:camera prst="isometricOffAxis2Top"/>
+              <a:lightRig rig="threePt" dir="t"/>
+            </a:scene3d>
+          </p:spPr>
+        </p:pic>
+        <p:pic>
+          <p:nvPicPr>
+            <p:cNvPr id="9" name="Picture 8">
+              <a:extLst>
+                <a:ext uri="{FF2B5EF4-FFF2-40B4-BE49-F238E27FC236}">
+                  <a16:creationId xmlns:a16="http://schemas.microsoft.com/office/drawing/2014/main" id="{B2068737-650B-7467-E42E-563C22BB2066}"/>
+                </a:ext>
+              </a:extLst>
+            </p:cNvPr>
+            <p:cNvPicPr>
+              <a:picLocks noChangeAspect="1"/>
+            </p:cNvPicPr>
+            <p:nvPr/>
+          </p:nvPicPr>
+          <p:blipFill>
+            <a:blip r:embed="rId5"/>
+            <a:stretch>
+              <a:fillRect/>
+            </a:stretch>
+          </p:blipFill>
+          <p:spPr>
+            <a:xfrm rot="21236129">
+              <a:off x="4590516" y="384413"/>
+              <a:ext cx="2617171" cy="2544567"/>
+            </a:xfrm>
+            <a:prstGeom prst="rect">
+              <a:avLst/>
+            </a:prstGeom>
+            <a:ln w="38100">
+              <a:solidFill>
+                <a:srgbClr val="FF00FF"/>
+              </a:solidFill>
+            </a:ln>
+            <a:scene3d>
+              <a:camera prst="isometricOffAxis2Top"/>
+              <a:lightRig rig="threePt" dir="t"/>
+            </a:scene3d>
+          </p:spPr>
+        </p:pic>
+      </p:grpSp>
+      <p:pic>
+        <p:nvPicPr>
+          <p:cNvPr id="4" name="Picture 3">
+            <a:extLst>
+              <a:ext uri="{FF2B5EF4-FFF2-40B4-BE49-F238E27FC236}">
+                <a16:creationId xmlns:a16="http://schemas.microsoft.com/office/drawing/2014/main" id="{5E76F47E-85CD-4823-57E7-D5D7745F7B5D}"/>
+              </a:ext>
+            </a:extLst>
+          </p:cNvPr>
+          <p:cNvPicPr>
+            <a:picLocks noChangeAspect="1"/>
+          </p:cNvPicPr>
+          <p:nvPr/>
+        </p:nvPicPr>
+        <p:blipFill>
+          <a:blip r:embed="rId5"/>
+          <a:stretch>
+            <a:fillRect/>
+          </a:stretch>
+        </p:blipFill>
+        <p:spPr>
+          <a:xfrm>
+            <a:off x="1806056" y="563236"/>
+            <a:ext cx="1139063" cy="1139063"/>
+          </a:xfrm>
+          <a:prstGeom prst="rect">
+            <a:avLst/>
+          </a:prstGeom>
+        </p:spPr>
+      </p:pic>
+      <p:pic>
+        <p:nvPicPr>
+          <p:cNvPr id="5" name="Picture 4">
+            <a:extLst>
+              <a:ext uri="{FF2B5EF4-FFF2-40B4-BE49-F238E27FC236}">
+                <a16:creationId xmlns:a16="http://schemas.microsoft.com/office/drawing/2014/main" id="{2380EAB9-449C-01F7-91B4-64950BF27345}"/>
+              </a:ext>
+            </a:extLst>
+          </p:cNvPr>
+          <p:cNvPicPr>
+            <a:picLocks noChangeAspect="1"/>
+          </p:cNvPicPr>
+          <p:nvPr/>
+        </p:nvPicPr>
+        <p:blipFill>
+          <a:blip r:embed="rId4"/>
+          <a:stretch>
+            <a:fillRect/>
+          </a:stretch>
+        </p:blipFill>
+        <p:spPr>
+          <a:xfrm>
+            <a:off x="1800897" y="2610117"/>
+            <a:ext cx="1139063" cy="1139063"/>
+          </a:xfrm>
+          <a:prstGeom prst="rect">
+            <a:avLst/>
+          </a:prstGeom>
+        </p:spPr>
+      </p:pic>
+      <p:pic>
+        <p:nvPicPr>
+          <p:cNvPr id="6" name="Picture 5">
+            <a:extLst>
+              <a:ext uri="{FF2B5EF4-FFF2-40B4-BE49-F238E27FC236}">
+                <a16:creationId xmlns:a16="http://schemas.microsoft.com/office/drawing/2014/main" id="{18E5CF3F-10E7-C28B-2C2F-61DEAA6D9CD9}"/>
+              </a:ext>
+            </a:extLst>
+          </p:cNvPr>
+          <p:cNvPicPr>
+            <a:picLocks noChangeAspect="1"/>
+          </p:cNvPicPr>
+          <p:nvPr/>
+        </p:nvPicPr>
+        <p:blipFill>
+          <a:blip r:embed="rId3"/>
+          <a:stretch>
+            <a:fillRect/>
+          </a:stretch>
+        </p:blipFill>
+        <p:spPr>
+          <a:xfrm>
+            <a:off x="1800897" y="4411605"/>
+            <a:ext cx="1139063" cy="1139063"/>
+          </a:xfrm>
+          <a:prstGeom prst="rect">
+            <a:avLst/>
+          </a:prstGeom>
+        </p:spPr>
+      </p:pic>
+      <p:grpSp>
+        <p:nvGrpSpPr>
+          <p:cNvPr id="7" name="Group 6">
+            <a:extLst>
+              <a:ext uri="{FF2B5EF4-FFF2-40B4-BE49-F238E27FC236}">
+                <a16:creationId xmlns:a16="http://schemas.microsoft.com/office/drawing/2014/main" id="{8A10A844-A852-46E9-561A-8408BBE8FC6E}"/>
+              </a:ext>
+            </a:extLst>
+          </p:cNvPr>
+          <p:cNvGrpSpPr/>
+          <p:nvPr/>
+        </p:nvGrpSpPr>
+        <p:grpSpPr>
+          <a:xfrm>
+            <a:off x="315444" y="225669"/>
+            <a:ext cx="1139063" cy="1662813"/>
+            <a:chOff x="791944" y="793793"/>
+            <a:chExt cx="1509238" cy="1981126"/>
+          </a:xfrm>
+        </p:grpSpPr>
+        <p:grpSp>
+          <p:nvGrpSpPr>
+            <p:cNvPr id="24" name="Group 23">
+              <a:extLst>
+                <a:ext uri="{FF2B5EF4-FFF2-40B4-BE49-F238E27FC236}">
+                  <a16:creationId xmlns:a16="http://schemas.microsoft.com/office/drawing/2014/main" id="{B31510C0-32D7-6552-4EEC-7F0BD1E0A38D}"/>
+                </a:ext>
+              </a:extLst>
+            </p:cNvPr>
+            <p:cNvGrpSpPr/>
+            <p:nvPr/>
+          </p:nvGrpSpPr>
+          <p:grpSpPr>
+            <a:xfrm>
+              <a:off x="1175929" y="1356626"/>
+              <a:ext cx="1125253" cy="870582"/>
+              <a:chOff x="288758" y="1473802"/>
+              <a:chExt cx="968826" cy="749558"/>
+            </a:xfrm>
+          </p:grpSpPr>
+          <p:sp>
+            <p:nvSpPr>
+              <p:cNvPr id="30" name="Rectangle 29">
+                <a:extLst>
+                  <a:ext uri="{FF2B5EF4-FFF2-40B4-BE49-F238E27FC236}">
+                    <a16:creationId xmlns:a16="http://schemas.microsoft.com/office/drawing/2014/main" id="{F5DEBD2F-341C-662D-51A0-D9FE57AA8E86}"/>
+                  </a:ext>
+                </a:extLst>
+              </p:cNvPr>
+              <p:cNvSpPr/>
+              <p:nvPr/>
+            </p:nvSpPr>
+            <p:spPr>
+              <a:xfrm>
+                <a:off x="288758" y="1473802"/>
+                <a:ext cx="241560" cy="247507"/>
+              </a:xfrm>
+              <a:prstGeom prst="rect">
+                <a:avLst/>
+              </a:prstGeom>
+              <a:solidFill>
+                <a:schemeClr val="bg1"/>
+              </a:solidFill>
+            </p:spPr>
+            <p:style>
+              <a:lnRef idx="2">
+                <a:schemeClr val="accent1">
+                  <a:shade val="15000"/>
+                </a:schemeClr>
+              </a:lnRef>
+              <a:fillRef idx="1">
+                <a:schemeClr val="accent1"/>
+              </a:fillRef>
+              <a:effectRef idx="0">
+                <a:schemeClr val="accent1"/>
+              </a:effectRef>
+              <a:fontRef idx="minor">
+                <a:schemeClr val="lt1"/>
+              </a:fontRef>
+            </p:style>
+            <p:txBody>
+              <a:bodyPr rtlCol="0" anchor="ctr"/>
+              <a:lstStyle/>
+              <a:p>
+                <a:pPr algn="ctr"/>
+                <a:endParaRPr lang="en-DE"/>
+              </a:p>
+            </p:txBody>
+          </p:sp>
+          <p:sp>
+            <p:nvSpPr>
+              <p:cNvPr id="31" name="Rectangle 30">
+                <a:extLst>
+                  <a:ext uri="{FF2B5EF4-FFF2-40B4-BE49-F238E27FC236}">
+                    <a16:creationId xmlns:a16="http://schemas.microsoft.com/office/drawing/2014/main" id="{553CF812-0080-9658-8CBE-A235D1CB984F}"/>
+                  </a:ext>
+                </a:extLst>
+              </p:cNvPr>
+              <p:cNvSpPr/>
+              <p:nvPr/>
+            </p:nvSpPr>
+            <p:spPr>
+              <a:xfrm>
+                <a:off x="531611" y="1473802"/>
+                <a:ext cx="241560" cy="247507"/>
+              </a:xfrm>
+              <a:prstGeom prst="rect">
+                <a:avLst/>
+              </a:prstGeom>
+              <a:solidFill>
+                <a:schemeClr val="bg1">
+                  <a:lumMod val="75000"/>
+                </a:schemeClr>
+              </a:solidFill>
+            </p:spPr>
+            <p:style>
+              <a:lnRef idx="2">
+                <a:schemeClr val="accent1">
+                  <a:shade val="15000"/>
+                </a:schemeClr>
+              </a:lnRef>
+              <a:fillRef idx="1">
+                <a:schemeClr val="accent1"/>
+              </a:fillRef>
+              <a:effectRef idx="0">
+                <a:schemeClr val="accent1"/>
+              </a:effectRef>
+              <a:fontRef idx="minor">
+                <a:schemeClr val="lt1"/>
+              </a:fontRef>
+            </p:style>
+            <p:txBody>
+              <a:bodyPr rtlCol="0" anchor="ctr"/>
+              <a:lstStyle/>
+              <a:p>
+                <a:pPr algn="ctr"/>
+                <a:endParaRPr lang="en-DE"/>
+              </a:p>
+            </p:txBody>
+          </p:sp>
+          <p:sp>
+            <p:nvSpPr>
+              <p:cNvPr id="32" name="Rectangle 31">
+                <a:extLst>
+                  <a:ext uri="{FF2B5EF4-FFF2-40B4-BE49-F238E27FC236}">
+                    <a16:creationId xmlns:a16="http://schemas.microsoft.com/office/drawing/2014/main" id="{D334AC23-40D9-74D7-15B6-6B208D40D2BC}"/>
+                  </a:ext>
+                </a:extLst>
+              </p:cNvPr>
+              <p:cNvSpPr/>
+              <p:nvPr/>
+            </p:nvSpPr>
+            <p:spPr>
+              <a:xfrm>
+                <a:off x="774464" y="1473802"/>
+                <a:ext cx="241560" cy="247507"/>
+              </a:xfrm>
+              <a:prstGeom prst="rect">
+                <a:avLst/>
+              </a:prstGeom>
+              <a:solidFill>
+                <a:schemeClr val="bg1"/>
+              </a:solidFill>
+            </p:spPr>
+            <p:style>
+              <a:lnRef idx="2">
+                <a:schemeClr val="accent1">
+                  <a:shade val="15000"/>
+                </a:schemeClr>
+              </a:lnRef>
+              <a:fillRef idx="1">
+                <a:schemeClr val="accent1"/>
+              </a:fillRef>
+              <a:effectRef idx="0">
+                <a:schemeClr val="accent1"/>
+              </a:effectRef>
+              <a:fontRef idx="minor">
+                <a:schemeClr val="lt1"/>
+              </a:fontRef>
+            </p:style>
+            <p:txBody>
+              <a:bodyPr rtlCol="0" anchor="ctr"/>
+              <a:lstStyle/>
+              <a:p>
+                <a:pPr algn="ctr"/>
+                <a:endParaRPr lang="en-DE"/>
+              </a:p>
+            </p:txBody>
+          </p:sp>
+          <p:sp>
+            <p:nvSpPr>
+              <p:cNvPr id="33" name="Rectangle 32">
+                <a:extLst>
+                  <a:ext uri="{FF2B5EF4-FFF2-40B4-BE49-F238E27FC236}">
+                    <a16:creationId xmlns:a16="http://schemas.microsoft.com/office/drawing/2014/main" id="{0A3C26FD-80C0-3F96-5F41-CB4FE1679A3D}"/>
+                  </a:ext>
+                </a:extLst>
+              </p:cNvPr>
+              <p:cNvSpPr/>
+              <p:nvPr/>
+            </p:nvSpPr>
+            <p:spPr>
+              <a:xfrm>
+                <a:off x="1016024" y="1473802"/>
+                <a:ext cx="241560" cy="247507"/>
+              </a:xfrm>
+              <a:prstGeom prst="rect">
+                <a:avLst/>
+              </a:prstGeom>
+              <a:solidFill>
+                <a:schemeClr val="bg1"/>
+              </a:solidFill>
+            </p:spPr>
+            <p:style>
+              <a:lnRef idx="2">
+                <a:schemeClr val="accent1">
+                  <a:shade val="15000"/>
+                </a:schemeClr>
+              </a:lnRef>
+              <a:fillRef idx="1">
+                <a:schemeClr val="accent1"/>
+              </a:fillRef>
+              <a:effectRef idx="0">
+                <a:schemeClr val="accent1"/>
+              </a:effectRef>
+              <a:fontRef idx="minor">
+                <a:schemeClr val="lt1"/>
+              </a:fontRef>
+            </p:style>
+            <p:txBody>
+              <a:bodyPr rtlCol="0" anchor="ctr"/>
+              <a:lstStyle/>
+              <a:p>
+                <a:pPr algn="ctr"/>
+                <a:endParaRPr lang="en-DE"/>
+              </a:p>
+            </p:txBody>
+          </p:sp>
+          <p:sp>
+            <p:nvSpPr>
+              <p:cNvPr id="34" name="Rectangle 33">
+                <a:extLst>
+                  <a:ext uri="{FF2B5EF4-FFF2-40B4-BE49-F238E27FC236}">
+                    <a16:creationId xmlns:a16="http://schemas.microsoft.com/office/drawing/2014/main" id="{6F7B10C8-2ADA-7870-F003-0E99E40B92F3}"/>
+                  </a:ext>
+                </a:extLst>
+              </p:cNvPr>
+              <p:cNvSpPr/>
+              <p:nvPr/>
+            </p:nvSpPr>
+            <p:spPr>
+              <a:xfrm>
+                <a:off x="288758" y="1728346"/>
+                <a:ext cx="241560" cy="247507"/>
+              </a:xfrm>
+              <a:prstGeom prst="rect">
+                <a:avLst/>
+              </a:prstGeom>
+              <a:solidFill>
+                <a:schemeClr val="bg1"/>
+              </a:solidFill>
+            </p:spPr>
+            <p:style>
+              <a:lnRef idx="2">
+                <a:schemeClr val="accent1">
+                  <a:shade val="15000"/>
+                </a:schemeClr>
+              </a:lnRef>
+              <a:fillRef idx="1">
+                <a:schemeClr val="accent1"/>
+              </a:fillRef>
+              <a:effectRef idx="0">
+                <a:schemeClr val="accent1"/>
+              </a:effectRef>
+              <a:fontRef idx="minor">
+                <a:schemeClr val="lt1"/>
+              </a:fontRef>
+            </p:style>
+            <p:txBody>
+              <a:bodyPr rtlCol="0" anchor="ctr"/>
+              <a:lstStyle/>
+              <a:p>
+                <a:pPr algn="ctr"/>
+                <a:endParaRPr lang="en-DE"/>
+              </a:p>
+            </p:txBody>
+          </p:sp>
+          <p:sp>
+            <p:nvSpPr>
+              <p:cNvPr id="35" name="Rectangle 34">
+                <a:extLst>
+                  <a:ext uri="{FF2B5EF4-FFF2-40B4-BE49-F238E27FC236}">
+                    <a16:creationId xmlns:a16="http://schemas.microsoft.com/office/drawing/2014/main" id="{B9174A0C-D197-80E6-2218-95F0FD205D08}"/>
+                  </a:ext>
+                </a:extLst>
+              </p:cNvPr>
+              <p:cNvSpPr/>
+              <p:nvPr/>
+            </p:nvSpPr>
+            <p:spPr>
+              <a:xfrm>
+                <a:off x="531611" y="1728346"/>
+                <a:ext cx="241560" cy="247507"/>
+              </a:xfrm>
+              <a:prstGeom prst="rect">
+                <a:avLst/>
+              </a:prstGeom>
+              <a:solidFill>
+                <a:schemeClr val="bg1"/>
+              </a:solidFill>
+            </p:spPr>
+            <p:style>
+              <a:lnRef idx="2">
+                <a:schemeClr val="accent1">
+                  <a:shade val="15000"/>
+                </a:schemeClr>
+              </a:lnRef>
+              <a:fillRef idx="1">
+                <a:schemeClr val="accent1"/>
+              </a:fillRef>
+              <a:effectRef idx="0">
+                <a:schemeClr val="accent1"/>
+              </a:effectRef>
+              <a:fontRef idx="minor">
+                <a:schemeClr val="lt1"/>
+              </a:fontRef>
+            </p:style>
+            <p:txBody>
+              <a:bodyPr rtlCol="0" anchor="ctr"/>
+              <a:lstStyle/>
+              <a:p>
+                <a:pPr algn="ctr"/>
+                <a:endParaRPr lang="en-DE"/>
+              </a:p>
+            </p:txBody>
+          </p:sp>
+          <p:sp>
+            <p:nvSpPr>
+              <p:cNvPr id="36" name="Rectangle 35">
+                <a:extLst>
+                  <a:ext uri="{FF2B5EF4-FFF2-40B4-BE49-F238E27FC236}">
+                    <a16:creationId xmlns:a16="http://schemas.microsoft.com/office/drawing/2014/main" id="{54395DE9-B7F0-83C3-F7F0-9C96BE5DAB46}"/>
+                  </a:ext>
+                </a:extLst>
+              </p:cNvPr>
+              <p:cNvSpPr/>
+              <p:nvPr/>
+            </p:nvSpPr>
+            <p:spPr>
+              <a:xfrm>
+                <a:off x="774464" y="1728346"/>
+                <a:ext cx="241560" cy="247507"/>
+              </a:xfrm>
+              <a:prstGeom prst="rect">
+                <a:avLst/>
+              </a:prstGeom>
+              <a:solidFill>
+                <a:schemeClr val="tx1">
+                  <a:lumMod val="65000"/>
+                  <a:lumOff val="35000"/>
+                </a:schemeClr>
+              </a:solidFill>
+            </p:spPr>
+            <p:style>
+              <a:lnRef idx="2">
+                <a:schemeClr val="accent1">
+                  <a:shade val="15000"/>
+                </a:schemeClr>
+              </a:lnRef>
+              <a:fillRef idx="1">
+                <a:schemeClr val="accent1"/>
+              </a:fillRef>
+              <a:effectRef idx="0">
+                <a:schemeClr val="accent1"/>
+              </a:effectRef>
+              <a:fontRef idx="minor">
+                <a:schemeClr val="lt1"/>
+              </a:fontRef>
+            </p:style>
+            <p:txBody>
+              <a:bodyPr rtlCol="0" anchor="ctr"/>
+              <a:lstStyle/>
+              <a:p>
+                <a:pPr algn="ctr"/>
+                <a:endParaRPr lang="en-DE"/>
+              </a:p>
+            </p:txBody>
+          </p:sp>
+          <p:sp>
+            <p:nvSpPr>
+              <p:cNvPr id="37" name="Rectangle 36">
+                <a:extLst>
+                  <a:ext uri="{FF2B5EF4-FFF2-40B4-BE49-F238E27FC236}">
+                    <a16:creationId xmlns:a16="http://schemas.microsoft.com/office/drawing/2014/main" id="{094A7429-9E68-2A38-149F-2CA99DE6850A}"/>
+                  </a:ext>
+                </a:extLst>
+              </p:cNvPr>
+              <p:cNvSpPr/>
+              <p:nvPr/>
+            </p:nvSpPr>
+            <p:spPr>
+              <a:xfrm>
+                <a:off x="1016024" y="1728346"/>
+                <a:ext cx="241560" cy="247507"/>
+              </a:xfrm>
+              <a:prstGeom prst="rect">
+                <a:avLst/>
+              </a:prstGeom>
+              <a:solidFill>
+                <a:schemeClr val="bg1"/>
+              </a:solidFill>
+            </p:spPr>
+            <p:style>
+              <a:lnRef idx="2">
+                <a:schemeClr val="accent1">
+                  <a:shade val="15000"/>
+                </a:schemeClr>
+              </a:lnRef>
+              <a:fillRef idx="1">
+                <a:schemeClr val="accent1"/>
+              </a:fillRef>
+              <a:effectRef idx="0">
+                <a:schemeClr val="accent1"/>
+              </a:effectRef>
+              <a:fontRef idx="minor">
+                <a:schemeClr val="lt1"/>
+              </a:fontRef>
+            </p:style>
+            <p:txBody>
+              <a:bodyPr rtlCol="0" anchor="ctr"/>
+              <a:lstStyle/>
+              <a:p>
+                <a:pPr algn="ctr"/>
+                <a:endParaRPr lang="en-DE"/>
+              </a:p>
+            </p:txBody>
+          </p:sp>
+          <p:sp>
+            <p:nvSpPr>
+              <p:cNvPr id="38" name="Rectangle 37">
+                <a:extLst>
+                  <a:ext uri="{FF2B5EF4-FFF2-40B4-BE49-F238E27FC236}">
+                    <a16:creationId xmlns:a16="http://schemas.microsoft.com/office/drawing/2014/main" id="{3FAC34A0-418B-49B8-FB9A-9B38E52EC7C2}"/>
+                  </a:ext>
+                </a:extLst>
+              </p:cNvPr>
+              <p:cNvSpPr/>
+              <p:nvPr/>
+            </p:nvSpPr>
+            <p:spPr>
+              <a:xfrm>
+                <a:off x="288758" y="1975853"/>
+                <a:ext cx="241560" cy="247507"/>
+              </a:xfrm>
+              <a:prstGeom prst="rect">
+                <a:avLst/>
+              </a:prstGeom>
+              <a:solidFill>
+                <a:schemeClr val="bg1">
+                  <a:lumMod val="75000"/>
+                </a:schemeClr>
+              </a:solidFill>
+            </p:spPr>
+            <p:style>
+              <a:lnRef idx="2">
+                <a:schemeClr val="accent1">
+                  <a:shade val="15000"/>
+                </a:schemeClr>
+              </a:lnRef>
+              <a:fillRef idx="1">
+                <a:schemeClr val="accent1"/>
+              </a:fillRef>
+              <a:effectRef idx="0">
+                <a:schemeClr val="accent1"/>
+              </a:effectRef>
+              <a:fontRef idx="minor">
+                <a:schemeClr val="lt1"/>
+              </a:fontRef>
+            </p:style>
+            <p:txBody>
+              <a:bodyPr rtlCol="0" anchor="ctr"/>
+              <a:lstStyle/>
+              <a:p>
+                <a:pPr algn="ctr"/>
+                <a:endParaRPr lang="en-DE"/>
+              </a:p>
+            </p:txBody>
+          </p:sp>
+          <p:sp>
+            <p:nvSpPr>
+              <p:cNvPr id="39" name="Rectangle 38">
+                <a:extLst>
+                  <a:ext uri="{FF2B5EF4-FFF2-40B4-BE49-F238E27FC236}">
+                    <a16:creationId xmlns:a16="http://schemas.microsoft.com/office/drawing/2014/main" id="{7AA83DEF-C299-021A-7F11-77E2B099F8A5}"/>
+                  </a:ext>
+                </a:extLst>
+              </p:cNvPr>
+              <p:cNvSpPr/>
+              <p:nvPr/>
+            </p:nvSpPr>
+            <p:spPr>
+              <a:xfrm>
+                <a:off x="531611" y="1975853"/>
+                <a:ext cx="241560" cy="247507"/>
+              </a:xfrm>
+              <a:prstGeom prst="rect">
+                <a:avLst/>
+              </a:prstGeom>
+              <a:solidFill>
+                <a:schemeClr val="bg1"/>
+              </a:solidFill>
+            </p:spPr>
+            <p:style>
+              <a:lnRef idx="2">
+                <a:schemeClr val="accent1">
+                  <a:shade val="15000"/>
+                </a:schemeClr>
+              </a:lnRef>
+              <a:fillRef idx="1">
+                <a:schemeClr val="accent1"/>
+              </a:fillRef>
+              <a:effectRef idx="0">
+                <a:schemeClr val="accent1"/>
+              </a:effectRef>
+              <a:fontRef idx="minor">
+                <a:schemeClr val="lt1"/>
+              </a:fontRef>
+            </p:style>
+            <p:txBody>
+              <a:bodyPr rtlCol="0" anchor="ctr"/>
+              <a:lstStyle/>
+              <a:p>
+                <a:pPr algn="ctr"/>
+                <a:endParaRPr lang="en-DE"/>
+              </a:p>
+            </p:txBody>
+          </p:sp>
+          <p:sp>
+            <p:nvSpPr>
+              <p:cNvPr id="40" name="Rectangle 39">
+                <a:extLst>
+                  <a:ext uri="{FF2B5EF4-FFF2-40B4-BE49-F238E27FC236}">
+                    <a16:creationId xmlns:a16="http://schemas.microsoft.com/office/drawing/2014/main" id="{10CD5941-A261-555E-F715-C2D2E2649936}"/>
+                  </a:ext>
+                </a:extLst>
+              </p:cNvPr>
+              <p:cNvSpPr/>
+              <p:nvPr/>
+            </p:nvSpPr>
+            <p:spPr>
+              <a:xfrm>
+                <a:off x="774464" y="1975853"/>
+                <a:ext cx="241560" cy="247507"/>
+              </a:xfrm>
+              <a:prstGeom prst="rect">
+                <a:avLst/>
+              </a:prstGeom>
+              <a:solidFill>
+                <a:schemeClr val="bg1"/>
+              </a:solidFill>
+            </p:spPr>
+            <p:style>
+              <a:lnRef idx="2">
+                <a:schemeClr val="accent1">
+                  <a:shade val="15000"/>
+                </a:schemeClr>
+              </a:lnRef>
+              <a:fillRef idx="1">
+                <a:schemeClr val="accent1"/>
+              </a:fillRef>
+              <a:effectRef idx="0">
+                <a:schemeClr val="accent1"/>
+              </a:effectRef>
+              <a:fontRef idx="minor">
+                <a:schemeClr val="lt1"/>
+              </a:fontRef>
+            </p:style>
+            <p:txBody>
+              <a:bodyPr rtlCol="0" anchor="ctr"/>
+              <a:lstStyle/>
+              <a:p>
+                <a:pPr algn="ctr"/>
+                <a:endParaRPr lang="en-DE"/>
+              </a:p>
+            </p:txBody>
+          </p:sp>
+          <p:sp>
+            <p:nvSpPr>
+              <p:cNvPr id="41" name="Rectangle 40">
+                <a:extLst>
+                  <a:ext uri="{FF2B5EF4-FFF2-40B4-BE49-F238E27FC236}">
+                    <a16:creationId xmlns:a16="http://schemas.microsoft.com/office/drawing/2014/main" id="{0498BAB9-EBA9-A737-BDFF-37508393AE1F}"/>
+                  </a:ext>
+                </a:extLst>
+              </p:cNvPr>
+              <p:cNvSpPr/>
+              <p:nvPr/>
+            </p:nvSpPr>
+            <p:spPr>
+              <a:xfrm>
+                <a:off x="1016024" y="1975853"/>
+                <a:ext cx="241560" cy="247507"/>
+              </a:xfrm>
+              <a:prstGeom prst="rect">
+                <a:avLst/>
+              </a:prstGeom>
+              <a:solidFill>
+                <a:schemeClr val="bg2">
+                  <a:lumMod val="50000"/>
+                </a:schemeClr>
+              </a:solidFill>
+            </p:spPr>
+            <p:style>
+              <a:lnRef idx="2">
+                <a:schemeClr val="accent1">
+                  <a:shade val="15000"/>
+                </a:schemeClr>
+              </a:lnRef>
+              <a:fillRef idx="1">
+                <a:schemeClr val="accent1"/>
+              </a:fillRef>
+              <a:effectRef idx="0">
+                <a:schemeClr val="accent1"/>
+              </a:effectRef>
+              <a:fontRef idx="minor">
+                <a:schemeClr val="lt1"/>
+              </a:fontRef>
+            </p:style>
+            <p:txBody>
+              <a:bodyPr rtlCol="0" anchor="ctr"/>
+              <a:lstStyle/>
+              <a:p>
+                <a:pPr algn="ctr"/>
+                <a:endParaRPr lang="en-DE"/>
+              </a:p>
+            </p:txBody>
+          </p:sp>
+        </p:grpSp>
+        <p:sp>
+          <p:nvSpPr>
+            <p:cNvPr id="25" name="TextBox 24">
+              <a:extLst>
+                <a:ext uri="{FF2B5EF4-FFF2-40B4-BE49-F238E27FC236}">
+                  <a16:creationId xmlns:a16="http://schemas.microsoft.com/office/drawing/2014/main" id="{C89D92E0-9C2A-5CB0-2614-F4CC524BB1A5}"/>
+                </a:ext>
+              </a:extLst>
+            </p:cNvPr>
+            <p:cNvSpPr txBox="1"/>
+            <p:nvPr/>
+          </p:nvSpPr>
+          <p:spPr>
+            <a:xfrm>
+              <a:off x="1092267" y="793793"/>
+              <a:ext cx="444352" cy="369332"/>
+            </a:xfrm>
+            <a:prstGeom prst="rect">
+              <a:avLst/>
+            </a:prstGeom>
+            <a:noFill/>
+          </p:spPr>
+          <p:txBody>
+            <a:bodyPr wrap="none" rtlCol="0">
+              <a:spAutoFit/>
+            </a:bodyPr>
+            <a:lstStyle/>
+            <a:p>
+              <a:r>
+                <a:rPr lang="en-DE" dirty="0"/>
+                <a:t>2D</a:t>
+              </a:r>
+            </a:p>
+          </p:txBody>
+        </p:sp>
+        <p:cxnSp>
+          <p:nvCxnSpPr>
+            <p:cNvPr id="26" name="Straight Arrow Connector 25">
+              <a:extLst>
+                <a:ext uri="{FF2B5EF4-FFF2-40B4-BE49-F238E27FC236}">
+                  <a16:creationId xmlns:a16="http://schemas.microsoft.com/office/drawing/2014/main" id="{271599A0-3227-80F3-4639-9E02AD93E6AC}"/>
+                </a:ext>
+              </a:extLst>
+            </p:cNvPr>
+            <p:cNvCxnSpPr/>
+            <p:nvPr/>
+          </p:nvCxnSpPr>
+          <p:spPr>
+            <a:xfrm>
+              <a:off x="1152400" y="2338982"/>
+              <a:ext cx="1095324" cy="0"/>
+            </a:xfrm>
+            <a:prstGeom prst="straightConnector1">
+              <a:avLst/>
+            </a:prstGeom>
+            <a:ln>
+              <a:solidFill>
+                <a:schemeClr val="tx1"/>
+              </a:solidFill>
+              <a:headEnd type="triangle" w="med" len="med"/>
+              <a:tailEnd type="triangle" w="med" len="med"/>
+            </a:ln>
+          </p:spPr>
+          <p:style>
+            <a:lnRef idx="1">
+              <a:schemeClr val="accent1"/>
+            </a:lnRef>
+            <a:fillRef idx="0">
+              <a:schemeClr val="accent1"/>
+            </a:fillRef>
+            <a:effectRef idx="0">
+              <a:schemeClr val="accent1"/>
+            </a:effectRef>
+            <a:fontRef idx="minor">
+              <a:schemeClr val="tx1"/>
+            </a:fontRef>
+          </p:style>
+        </p:cxnSp>
+        <p:cxnSp>
+          <p:nvCxnSpPr>
+            <p:cNvPr id="27" name="Straight Arrow Connector 26">
+              <a:extLst>
+                <a:ext uri="{FF2B5EF4-FFF2-40B4-BE49-F238E27FC236}">
+                  <a16:creationId xmlns:a16="http://schemas.microsoft.com/office/drawing/2014/main" id="{83EDABE3-E5D5-EE15-E5BB-A40E2976930E}"/>
+                </a:ext>
+              </a:extLst>
+            </p:cNvPr>
+            <p:cNvCxnSpPr>
+              <a:cxnSpLocks/>
+            </p:cNvCxnSpPr>
+            <p:nvPr/>
+          </p:nvCxnSpPr>
+          <p:spPr>
+            <a:xfrm flipV="1">
+              <a:off x="1073232" y="1325584"/>
+              <a:ext cx="0" cy="940840"/>
+            </a:xfrm>
+            <a:prstGeom prst="straightConnector1">
+              <a:avLst/>
+            </a:prstGeom>
+            <a:ln>
+              <a:solidFill>
+                <a:schemeClr val="tx1"/>
+              </a:solidFill>
+              <a:headEnd type="triangle" w="med" len="med"/>
+              <a:tailEnd type="triangle" w="med" len="med"/>
+            </a:ln>
+          </p:spPr>
+          <p:style>
+            <a:lnRef idx="1">
+              <a:schemeClr val="accent1"/>
+            </a:lnRef>
+            <a:fillRef idx="0">
+              <a:schemeClr val="accent1"/>
+            </a:fillRef>
+            <a:effectRef idx="0">
+              <a:schemeClr val="accent1"/>
+            </a:effectRef>
+            <a:fontRef idx="minor">
+              <a:schemeClr val="tx1"/>
+            </a:fontRef>
+          </p:style>
+        </p:cxnSp>
+        <p:sp>
+          <p:nvSpPr>
+            <p:cNvPr id="28" name="TextBox 27">
+              <a:extLst>
+                <a:ext uri="{FF2B5EF4-FFF2-40B4-BE49-F238E27FC236}">
+                  <a16:creationId xmlns:a16="http://schemas.microsoft.com/office/drawing/2014/main" id="{41C10051-067F-6413-EF47-883B163EF2D6}"/>
+                </a:ext>
+              </a:extLst>
+            </p:cNvPr>
+            <p:cNvSpPr txBox="1"/>
+            <p:nvPr/>
+          </p:nvSpPr>
+          <p:spPr>
+            <a:xfrm>
+              <a:off x="1607466" y="2405587"/>
+              <a:ext cx="304892" cy="369332"/>
+            </a:xfrm>
+            <a:prstGeom prst="rect">
+              <a:avLst/>
+            </a:prstGeom>
+            <a:noFill/>
+          </p:spPr>
+          <p:txBody>
+            <a:bodyPr wrap="none" rtlCol="0">
+              <a:spAutoFit/>
+            </a:bodyPr>
+            <a:lstStyle/>
+            <a:p>
+              <a:r>
+                <a:rPr lang="en-DE" dirty="0"/>
+                <a:t>X</a:t>
+              </a:r>
+            </a:p>
+          </p:txBody>
+        </p:sp>
+        <p:sp>
+          <p:nvSpPr>
+            <p:cNvPr id="29" name="TextBox 28">
+              <a:extLst>
+                <a:ext uri="{FF2B5EF4-FFF2-40B4-BE49-F238E27FC236}">
+                  <a16:creationId xmlns:a16="http://schemas.microsoft.com/office/drawing/2014/main" id="{309C407D-1A04-67BC-E513-34BC4B7D6DD7}"/>
+                </a:ext>
+              </a:extLst>
+            </p:cNvPr>
+            <p:cNvSpPr txBox="1"/>
+            <p:nvPr/>
+          </p:nvSpPr>
+          <p:spPr>
+            <a:xfrm>
+              <a:off x="791944" y="1500361"/>
+              <a:ext cx="304892" cy="369332"/>
+            </a:xfrm>
+            <a:prstGeom prst="rect">
+              <a:avLst/>
+            </a:prstGeom>
+            <a:noFill/>
+          </p:spPr>
+          <p:txBody>
+            <a:bodyPr wrap="none" rtlCol="0">
+              <a:spAutoFit/>
+            </a:bodyPr>
+            <a:lstStyle/>
+            <a:p>
+              <a:r>
+                <a:rPr lang="en-DE" dirty="0"/>
+                <a:t>Y</a:t>
+              </a:r>
+            </a:p>
+          </p:txBody>
+        </p:sp>
+      </p:grpSp>
+      <p:grpSp>
+        <p:nvGrpSpPr>
+          <p:cNvPr id="43" name="Group 42">
+            <a:extLst>
+              <a:ext uri="{FF2B5EF4-FFF2-40B4-BE49-F238E27FC236}">
+                <a16:creationId xmlns:a16="http://schemas.microsoft.com/office/drawing/2014/main" id="{679A22EB-8FC5-205B-2117-19C54898B0EF}"/>
+              </a:ext>
+            </a:extLst>
+          </p:cNvPr>
+          <p:cNvGrpSpPr/>
+          <p:nvPr/>
+        </p:nvGrpSpPr>
+        <p:grpSpPr>
+          <a:xfrm>
+            <a:off x="269479" y="4138581"/>
+            <a:ext cx="1139063" cy="1662813"/>
+            <a:chOff x="791944" y="793793"/>
+            <a:chExt cx="1509238" cy="1981126"/>
+          </a:xfrm>
+        </p:grpSpPr>
+        <p:grpSp>
+          <p:nvGrpSpPr>
+            <p:cNvPr id="44" name="Group 43">
+              <a:extLst>
+                <a:ext uri="{FF2B5EF4-FFF2-40B4-BE49-F238E27FC236}">
+                  <a16:creationId xmlns:a16="http://schemas.microsoft.com/office/drawing/2014/main" id="{94ADE756-3AA9-9F87-CA76-58B452B580AE}"/>
+                </a:ext>
+              </a:extLst>
+            </p:cNvPr>
+            <p:cNvGrpSpPr/>
+            <p:nvPr/>
+          </p:nvGrpSpPr>
+          <p:grpSpPr>
+            <a:xfrm>
+              <a:off x="1175929" y="1356626"/>
+              <a:ext cx="1125253" cy="870582"/>
+              <a:chOff x="288758" y="1473802"/>
+              <a:chExt cx="968826" cy="749558"/>
+            </a:xfrm>
+          </p:grpSpPr>
+          <p:sp>
+            <p:nvSpPr>
+              <p:cNvPr id="50" name="Rectangle 49">
+                <a:extLst>
+                  <a:ext uri="{FF2B5EF4-FFF2-40B4-BE49-F238E27FC236}">
+                    <a16:creationId xmlns:a16="http://schemas.microsoft.com/office/drawing/2014/main" id="{7F534CB0-F47F-2A3B-8818-BF147B31F81D}"/>
+                  </a:ext>
+                </a:extLst>
+              </p:cNvPr>
+              <p:cNvSpPr/>
+              <p:nvPr/>
+            </p:nvSpPr>
+            <p:spPr>
+              <a:xfrm>
+                <a:off x="288758" y="1473802"/>
+                <a:ext cx="241560" cy="247507"/>
+              </a:xfrm>
+              <a:prstGeom prst="rect">
+                <a:avLst/>
+              </a:prstGeom>
+              <a:solidFill>
+                <a:schemeClr val="bg1"/>
+              </a:solidFill>
+            </p:spPr>
+            <p:style>
+              <a:lnRef idx="2">
+                <a:schemeClr val="accent1">
+                  <a:shade val="15000"/>
+                </a:schemeClr>
+              </a:lnRef>
+              <a:fillRef idx="1">
+                <a:schemeClr val="accent1"/>
+              </a:fillRef>
+              <a:effectRef idx="0">
+                <a:schemeClr val="accent1"/>
+              </a:effectRef>
+              <a:fontRef idx="minor">
+                <a:schemeClr val="lt1"/>
+              </a:fontRef>
+            </p:style>
+            <p:txBody>
+              <a:bodyPr rtlCol="0" anchor="ctr"/>
+              <a:lstStyle/>
+              <a:p>
+                <a:pPr algn="ctr"/>
+                <a:endParaRPr lang="en-DE"/>
+              </a:p>
+            </p:txBody>
+          </p:sp>
+          <p:sp>
+            <p:nvSpPr>
+              <p:cNvPr id="51" name="Rectangle 50">
+                <a:extLst>
+                  <a:ext uri="{FF2B5EF4-FFF2-40B4-BE49-F238E27FC236}">
+                    <a16:creationId xmlns:a16="http://schemas.microsoft.com/office/drawing/2014/main" id="{8E221910-27D0-5D55-2F0B-861A598853F9}"/>
+                  </a:ext>
+                </a:extLst>
+              </p:cNvPr>
+              <p:cNvSpPr/>
+              <p:nvPr/>
+            </p:nvSpPr>
+            <p:spPr>
+              <a:xfrm>
+                <a:off x="531611" y="1473802"/>
+                <a:ext cx="241560" cy="247507"/>
+              </a:xfrm>
+              <a:prstGeom prst="rect">
+                <a:avLst/>
+              </a:prstGeom>
+              <a:solidFill>
+                <a:schemeClr val="bg1">
+                  <a:lumMod val="75000"/>
+                </a:schemeClr>
+              </a:solidFill>
+            </p:spPr>
+            <p:style>
+              <a:lnRef idx="2">
+                <a:schemeClr val="accent1">
+                  <a:shade val="15000"/>
+                </a:schemeClr>
+              </a:lnRef>
+              <a:fillRef idx="1">
+                <a:schemeClr val="accent1"/>
+              </a:fillRef>
+              <a:effectRef idx="0">
+                <a:schemeClr val="accent1"/>
+              </a:effectRef>
+              <a:fontRef idx="minor">
+                <a:schemeClr val="lt1"/>
+              </a:fontRef>
+            </p:style>
+            <p:txBody>
+              <a:bodyPr rtlCol="0" anchor="ctr"/>
+              <a:lstStyle/>
+              <a:p>
+                <a:pPr algn="ctr"/>
+                <a:endParaRPr lang="en-DE"/>
+              </a:p>
+            </p:txBody>
+          </p:sp>
+          <p:sp>
+            <p:nvSpPr>
+              <p:cNvPr id="52" name="Rectangle 51">
+                <a:extLst>
+                  <a:ext uri="{FF2B5EF4-FFF2-40B4-BE49-F238E27FC236}">
+                    <a16:creationId xmlns:a16="http://schemas.microsoft.com/office/drawing/2014/main" id="{E851CED1-13AB-321E-6E42-9C1E1CA5A083}"/>
+                  </a:ext>
+                </a:extLst>
+              </p:cNvPr>
+              <p:cNvSpPr/>
+              <p:nvPr/>
+            </p:nvSpPr>
+            <p:spPr>
+              <a:xfrm>
+                <a:off x="774464" y="1473802"/>
+                <a:ext cx="241560" cy="247507"/>
+              </a:xfrm>
+              <a:prstGeom prst="rect">
+                <a:avLst/>
+              </a:prstGeom>
+              <a:solidFill>
+                <a:schemeClr val="bg1"/>
+              </a:solidFill>
+            </p:spPr>
+            <p:style>
+              <a:lnRef idx="2">
+                <a:schemeClr val="accent1">
+                  <a:shade val="15000"/>
+                </a:schemeClr>
+              </a:lnRef>
+              <a:fillRef idx="1">
+                <a:schemeClr val="accent1"/>
+              </a:fillRef>
+              <a:effectRef idx="0">
+                <a:schemeClr val="accent1"/>
+              </a:effectRef>
+              <a:fontRef idx="minor">
+                <a:schemeClr val="lt1"/>
+              </a:fontRef>
+            </p:style>
+            <p:txBody>
+              <a:bodyPr rtlCol="0" anchor="ctr"/>
+              <a:lstStyle/>
+              <a:p>
+                <a:pPr algn="ctr"/>
+                <a:endParaRPr lang="en-DE"/>
+              </a:p>
+            </p:txBody>
+          </p:sp>
+          <p:sp>
+            <p:nvSpPr>
+              <p:cNvPr id="53" name="Rectangle 52">
+                <a:extLst>
+                  <a:ext uri="{FF2B5EF4-FFF2-40B4-BE49-F238E27FC236}">
+                    <a16:creationId xmlns:a16="http://schemas.microsoft.com/office/drawing/2014/main" id="{754D98FC-25E9-5F51-349A-C21518A6BF3D}"/>
+                  </a:ext>
+                </a:extLst>
+              </p:cNvPr>
+              <p:cNvSpPr/>
+              <p:nvPr/>
+            </p:nvSpPr>
+            <p:spPr>
+              <a:xfrm>
+                <a:off x="1016024" y="1473802"/>
+                <a:ext cx="241560" cy="247507"/>
+              </a:xfrm>
+              <a:prstGeom prst="rect">
+                <a:avLst/>
+              </a:prstGeom>
+              <a:solidFill>
+                <a:schemeClr val="bg1">
+                  <a:lumMod val="85000"/>
+                </a:schemeClr>
+              </a:solidFill>
+            </p:spPr>
+            <p:style>
+              <a:lnRef idx="2">
+                <a:schemeClr val="accent1">
+                  <a:shade val="15000"/>
+                </a:schemeClr>
+              </a:lnRef>
+              <a:fillRef idx="1">
+                <a:schemeClr val="accent1"/>
+              </a:fillRef>
+              <a:effectRef idx="0">
+                <a:schemeClr val="accent1"/>
+              </a:effectRef>
+              <a:fontRef idx="minor">
+                <a:schemeClr val="lt1"/>
+              </a:fontRef>
+            </p:style>
+            <p:txBody>
+              <a:bodyPr rtlCol="0" anchor="ctr"/>
+              <a:lstStyle/>
+              <a:p>
+                <a:pPr algn="ctr"/>
+                <a:endParaRPr lang="en-DE"/>
+              </a:p>
+            </p:txBody>
+          </p:sp>
+          <p:sp>
+            <p:nvSpPr>
+              <p:cNvPr id="54" name="Rectangle 53">
+                <a:extLst>
+                  <a:ext uri="{FF2B5EF4-FFF2-40B4-BE49-F238E27FC236}">
+                    <a16:creationId xmlns:a16="http://schemas.microsoft.com/office/drawing/2014/main" id="{52BF6280-62F6-C196-E668-4E6007B00380}"/>
+                  </a:ext>
+                </a:extLst>
+              </p:cNvPr>
+              <p:cNvSpPr/>
+              <p:nvPr/>
+            </p:nvSpPr>
+            <p:spPr>
+              <a:xfrm>
+                <a:off x="288758" y="1728346"/>
+                <a:ext cx="241560" cy="247507"/>
+              </a:xfrm>
+              <a:prstGeom prst="rect">
+                <a:avLst/>
+              </a:prstGeom>
+              <a:solidFill>
+                <a:schemeClr val="bg1"/>
+              </a:solidFill>
+            </p:spPr>
+            <p:style>
+              <a:lnRef idx="2">
+                <a:schemeClr val="accent1">
+                  <a:shade val="15000"/>
+                </a:schemeClr>
+              </a:lnRef>
+              <a:fillRef idx="1">
+                <a:schemeClr val="accent1"/>
+              </a:fillRef>
+              <a:effectRef idx="0">
+                <a:schemeClr val="accent1"/>
+              </a:effectRef>
+              <a:fontRef idx="minor">
+                <a:schemeClr val="lt1"/>
+              </a:fontRef>
+            </p:style>
+            <p:txBody>
+              <a:bodyPr rtlCol="0" anchor="ctr"/>
+              <a:lstStyle/>
+              <a:p>
+                <a:pPr algn="ctr"/>
+                <a:endParaRPr lang="en-DE"/>
+              </a:p>
+            </p:txBody>
+          </p:sp>
+          <p:sp>
+            <p:nvSpPr>
+              <p:cNvPr id="55" name="Rectangle 54">
+                <a:extLst>
+                  <a:ext uri="{FF2B5EF4-FFF2-40B4-BE49-F238E27FC236}">
+                    <a16:creationId xmlns:a16="http://schemas.microsoft.com/office/drawing/2014/main" id="{69BFC64C-179D-F64E-C44F-270E7D61ED7A}"/>
+                  </a:ext>
+                </a:extLst>
+              </p:cNvPr>
+              <p:cNvSpPr/>
+              <p:nvPr/>
+            </p:nvSpPr>
+            <p:spPr>
+              <a:xfrm>
+                <a:off x="531611" y="1728346"/>
+                <a:ext cx="241560" cy="247507"/>
+              </a:xfrm>
+              <a:prstGeom prst="rect">
+                <a:avLst/>
+              </a:prstGeom>
+              <a:solidFill>
+                <a:schemeClr val="bg1"/>
+              </a:solidFill>
+            </p:spPr>
+            <p:style>
+              <a:lnRef idx="2">
+                <a:schemeClr val="accent1">
+                  <a:shade val="15000"/>
+                </a:schemeClr>
+              </a:lnRef>
+              <a:fillRef idx="1">
+                <a:schemeClr val="accent1"/>
+              </a:fillRef>
+              <a:effectRef idx="0">
+                <a:schemeClr val="accent1"/>
+              </a:effectRef>
+              <a:fontRef idx="minor">
+                <a:schemeClr val="lt1"/>
+              </a:fontRef>
+            </p:style>
+            <p:txBody>
+              <a:bodyPr rtlCol="0" anchor="ctr"/>
+              <a:lstStyle/>
+              <a:p>
+                <a:pPr algn="ctr"/>
+                <a:endParaRPr lang="en-DE"/>
+              </a:p>
+            </p:txBody>
+          </p:sp>
+          <p:sp>
+            <p:nvSpPr>
+              <p:cNvPr id="56" name="Rectangle 55">
+                <a:extLst>
+                  <a:ext uri="{FF2B5EF4-FFF2-40B4-BE49-F238E27FC236}">
+                    <a16:creationId xmlns:a16="http://schemas.microsoft.com/office/drawing/2014/main" id="{25750E19-45B5-2154-D0B5-D1085697E73A}"/>
+                  </a:ext>
+                </a:extLst>
+              </p:cNvPr>
+              <p:cNvSpPr/>
+              <p:nvPr/>
+            </p:nvSpPr>
+            <p:spPr>
+              <a:xfrm>
+                <a:off x="774464" y="1728346"/>
+                <a:ext cx="241560" cy="247507"/>
+              </a:xfrm>
+              <a:prstGeom prst="rect">
+                <a:avLst/>
+              </a:prstGeom>
+              <a:solidFill>
+                <a:schemeClr val="tx1">
+                  <a:lumMod val="65000"/>
+                  <a:lumOff val="35000"/>
+                </a:schemeClr>
+              </a:solidFill>
+            </p:spPr>
+            <p:style>
+              <a:lnRef idx="2">
+                <a:schemeClr val="accent1">
+                  <a:shade val="15000"/>
+                </a:schemeClr>
+              </a:lnRef>
+              <a:fillRef idx="1">
+                <a:schemeClr val="accent1"/>
+              </a:fillRef>
+              <a:effectRef idx="0">
+                <a:schemeClr val="accent1"/>
+              </a:effectRef>
+              <a:fontRef idx="minor">
+                <a:schemeClr val="lt1"/>
+              </a:fontRef>
+            </p:style>
+            <p:txBody>
+              <a:bodyPr rtlCol="0" anchor="ctr"/>
+              <a:lstStyle/>
+              <a:p>
+                <a:pPr algn="ctr"/>
+                <a:endParaRPr lang="en-DE"/>
+              </a:p>
+            </p:txBody>
+          </p:sp>
+          <p:sp>
+            <p:nvSpPr>
+              <p:cNvPr id="57" name="Rectangle 56">
+                <a:extLst>
+                  <a:ext uri="{FF2B5EF4-FFF2-40B4-BE49-F238E27FC236}">
+                    <a16:creationId xmlns:a16="http://schemas.microsoft.com/office/drawing/2014/main" id="{725A40DA-9720-B362-9716-280F7C94C688}"/>
+                  </a:ext>
+                </a:extLst>
+              </p:cNvPr>
+              <p:cNvSpPr/>
+              <p:nvPr/>
+            </p:nvSpPr>
+            <p:spPr>
+              <a:xfrm>
+                <a:off x="1016024" y="1728346"/>
+                <a:ext cx="241560" cy="247507"/>
+              </a:xfrm>
+              <a:prstGeom prst="rect">
+                <a:avLst/>
+              </a:prstGeom>
+              <a:solidFill>
+                <a:schemeClr val="bg1"/>
+              </a:solidFill>
+            </p:spPr>
+            <p:style>
+              <a:lnRef idx="2">
+                <a:schemeClr val="accent1">
+                  <a:shade val="15000"/>
+                </a:schemeClr>
+              </a:lnRef>
+              <a:fillRef idx="1">
+                <a:schemeClr val="accent1"/>
+              </a:fillRef>
+              <a:effectRef idx="0">
+                <a:schemeClr val="accent1"/>
+              </a:effectRef>
+              <a:fontRef idx="minor">
+                <a:schemeClr val="lt1"/>
+              </a:fontRef>
+            </p:style>
+            <p:txBody>
+              <a:bodyPr rtlCol="0" anchor="ctr"/>
+              <a:lstStyle/>
+              <a:p>
+                <a:pPr algn="ctr"/>
+                <a:endParaRPr lang="en-DE"/>
+              </a:p>
+            </p:txBody>
+          </p:sp>
+          <p:sp>
+            <p:nvSpPr>
+              <p:cNvPr id="58" name="Rectangle 57">
+                <a:extLst>
+                  <a:ext uri="{FF2B5EF4-FFF2-40B4-BE49-F238E27FC236}">
+                    <a16:creationId xmlns:a16="http://schemas.microsoft.com/office/drawing/2014/main" id="{F2B10A22-C710-CFE5-6D31-B234B3356327}"/>
+                  </a:ext>
+                </a:extLst>
+              </p:cNvPr>
+              <p:cNvSpPr/>
+              <p:nvPr/>
+            </p:nvSpPr>
+            <p:spPr>
+              <a:xfrm>
+                <a:off x="288758" y="1975853"/>
+                <a:ext cx="241560" cy="247507"/>
+              </a:xfrm>
+              <a:prstGeom prst="rect">
+                <a:avLst/>
+              </a:prstGeom>
+              <a:solidFill>
+                <a:schemeClr val="bg1">
+                  <a:lumMod val="75000"/>
+                </a:schemeClr>
+              </a:solidFill>
+            </p:spPr>
+            <p:style>
+              <a:lnRef idx="2">
+                <a:schemeClr val="accent1">
+                  <a:shade val="15000"/>
+                </a:schemeClr>
+              </a:lnRef>
+              <a:fillRef idx="1">
+                <a:schemeClr val="accent1"/>
+              </a:fillRef>
+              <a:effectRef idx="0">
+                <a:schemeClr val="accent1"/>
+              </a:effectRef>
+              <a:fontRef idx="minor">
+                <a:schemeClr val="lt1"/>
+              </a:fontRef>
+            </p:style>
+            <p:txBody>
+              <a:bodyPr rtlCol="0" anchor="ctr"/>
+              <a:lstStyle/>
+              <a:p>
+                <a:pPr algn="ctr"/>
+                <a:endParaRPr lang="en-DE"/>
+              </a:p>
+            </p:txBody>
+          </p:sp>
+          <p:sp>
+            <p:nvSpPr>
+              <p:cNvPr id="59" name="Rectangle 58">
+                <a:extLst>
+                  <a:ext uri="{FF2B5EF4-FFF2-40B4-BE49-F238E27FC236}">
+                    <a16:creationId xmlns:a16="http://schemas.microsoft.com/office/drawing/2014/main" id="{9C89303B-D7D3-02A0-BCB1-F6358C30EFFB}"/>
+                  </a:ext>
+                </a:extLst>
+              </p:cNvPr>
+              <p:cNvSpPr/>
+              <p:nvPr/>
+            </p:nvSpPr>
+            <p:spPr>
+              <a:xfrm>
+                <a:off x="531611" y="1975853"/>
+                <a:ext cx="241560" cy="247507"/>
+              </a:xfrm>
+              <a:prstGeom prst="rect">
+                <a:avLst/>
+              </a:prstGeom>
+              <a:solidFill>
+                <a:schemeClr val="bg2">
+                  <a:lumMod val="25000"/>
+                </a:schemeClr>
+              </a:solidFill>
+            </p:spPr>
+            <p:style>
+              <a:lnRef idx="2">
+                <a:schemeClr val="accent1">
+                  <a:shade val="15000"/>
+                </a:schemeClr>
+              </a:lnRef>
+              <a:fillRef idx="1">
+                <a:schemeClr val="accent1"/>
+              </a:fillRef>
+              <a:effectRef idx="0">
+                <a:schemeClr val="accent1"/>
+              </a:effectRef>
+              <a:fontRef idx="minor">
+                <a:schemeClr val="lt1"/>
+              </a:fontRef>
+            </p:style>
+            <p:txBody>
+              <a:bodyPr rtlCol="0" anchor="ctr"/>
+              <a:lstStyle/>
+              <a:p>
+                <a:pPr algn="ctr"/>
+                <a:endParaRPr lang="en-DE"/>
+              </a:p>
+            </p:txBody>
+          </p:sp>
+          <p:sp>
+            <p:nvSpPr>
+              <p:cNvPr id="60" name="Rectangle 59">
+                <a:extLst>
+                  <a:ext uri="{FF2B5EF4-FFF2-40B4-BE49-F238E27FC236}">
+                    <a16:creationId xmlns:a16="http://schemas.microsoft.com/office/drawing/2014/main" id="{992B1412-FD6C-7491-E765-034EA53B0EBD}"/>
+                  </a:ext>
+                </a:extLst>
+              </p:cNvPr>
+              <p:cNvSpPr/>
+              <p:nvPr/>
+            </p:nvSpPr>
+            <p:spPr>
+              <a:xfrm>
+                <a:off x="774464" y="1975853"/>
+                <a:ext cx="241560" cy="247507"/>
+              </a:xfrm>
+              <a:prstGeom prst="rect">
+                <a:avLst/>
+              </a:prstGeom>
+              <a:solidFill>
+                <a:schemeClr val="bg1"/>
+              </a:solidFill>
+            </p:spPr>
+            <p:style>
+              <a:lnRef idx="2">
+                <a:schemeClr val="accent1">
+                  <a:shade val="15000"/>
+                </a:schemeClr>
+              </a:lnRef>
+              <a:fillRef idx="1">
+                <a:schemeClr val="accent1"/>
+              </a:fillRef>
+              <a:effectRef idx="0">
+                <a:schemeClr val="accent1"/>
+              </a:effectRef>
+              <a:fontRef idx="minor">
+                <a:schemeClr val="lt1"/>
+              </a:fontRef>
+            </p:style>
+            <p:txBody>
+              <a:bodyPr rtlCol="0" anchor="ctr"/>
+              <a:lstStyle/>
+              <a:p>
+                <a:pPr algn="ctr"/>
+                <a:endParaRPr lang="en-DE"/>
+              </a:p>
+            </p:txBody>
+          </p:sp>
+          <p:sp>
+            <p:nvSpPr>
+              <p:cNvPr id="61" name="Rectangle 60">
+                <a:extLst>
+                  <a:ext uri="{FF2B5EF4-FFF2-40B4-BE49-F238E27FC236}">
+                    <a16:creationId xmlns:a16="http://schemas.microsoft.com/office/drawing/2014/main" id="{120FD3E7-B07C-3144-C0F7-2487DDF7452D}"/>
+                  </a:ext>
+                </a:extLst>
+              </p:cNvPr>
+              <p:cNvSpPr/>
+              <p:nvPr/>
+            </p:nvSpPr>
+            <p:spPr>
+              <a:xfrm>
+                <a:off x="1016024" y="1975853"/>
+                <a:ext cx="241560" cy="247507"/>
+              </a:xfrm>
+              <a:prstGeom prst="rect">
+                <a:avLst/>
+              </a:prstGeom>
+              <a:solidFill>
+                <a:schemeClr val="bg1">
+                  <a:lumMod val="65000"/>
+                </a:schemeClr>
+              </a:solidFill>
+            </p:spPr>
+            <p:style>
+              <a:lnRef idx="2">
+                <a:schemeClr val="accent1">
+                  <a:shade val="15000"/>
+                </a:schemeClr>
+              </a:lnRef>
+              <a:fillRef idx="1">
+                <a:schemeClr val="accent1"/>
+              </a:fillRef>
+              <a:effectRef idx="0">
+                <a:schemeClr val="accent1"/>
+              </a:effectRef>
+              <a:fontRef idx="minor">
+                <a:schemeClr val="lt1"/>
+              </a:fontRef>
+            </p:style>
+            <p:txBody>
+              <a:bodyPr rtlCol="0" anchor="ctr"/>
+              <a:lstStyle/>
+              <a:p>
+                <a:pPr algn="ctr"/>
+                <a:endParaRPr lang="en-DE"/>
+              </a:p>
+            </p:txBody>
+          </p:sp>
+        </p:grpSp>
+        <p:sp>
+          <p:nvSpPr>
+            <p:cNvPr id="45" name="TextBox 44">
+              <a:extLst>
+                <a:ext uri="{FF2B5EF4-FFF2-40B4-BE49-F238E27FC236}">
+                  <a16:creationId xmlns:a16="http://schemas.microsoft.com/office/drawing/2014/main" id="{76178399-A51E-112E-6098-CEF95DDD6564}"/>
+                </a:ext>
+              </a:extLst>
+            </p:cNvPr>
+            <p:cNvSpPr txBox="1"/>
+            <p:nvPr/>
+          </p:nvSpPr>
+          <p:spPr>
+            <a:xfrm>
+              <a:off x="1092267" y="793793"/>
+              <a:ext cx="444352" cy="369332"/>
+            </a:xfrm>
+            <a:prstGeom prst="rect">
+              <a:avLst/>
+            </a:prstGeom>
+            <a:noFill/>
+          </p:spPr>
+          <p:txBody>
+            <a:bodyPr wrap="none" rtlCol="0">
+              <a:spAutoFit/>
+            </a:bodyPr>
+            <a:lstStyle/>
+            <a:p>
+              <a:r>
+                <a:rPr lang="en-DE" dirty="0"/>
+                <a:t>2D</a:t>
+              </a:r>
+            </a:p>
+          </p:txBody>
+        </p:sp>
+        <p:cxnSp>
+          <p:nvCxnSpPr>
+            <p:cNvPr id="46" name="Straight Arrow Connector 45">
+              <a:extLst>
+                <a:ext uri="{FF2B5EF4-FFF2-40B4-BE49-F238E27FC236}">
+                  <a16:creationId xmlns:a16="http://schemas.microsoft.com/office/drawing/2014/main" id="{DD99339C-62AA-CCDE-1792-85A940A35A7C}"/>
+                </a:ext>
+              </a:extLst>
+            </p:cNvPr>
+            <p:cNvCxnSpPr/>
+            <p:nvPr/>
+          </p:nvCxnSpPr>
+          <p:spPr>
+            <a:xfrm>
+              <a:off x="1152400" y="2338982"/>
+              <a:ext cx="1095324" cy="0"/>
+            </a:xfrm>
+            <a:prstGeom prst="straightConnector1">
+              <a:avLst/>
+            </a:prstGeom>
+            <a:ln>
+              <a:solidFill>
+                <a:schemeClr val="tx1"/>
+              </a:solidFill>
+              <a:headEnd type="triangle" w="med" len="med"/>
+              <a:tailEnd type="triangle" w="med" len="med"/>
+            </a:ln>
+          </p:spPr>
+          <p:style>
+            <a:lnRef idx="1">
+              <a:schemeClr val="accent1"/>
+            </a:lnRef>
+            <a:fillRef idx="0">
+              <a:schemeClr val="accent1"/>
+            </a:fillRef>
+            <a:effectRef idx="0">
+              <a:schemeClr val="accent1"/>
+            </a:effectRef>
+            <a:fontRef idx="minor">
+              <a:schemeClr val="tx1"/>
+            </a:fontRef>
+          </p:style>
+        </p:cxnSp>
+        <p:cxnSp>
+          <p:nvCxnSpPr>
+            <p:cNvPr id="47" name="Straight Arrow Connector 46">
+              <a:extLst>
+                <a:ext uri="{FF2B5EF4-FFF2-40B4-BE49-F238E27FC236}">
+                  <a16:creationId xmlns:a16="http://schemas.microsoft.com/office/drawing/2014/main" id="{7755C4AD-7D7E-B388-87B2-335AA645313F}"/>
+                </a:ext>
+              </a:extLst>
+            </p:cNvPr>
+            <p:cNvCxnSpPr>
+              <a:cxnSpLocks/>
+            </p:cNvCxnSpPr>
+            <p:nvPr/>
+          </p:nvCxnSpPr>
+          <p:spPr>
+            <a:xfrm flipV="1">
+              <a:off x="1073232" y="1325584"/>
+              <a:ext cx="0" cy="940840"/>
+            </a:xfrm>
+            <a:prstGeom prst="straightConnector1">
+              <a:avLst/>
+            </a:prstGeom>
+            <a:ln>
+              <a:solidFill>
+                <a:schemeClr val="tx1"/>
+              </a:solidFill>
+              <a:headEnd type="triangle" w="med" len="med"/>
+              <a:tailEnd type="triangle" w="med" len="med"/>
+            </a:ln>
+          </p:spPr>
+          <p:style>
+            <a:lnRef idx="1">
+              <a:schemeClr val="accent1"/>
+            </a:lnRef>
+            <a:fillRef idx="0">
+              <a:schemeClr val="accent1"/>
+            </a:fillRef>
+            <a:effectRef idx="0">
+              <a:schemeClr val="accent1"/>
+            </a:effectRef>
+            <a:fontRef idx="minor">
+              <a:schemeClr val="tx1"/>
+            </a:fontRef>
+          </p:style>
+        </p:cxnSp>
+        <p:sp>
+          <p:nvSpPr>
+            <p:cNvPr id="48" name="TextBox 47">
+              <a:extLst>
+                <a:ext uri="{FF2B5EF4-FFF2-40B4-BE49-F238E27FC236}">
+                  <a16:creationId xmlns:a16="http://schemas.microsoft.com/office/drawing/2014/main" id="{80884AED-A816-0835-B432-BDE126DC5A28}"/>
+                </a:ext>
+              </a:extLst>
+            </p:cNvPr>
+            <p:cNvSpPr txBox="1"/>
+            <p:nvPr/>
+          </p:nvSpPr>
+          <p:spPr>
+            <a:xfrm>
+              <a:off x="1607466" y="2405587"/>
+              <a:ext cx="304892" cy="369332"/>
+            </a:xfrm>
+            <a:prstGeom prst="rect">
+              <a:avLst/>
+            </a:prstGeom>
+            <a:noFill/>
+          </p:spPr>
+          <p:txBody>
+            <a:bodyPr wrap="none" rtlCol="0">
+              <a:spAutoFit/>
+            </a:bodyPr>
+            <a:lstStyle/>
+            <a:p>
+              <a:r>
+                <a:rPr lang="en-DE" dirty="0"/>
+                <a:t>X</a:t>
+              </a:r>
+            </a:p>
+          </p:txBody>
+        </p:sp>
+        <p:sp>
+          <p:nvSpPr>
+            <p:cNvPr id="49" name="TextBox 48">
+              <a:extLst>
+                <a:ext uri="{FF2B5EF4-FFF2-40B4-BE49-F238E27FC236}">
+                  <a16:creationId xmlns:a16="http://schemas.microsoft.com/office/drawing/2014/main" id="{06C53E6E-F009-E0C7-8AFE-E104350981DA}"/>
+                </a:ext>
+              </a:extLst>
+            </p:cNvPr>
+            <p:cNvSpPr txBox="1"/>
+            <p:nvPr/>
+          </p:nvSpPr>
+          <p:spPr>
+            <a:xfrm>
+              <a:off x="791944" y="1500361"/>
+              <a:ext cx="304892" cy="369332"/>
+            </a:xfrm>
+            <a:prstGeom prst="rect">
+              <a:avLst/>
+            </a:prstGeom>
+            <a:noFill/>
+          </p:spPr>
+          <p:txBody>
+            <a:bodyPr wrap="none" rtlCol="0">
+              <a:spAutoFit/>
+            </a:bodyPr>
+            <a:lstStyle/>
+            <a:p>
+              <a:r>
+                <a:rPr lang="en-DE" dirty="0"/>
+                <a:t>Y</a:t>
+              </a:r>
+            </a:p>
+          </p:txBody>
+        </p:sp>
+      </p:grpSp>
+      <p:grpSp>
+        <p:nvGrpSpPr>
+          <p:cNvPr id="62" name="Group 61">
+            <a:extLst>
+              <a:ext uri="{FF2B5EF4-FFF2-40B4-BE49-F238E27FC236}">
+                <a16:creationId xmlns:a16="http://schemas.microsoft.com/office/drawing/2014/main" id="{CFBEC7F4-78A1-D966-803B-0E4601CBBE0C}"/>
+              </a:ext>
+            </a:extLst>
+          </p:cNvPr>
+          <p:cNvGrpSpPr/>
+          <p:nvPr/>
+        </p:nvGrpSpPr>
+        <p:grpSpPr>
+          <a:xfrm>
+            <a:off x="269479" y="2402420"/>
+            <a:ext cx="1139063" cy="1662813"/>
+            <a:chOff x="791944" y="793793"/>
+            <a:chExt cx="1509238" cy="1981126"/>
+          </a:xfrm>
+        </p:grpSpPr>
+        <p:grpSp>
+          <p:nvGrpSpPr>
+            <p:cNvPr id="63" name="Group 62">
+              <a:extLst>
+                <a:ext uri="{FF2B5EF4-FFF2-40B4-BE49-F238E27FC236}">
+                  <a16:creationId xmlns:a16="http://schemas.microsoft.com/office/drawing/2014/main" id="{0F3DEA12-1183-B03A-D98B-5EC2AA08431A}"/>
+                </a:ext>
+              </a:extLst>
+            </p:cNvPr>
+            <p:cNvGrpSpPr/>
+            <p:nvPr/>
+          </p:nvGrpSpPr>
+          <p:grpSpPr>
+            <a:xfrm>
+              <a:off x="1175929" y="1356626"/>
+              <a:ext cx="1125253" cy="870582"/>
+              <a:chOff x="288758" y="1473802"/>
+              <a:chExt cx="968826" cy="749558"/>
+            </a:xfrm>
+          </p:grpSpPr>
+          <p:sp>
+            <p:nvSpPr>
+              <p:cNvPr id="69" name="Rectangle 68">
+                <a:extLst>
+                  <a:ext uri="{FF2B5EF4-FFF2-40B4-BE49-F238E27FC236}">
+                    <a16:creationId xmlns:a16="http://schemas.microsoft.com/office/drawing/2014/main" id="{CD3C9A14-F637-4B41-A485-C830D2645FC4}"/>
+                  </a:ext>
+                </a:extLst>
+              </p:cNvPr>
+              <p:cNvSpPr/>
+              <p:nvPr/>
+            </p:nvSpPr>
+            <p:spPr>
+              <a:xfrm>
+                <a:off x="288758" y="1473802"/>
+                <a:ext cx="241560" cy="247507"/>
+              </a:xfrm>
+              <a:prstGeom prst="rect">
+                <a:avLst/>
+              </a:prstGeom>
+              <a:solidFill>
+                <a:schemeClr val="bg1"/>
+              </a:solidFill>
+            </p:spPr>
+            <p:style>
+              <a:lnRef idx="2">
+                <a:schemeClr val="accent1">
+                  <a:shade val="15000"/>
+                </a:schemeClr>
+              </a:lnRef>
+              <a:fillRef idx="1">
+                <a:schemeClr val="accent1"/>
+              </a:fillRef>
+              <a:effectRef idx="0">
+                <a:schemeClr val="accent1"/>
+              </a:effectRef>
+              <a:fontRef idx="minor">
+                <a:schemeClr val="lt1"/>
+              </a:fontRef>
+            </p:style>
+            <p:txBody>
+              <a:bodyPr rtlCol="0" anchor="ctr"/>
+              <a:lstStyle/>
+              <a:p>
+                <a:pPr algn="ctr"/>
+                <a:endParaRPr lang="en-DE"/>
+              </a:p>
+            </p:txBody>
+          </p:sp>
+          <p:sp>
+            <p:nvSpPr>
+              <p:cNvPr id="70" name="Rectangle 69">
+                <a:extLst>
+                  <a:ext uri="{FF2B5EF4-FFF2-40B4-BE49-F238E27FC236}">
+                    <a16:creationId xmlns:a16="http://schemas.microsoft.com/office/drawing/2014/main" id="{58ECD938-6CFA-278E-3F78-F9ECA582AE2D}"/>
+                  </a:ext>
+                </a:extLst>
+              </p:cNvPr>
+              <p:cNvSpPr/>
+              <p:nvPr/>
+            </p:nvSpPr>
+            <p:spPr>
+              <a:xfrm>
+                <a:off x="531611" y="1473802"/>
+                <a:ext cx="241560" cy="247507"/>
+              </a:xfrm>
+              <a:prstGeom prst="rect">
+                <a:avLst/>
+              </a:prstGeom>
+              <a:solidFill>
+                <a:schemeClr val="bg1">
+                  <a:lumMod val="75000"/>
+                </a:schemeClr>
+              </a:solidFill>
+            </p:spPr>
+            <p:style>
+              <a:lnRef idx="2">
+                <a:schemeClr val="accent1">
+                  <a:shade val="15000"/>
+                </a:schemeClr>
+              </a:lnRef>
+              <a:fillRef idx="1">
+                <a:schemeClr val="accent1"/>
+              </a:fillRef>
+              <a:effectRef idx="0">
+                <a:schemeClr val="accent1"/>
+              </a:effectRef>
+              <a:fontRef idx="minor">
+                <a:schemeClr val="lt1"/>
+              </a:fontRef>
+            </p:style>
+            <p:txBody>
+              <a:bodyPr rtlCol="0" anchor="ctr"/>
+              <a:lstStyle/>
+              <a:p>
+                <a:pPr algn="ctr"/>
+                <a:endParaRPr lang="en-DE"/>
+              </a:p>
+            </p:txBody>
+          </p:sp>
+          <p:sp>
+            <p:nvSpPr>
+              <p:cNvPr id="71" name="Rectangle 70">
+                <a:extLst>
+                  <a:ext uri="{FF2B5EF4-FFF2-40B4-BE49-F238E27FC236}">
+                    <a16:creationId xmlns:a16="http://schemas.microsoft.com/office/drawing/2014/main" id="{1EB14BAA-4ED2-D583-2FC8-C40C296F7E75}"/>
+                  </a:ext>
+                </a:extLst>
+              </p:cNvPr>
+              <p:cNvSpPr/>
+              <p:nvPr/>
+            </p:nvSpPr>
+            <p:spPr>
+              <a:xfrm>
+                <a:off x="774464" y="1473802"/>
+                <a:ext cx="241560" cy="247507"/>
+              </a:xfrm>
+              <a:prstGeom prst="rect">
+                <a:avLst/>
+              </a:prstGeom>
+              <a:solidFill>
+                <a:schemeClr val="bg1"/>
+              </a:solidFill>
+            </p:spPr>
+            <p:style>
+              <a:lnRef idx="2">
+                <a:schemeClr val="accent1">
+                  <a:shade val="15000"/>
+                </a:schemeClr>
+              </a:lnRef>
+              <a:fillRef idx="1">
+                <a:schemeClr val="accent1"/>
+              </a:fillRef>
+              <a:effectRef idx="0">
+                <a:schemeClr val="accent1"/>
+              </a:effectRef>
+              <a:fontRef idx="minor">
+                <a:schemeClr val="lt1"/>
+              </a:fontRef>
+            </p:style>
+            <p:txBody>
+              <a:bodyPr rtlCol="0" anchor="ctr"/>
+              <a:lstStyle/>
+              <a:p>
+                <a:pPr algn="ctr"/>
+                <a:endParaRPr lang="en-DE"/>
+              </a:p>
+            </p:txBody>
+          </p:sp>
+          <p:sp>
+            <p:nvSpPr>
+              <p:cNvPr id="72" name="Rectangle 71">
+                <a:extLst>
+                  <a:ext uri="{FF2B5EF4-FFF2-40B4-BE49-F238E27FC236}">
+                    <a16:creationId xmlns:a16="http://schemas.microsoft.com/office/drawing/2014/main" id="{272C7723-DE01-0438-D16E-69C6C96F78E1}"/>
+                  </a:ext>
+                </a:extLst>
+              </p:cNvPr>
+              <p:cNvSpPr/>
+              <p:nvPr/>
+            </p:nvSpPr>
+            <p:spPr>
+              <a:xfrm>
+                <a:off x="1016024" y="1473802"/>
+                <a:ext cx="241560" cy="247507"/>
+              </a:xfrm>
+              <a:prstGeom prst="rect">
+                <a:avLst/>
+              </a:prstGeom>
+              <a:solidFill>
+                <a:schemeClr val="bg1"/>
+              </a:solidFill>
+            </p:spPr>
+            <p:style>
+              <a:lnRef idx="2">
+                <a:schemeClr val="accent1">
+                  <a:shade val="15000"/>
+                </a:schemeClr>
+              </a:lnRef>
+              <a:fillRef idx="1">
+                <a:schemeClr val="accent1"/>
+              </a:fillRef>
+              <a:effectRef idx="0">
+                <a:schemeClr val="accent1"/>
+              </a:effectRef>
+              <a:fontRef idx="minor">
+                <a:schemeClr val="lt1"/>
+              </a:fontRef>
+            </p:style>
+            <p:txBody>
+              <a:bodyPr rtlCol="0" anchor="ctr"/>
+              <a:lstStyle/>
+              <a:p>
+                <a:pPr algn="ctr"/>
+                <a:endParaRPr lang="en-DE"/>
+              </a:p>
+            </p:txBody>
+          </p:sp>
+          <p:sp>
+            <p:nvSpPr>
+              <p:cNvPr id="73" name="Rectangle 72">
+                <a:extLst>
+                  <a:ext uri="{FF2B5EF4-FFF2-40B4-BE49-F238E27FC236}">
+                    <a16:creationId xmlns:a16="http://schemas.microsoft.com/office/drawing/2014/main" id="{F7EB5A3F-AE36-31D6-B0B8-0DA06E594F80}"/>
+                  </a:ext>
+                </a:extLst>
+              </p:cNvPr>
+              <p:cNvSpPr/>
+              <p:nvPr/>
+            </p:nvSpPr>
+            <p:spPr>
+              <a:xfrm>
+                <a:off x="288758" y="1728346"/>
+                <a:ext cx="241560" cy="247507"/>
+              </a:xfrm>
+              <a:prstGeom prst="rect">
+                <a:avLst/>
+              </a:prstGeom>
+              <a:solidFill>
+                <a:schemeClr val="bg1"/>
+              </a:solidFill>
+            </p:spPr>
+            <p:style>
+              <a:lnRef idx="2">
+                <a:schemeClr val="accent1">
+                  <a:shade val="15000"/>
+                </a:schemeClr>
+              </a:lnRef>
+              <a:fillRef idx="1">
+                <a:schemeClr val="accent1"/>
+              </a:fillRef>
+              <a:effectRef idx="0">
+                <a:schemeClr val="accent1"/>
+              </a:effectRef>
+              <a:fontRef idx="minor">
+                <a:schemeClr val="lt1"/>
+              </a:fontRef>
+            </p:style>
+            <p:txBody>
+              <a:bodyPr rtlCol="0" anchor="ctr"/>
+              <a:lstStyle/>
+              <a:p>
+                <a:pPr algn="ctr"/>
+                <a:endParaRPr lang="en-DE"/>
+              </a:p>
+            </p:txBody>
+          </p:sp>
+          <p:sp>
+            <p:nvSpPr>
+              <p:cNvPr id="74" name="Rectangle 73">
+                <a:extLst>
+                  <a:ext uri="{FF2B5EF4-FFF2-40B4-BE49-F238E27FC236}">
+                    <a16:creationId xmlns:a16="http://schemas.microsoft.com/office/drawing/2014/main" id="{8EFC88D2-3E90-6767-20F8-8C6B4F0C847A}"/>
+                  </a:ext>
+                </a:extLst>
+              </p:cNvPr>
+              <p:cNvSpPr/>
+              <p:nvPr/>
+            </p:nvSpPr>
+            <p:spPr>
+              <a:xfrm>
+                <a:off x="531611" y="1728346"/>
+                <a:ext cx="241560" cy="247507"/>
+              </a:xfrm>
+              <a:prstGeom prst="rect">
+                <a:avLst/>
+              </a:prstGeom>
+              <a:solidFill>
+                <a:schemeClr val="tx2">
+                  <a:lumMod val="50000"/>
+                </a:schemeClr>
+              </a:solidFill>
+            </p:spPr>
+            <p:style>
+              <a:lnRef idx="2">
+                <a:schemeClr val="accent1">
+                  <a:shade val="15000"/>
+                </a:schemeClr>
+              </a:lnRef>
+              <a:fillRef idx="1">
+                <a:schemeClr val="accent1"/>
+              </a:fillRef>
+              <a:effectRef idx="0">
+                <a:schemeClr val="accent1"/>
+              </a:effectRef>
+              <a:fontRef idx="minor">
+                <a:schemeClr val="lt1"/>
+              </a:fontRef>
+            </p:style>
+            <p:txBody>
+              <a:bodyPr rtlCol="0" anchor="ctr"/>
+              <a:lstStyle/>
+              <a:p>
+                <a:pPr algn="ctr"/>
+                <a:endParaRPr lang="en-DE">
+                  <a:solidFill>
+                    <a:schemeClr val="bg1">
+                      <a:lumMod val="65000"/>
+                    </a:schemeClr>
+                  </a:solidFill>
+                </a:endParaRPr>
+              </a:p>
+            </p:txBody>
+          </p:sp>
+          <p:sp>
+            <p:nvSpPr>
+              <p:cNvPr id="75" name="Rectangle 74">
+                <a:extLst>
+                  <a:ext uri="{FF2B5EF4-FFF2-40B4-BE49-F238E27FC236}">
+                    <a16:creationId xmlns:a16="http://schemas.microsoft.com/office/drawing/2014/main" id="{1B1827E1-EC54-2496-8E91-EC3EFC089199}"/>
+                  </a:ext>
+                </a:extLst>
+              </p:cNvPr>
+              <p:cNvSpPr/>
+              <p:nvPr/>
+            </p:nvSpPr>
+            <p:spPr>
+              <a:xfrm>
+                <a:off x="774464" y="1728346"/>
+                <a:ext cx="241560" cy="247507"/>
+              </a:xfrm>
+              <a:prstGeom prst="rect">
+                <a:avLst/>
+              </a:prstGeom>
+              <a:solidFill>
+                <a:schemeClr val="tx1">
+                  <a:lumMod val="65000"/>
+                  <a:lumOff val="35000"/>
+                </a:schemeClr>
+              </a:solidFill>
+            </p:spPr>
+            <p:style>
+              <a:lnRef idx="2">
+                <a:schemeClr val="accent1">
+                  <a:shade val="15000"/>
+                </a:schemeClr>
+              </a:lnRef>
+              <a:fillRef idx="1">
+                <a:schemeClr val="accent1"/>
+              </a:fillRef>
+              <a:effectRef idx="0">
+                <a:schemeClr val="accent1"/>
+              </a:effectRef>
+              <a:fontRef idx="minor">
+                <a:schemeClr val="lt1"/>
+              </a:fontRef>
+            </p:style>
+            <p:txBody>
+              <a:bodyPr rtlCol="0" anchor="ctr"/>
+              <a:lstStyle/>
+              <a:p>
+                <a:pPr algn="ctr"/>
+                <a:endParaRPr lang="en-DE"/>
+              </a:p>
+            </p:txBody>
+          </p:sp>
+          <p:sp>
+            <p:nvSpPr>
+              <p:cNvPr id="121" name="Rectangle 120">
+                <a:extLst>
+                  <a:ext uri="{FF2B5EF4-FFF2-40B4-BE49-F238E27FC236}">
+                    <a16:creationId xmlns:a16="http://schemas.microsoft.com/office/drawing/2014/main" id="{7D2F81F2-1250-54DA-F232-2A71A75E3A93}"/>
+                  </a:ext>
+                </a:extLst>
+              </p:cNvPr>
+              <p:cNvSpPr/>
+              <p:nvPr/>
+            </p:nvSpPr>
+            <p:spPr>
+              <a:xfrm>
+                <a:off x="1016024" y="1728346"/>
+                <a:ext cx="241560" cy="247507"/>
+              </a:xfrm>
+              <a:prstGeom prst="rect">
+                <a:avLst/>
+              </a:prstGeom>
+              <a:solidFill>
+                <a:schemeClr val="bg1"/>
+              </a:solidFill>
+            </p:spPr>
+            <p:style>
+              <a:lnRef idx="2">
+                <a:schemeClr val="accent1">
+                  <a:shade val="15000"/>
+                </a:schemeClr>
+              </a:lnRef>
+              <a:fillRef idx="1">
+                <a:schemeClr val="accent1"/>
+              </a:fillRef>
+              <a:effectRef idx="0">
+                <a:schemeClr val="accent1"/>
+              </a:effectRef>
+              <a:fontRef idx="minor">
+                <a:schemeClr val="lt1"/>
+              </a:fontRef>
+            </p:style>
+            <p:txBody>
+              <a:bodyPr rtlCol="0" anchor="ctr"/>
+              <a:lstStyle/>
+              <a:p>
+                <a:pPr algn="ctr"/>
+                <a:endParaRPr lang="en-DE"/>
+              </a:p>
+            </p:txBody>
+          </p:sp>
+          <p:sp>
+            <p:nvSpPr>
+              <p:cNvPr id="122" name="Rectangle 121">
+                <a:extLst>
+                  <a:ext uri="{FF2B5EF4-FFF2-40B4-BE49-F238E27FC236}">
+                    <a16:creationId xmlns:a16="http://schemas.microsoft.com/office/drawing/2014/main" id="{6AA22C32-333F-F2EC-00D2-B8D8F83824C1}"/>
+                  </a:ext>
+                </a:extLst>
+              </p:cNvPr>
+              <p:cNvSpPr/>
+              <p:nvPr/>
+            </p:nvSpPr>
+            <p:spPr>
+              <a:xfrm>
+                <a:off x="288758" y="1975853"/>
+                <a:ext cx="241560" cy="247507"/>
+              </a:xfrm>
+              <a:prstGeom prst="rect">
+                <a:avLst/>
+              </a:prstGeom>
+              <a:solidFill>
+                <a:schemeClr val="bg1">
+                  <a:lumMod val="75000"/>
+                </a:schemeClr>
+              </a:solidFill>
+            </p:spPr>
+            <p:style>
+              <a:lnRef idx="2">
+                <a:schemeClr val="accent1">
+                  <a:shade val="15000"/>
+                </a:schemeClr>
+              </a:lnRef>
+              <a:fillRef idx="1">
+                <a:schemeClr val="accent1"/>
+              </a:fillRef>
+              <a:effectRef idx="0">
+                <a:schemeClr val="accent1"/>
+              </a:effectRef>
+              <a:fontRef idx="minor">
+                <a:schemeClr val="lt1"/>
+              </a:fontRef>
+            </p:style>
+            <p:txBody>
+              <a:bodyPr rtlCol="0" anchor="ctr"/>
+              <a:lstStyle/>
+              <a:p>
+                <a:pPr algn="ctr"/>
+                <a:endParaRPr lang="en-DE"/>
+              </a:p>
+            </p:txBody>
+          </p:sp>
+          <p:sp>
+            <p:nvSpPr>
+              <p:cNvPr id="125" name="Rectangle 124">
+                <a:extLst>
+                  <a:ext uri="{FF2B5EF4-FFF2-40B4-BE49-F238E27FC236}">
+                    <a16:creationId xmlns:a16="http://schemas.microsoft.com/office/drawing/2014/main" id="{99610748-C362-291C-5453-D6940D0D0ADF}"/>
+                  </a:ext>
+                </a:extLst>
+              </p:cNvPr>
+              <p:cNvSpPr/>
+              <p:nvPr/>
+            </p:nvSpPr>
+            <p:spPr>
+              <a:xfrm>
+                <a:off x="531611" y="1975853"/>
+                <a:ext cx="241560" cy="247507"/>
+              </a:xfrm>
+              <a:prstGeom prst="rect">
+                <a:avLst/>
+              </a:prstGeom>
+              <a:solidFill>
+                <a:schemeClr val="bg1"/>
+              </a:solidFill>
+            </p:spPr>
+            <p:style>
+              <a:lnRef idx="2">
+                <a:schemeClr val="accent1">
+                  <a:shade val="15000"/>
+                </a:schemeClr>
+              </a:lnRef>
+              <a:fillRef idx="1">
+                <a:schemeClr val="accent1"/>
+              </a:fillRef>
+              <a:effectRef idx="0">
+                <a:schemeClr val="accent1"/>
+              </a:effectRef>
+              <a:fontRef idx="minor">
+                <a:schemeClr val="lt1"/>
+              </a:fontRef>
+            </p:style>
+            <p:txBody>
+              <a:bodyPr rtlCol="0" anchor="ctr"/>
+              <a:lstStyle/>
+              <a:p>
+                <a:pPr algn="ctr"/>
+                <a:endParaRPr lang="en-DE"/>
+              </a:p>
+            </p:txBody>
+          </p:sp>
+          <p:sp>
+            <p:nvSpPr>
+              <p:cNvPr id="126" name="Rectangle 125">
+                <a:extLst>
+                  <a:ext uri="{FF2B5EF4-FFF2-40B4-BE49-F238E27FC236}">
+                    <a16:creationId xmlns:a16="http://schemas.microsoft.com/office/drawing/2014/main" id="{46AF86CB-B7BC-67A1-40B5-097E7A4FA31F}"/>
+                  </a:ext>
+                </a:extLst>
+              </p:cNvPr>
+              <p:cNvSpPr/>
+              <p:nvPr/>
+            </p:nvSpPr>
+            <p:spPr>
+              <a:xfrm>
+                <a:off x="774464" y="1975853"/>
+                <a:ext cx="241560" cy="247507"/>
+              </a:xfrm>
+              <a:prstGeom prst="rect">
+                <a:avLst/>
+              </a:prstGeom>
+              <a:solidFill>
+                <a:schemeClr val="bg1"/>
+              </a:solidFill>
+            </p:spPr>
+            <p:style>
+              <a:lnRef idx="2">
+                <a:schemeClr val="accent1">
+                  <a:shade val="15000"/>
+                </a:schemeClr>
+              </a:lnRef>
+              <a:fillRef idx="1">
+                <a:schemeClr val="accent1"/>
+              </a:fillRef>
+              <a:effectRef idx="0">
+                <a:schemeClr val="accent1"/>
+              </a:effectRef>
+              <a:fontRef idx="minor">
+                <a:schemeClr val="lt1"/>
+              </a:fontRef>
+            </p:style>
+            <p:txBody>
+              <a:bodyPr rtlCol="0" anchor="ctr"/>
+              <a:lstStyle/>
+              <a:p>
+                <a:pPr algn="ctr"/>
+                <a:endParaRPr lang="en-DE"/>
+              </a:p>
+            </p:txBody>
+          </p:sp>
+          <p:sp>
+            <p:nvSpPr>
+              <p:cNvPr id="133" name="Rectangle 132">
+                <a:extLst>
+                  <a:ext uri="{FF2B5EF4-FFF2-40B4-BE49-F238E27FC236}">
+                    <a16:creationId xmlns:a16="http://schemas.microsoft.com/office/drawing/2014/main" id="{AEAFC5F9-89D1-9794-F1AA-BA662F0ABC12}"/>
+                  </a:ext>
+                </a:extLst>
+              </p:cNvPr>
+              <p:cNvSpPr/>
+              <p:nvPr/>
+            </p:nvSpPr>
+            <p:spPr>
+              <a:xfrm>
+                <a:off x="1016024" y="1975853"/>
+                <a:ext cx="241560" cy="247507"/>
+              </a:xfrm>
+              <a:prstGeom prst="rect">
+                <a:avLst/>
+              </a:prstGeom>
+              <a:solidFill>
+                <a:schemeClr val="bg2">
+                  <a:lumMod val="50000"/>
+                </a:schemeClr>
+              </a:solidFill>
+            </p:spPr>
+            <p:style>
+              <a:lnRef idx="2">
+                <a:schemeClr val="accent1">
+                  <a:shade val="15000"/>
+                </a:schemeClr>
+              </a:lnRef>
+              <a:fillRef idx="1">
+                <a:schemeClr val="accent1"/>
+              </a:fillRef>
+              <a:effectRef idx="0">
+                <a:schemeClr val="accent1"/>
+              </a:effectRef>
+              <a:fontRef idx="minor">
+                <a:schemeClr val="lt1"/>
+              </a:fontRef>
+            </p:style>
+            <p:txBody>
+              <a:bodyPr rtlCol="0" anchor="ctr"/>
+              <a:lstStyle/>
+              <a:p>
+                <a:pPr algn="ctr"/>
+                <a:endParaRPr lang="en-DE"/>
+              </a:p>
+            </p:txBody>
+          </p:sp>
+        </p:grpSp>
+        <p:sp>
+          <p:nvSpPr>
+            <p:cNvPr id="64" name="TextBox 63">
+              <a:extLst>
+                <a:ext uri="{FF2B5EF4-FFF2-40B4-BE49-F238E27FC236}">
+                  <a16:creationId xmlns:a16="http://schemas.microsoft.com/office/drawing/2014/main" id="{8AC4133A-A253-9E5F-B69F-DBAA519A4C28}"/>
+                </a:ext>
+              </a:extLst>
+            </p:cNvPr>
+            <p:cNvSpPr txBox="1"/>
+            <p:nvPr/>
+          </p:nvSpPr>
+          <p:spPr>
+            <a:xfrm>
+              <a:off x="1092267" y="793793"/>
+              <a:ext cx="444352" cy="369332"/>
+            </a:xfrm>
+            <a:prstGeom prst="rect">
+              <a:avLst/>
+            </a:prstGeom>
+            <a:noFill/>
+          </p:spPr>
+          <p:txBody>
+            <a:bodyPr wrap="none" rtlCol="0">
+              <a:spAutoFit/>
+            </a:bodyPr>
+            <a:lstStyle/>
+            <a:p>
+              <a:r>
+                <a:rPr lang="en-DE" dirty="0"/>
+                <a:t>2D</a:t>
+              </a:r>
+            </a:p>
+          </p:txBody>
+        </p:sp>
+        <p:cxnSp>
+          <p:nvCxnSpPr>
+            <p:cNvPr id="65" name="Straight Arrow Connector 64">
+              <a:extLst>
+                <a:ext uri="{FF2B5EF4-FFF2-40B4-BE49-F238E27FC236}">
+                  <a16:creationId xmlns:a16="http://schemas.microsoft.com/office/drawing/2014/main" id="{5D8C93FD-7AB2-9CEA-023F-17717556F7CB}"/>
+                </a:ext>
+              </a:extLst>
+            </p:cNvPr>
+            <p:cNvCxnSpPr/>
+            <p:nvPr/>
+          </p:nvCxnSpPr>
+          <p:spPr>
+            <a:xfrm>
+              <a:off x="1152400" y="2338982"/>
+              <a:ext cx="1095324" cy="0"/>
+            </a:xfrm>
+            <a:prstGeom prst="straightConnector1">
+              <a:avLst/>
+            </a:prstGeom>
+            <a:ln>
+              <a:solidFill>
+                <a:schemeClr val="tx1"/>
+              </a:solidFill>
+              <a:headEnd type="triangle" w="med" len="med"/>
+              <a:tailEnd type="triangle" w="med" len="med"/>
+            </a:ln>
+          </p:spPr>
+          <p:style>
+            <a:lnRef idx="1">
+              <a:schemeClr val="accent1"/>
+            </a:lnRef>
+            <a:fillRef idx="0">
+              <a:schemeClr val="accent1"/>
+            </a:fillRef>
+            <a:effectRef idx="0">
+              <a:schemeClr val="accent1"/>
+            </a:effectRef>
+            <a:fontRef idx="minor">
+              <a:schemeClr val="tx1"/>
+            </a:fontRef>
+          </p:style>
+        </p:cxnSp>
+        <p:cxnSp>
+          <p:nvCxnSpPr>
+            <p:cNvPr id="66" name="Straight Arrow Connector 65">
+              <a:extLst>
+                <a:ext uri="{FF2B5EF4-FFF2-40B4-BE49-F238E27FC236}">
+                  <a16:creationId xmlns:a16="http://schemas.microsoft.com/office/drawing/2014/main" id="{7463264D-814A-A42F-9C8E-2DE1FFDD4066}"/>
+                </a:ext>
+              </a:extLst>
+            </p:cNvPr>
+            <p:cNvCxnSpPr>
+              <a:cxnSpLocks/>
+            </p:cNvCxnSpPr>
+            <p:nvPr/>
+          </p:nvCxnSpPr>
+          <p:spPr>
+            <a:xfrm flipV="1">
+              <a:off x="1073232" y="1325584"/>
+              <a:ext cx="0" cy="940840"/>
+            </a:xfrm>
+            <a:prstGeom prst="straightConnector1">
+              <a:avLst/>
+            </a:prstGeom>
+            <a:ln>
+              <a:solidFill>
+                <a:schemeClr val="tx1"/>
+              </a:solidFill>
+              <a:headEnd type="triangle" w="med" len="med"/>
+              <a:tailEnd type="triangle" w="med" len="med"/>
+            </a:ln>
+          </p:spPr>
+          <p:style>
+            <a:lnRef idx="1">
+              <a:schemeClr val="accent1"/>
+            </a:lnRef>
+            <a:fillRef idx="0">
+              <a:schemeClr val="accent1"/>
+            </a:fillRef>
+            <a:effectRef idx="0">
+              <a:schemeClr val="accent1"/>
+            </a:effectRef>
+            <a:fontRef idx="minor">
+              <a:schemeClr val="tx1"/>
+            </a:fontRef>
+          </p:style>
+        </p:cxnSp>
+        <p:sp>
+          <p:nvSpPr>
+            <p:cNvPr id="67" name="TextBox 66">
+              <a:extLst>
+                <a:ext uri="{FF2B5EF4-FFF2-40B4-BE49-F238E27FC236}">
+                  <a16:creationId xmlns:a16="http://schemas.microsoft.com/office/drawing/2014/main" id="{88789368-A4AD-C5F5-AD36-1E10C4C98CA0}"/>
+                </a:ext>
+              </a:extLst>
+            </p:cNvPr>
+            <p:cNvSpPr txBox="1"/>
+            <p:nvPr/>
+          </p:nvSpPr>
+          <p:spPr>
+            <a:xfrm>
+              <a:off x="1607466" y="2405587"/>
+              <a:ext cx="304892" cy="369332"/>
+            </a:xfrm>
+            <a:prstGeom prst="rect">
+              <a:avLst/>
+            </a:prstGeom>
+            <a:noFill/>
+          </p:spPr>
+          <p:txBody>
+            <a:bodyPr wrap="none" rtlCol="0">
+              <a:spAutoFit/>
+            </a:bodyPr>
+            <a:lstStyle/>
+            <a:p>
+              <a:r>
+                <a:rPr lang="en-DE" dirty="0"/>
+                <a:t>X</a:t>
+              </a:r>
+            </a:p>
+          </p:txBody>
+        </p:sp>
+        <p:sp>
+          <p:nvSpPr>
+            <p:cNvPr id="68" name="TextBox 67">
+              <a:extLst>
+                <a:ext uri="{FF2B5EF4-FFF2-40B4-BE49-F238E27FC236}">
+                  <a16:creationId xmlns:a16="http://schemas.microsoft.com/office/drawing/2014/main" id="{81D7806D-FEC5-B7D6-D288-83D9D690E5F8}"/>
+                </a:ext>
+              </a:extLst>
+            </p:cNvPr>
+            <p:cNvSpPr txBox="1"/>
+            <p:nvPr/>
+          </p:nvSpPr>
+          <p:spPr>
+            <a:xfrm>
+              <a:off x="791944" y="1500361"/>
+              <a:ext cx="304892" cy="369332"/>
+            </a:xfrm>
+            <a:prstGeom prst="rect">
+              <a:avLst/>
+            </a:prstGeom>
+            <a:noFill/>
+          </p:spPr>
+          <p:txBody>
+            <a:bodyPr wrap="none" rtlCol="0">
+              <a:spAutoFit/>
+            </a:bodyPr>
+            <a:lstStyle/>
+            <a:p>
+              <a:r>
+                <a:rPr lang="en-DE" dirty="0"/>
+                <a:t>Y</a:t>
+              </a:r>
+            </a:p>
+          </p:txBody>
+        </p:sp>
+      </p:grpSp>
+      <p:sp>
+        <p:nvSpPr>
+          <p:cNvPr id="134" name="Right Brace 133">
+            <a:extLst>
+              <a:ext uri="{FF2B5EF4-FFF2-40B4-BE49-F238E27FC236}">
+                <a16:creationId xmlns:a16="http://schemas.microsoft.com/office/drawing/2014/main" id="{3189F80F-0ADB-5C95-7DA8-0FFBBB4898F8}"/>
+              </a:ext>
+            </a:extLst>
+          </p:cNvPr>
+          <p:cNvSpPr/>
+          <p:nvPr/>
+        </p:nvSpPr>
+        <p:spPr>
+          <a:xfrm>
+            <a:off x="3294185" y="1345311"/>
+            <a:ext cx="615166" cy="3806981"/>
+          </a:xfrm>
+          <a:prstGeom prst="rightBrace">
+            <a:avLst/>
+          </a:prstGeom>
+        </p:spPr>
+        <p:style>
+          <a:lnRef idx="2">
+            <a:schemeClr val="dk1"/>
+          </a:lnRef>
+          <a:fillRef idx="0">
+            <a:schemeClr val="dk1"/>
+          </a:fillRef>
+          <a:effectRef idx="1">
+            <a:schemeClr val="dk1"/>
+          </a:effectRef>
+          <a:fontRef idx="minor">
+            <a:schemeClr val="tx1"/>
+          </a:fontRef>
+        </p:style>
+        <p:txBody>
+          <a:bodyPr rtlCol="0" anchor="ctr"/>
+          <a:lstStyle/>
+          <a:p>
+            <a:pPr algn="ctr"/>
+            <a:endParaRPr lang="LID4096"/>
+          </a:p>
+        </p:txBody>
+      </p:sp>
+      <p:sp>
+        <p:nvSpPr>
+          <p:cNvPr id="138" name="TextBox 137">
+            <a:extLst>
+              <a:ext uri="{FF2B5EF4-FFF2-40B4-BE49-F238E27FC236}">
+                <a16:creationId xmlns:a16="http://schemas.microsoft.com/office/drawing/2014/main" id="{DC8976F4-6089-8B77-5DDE-212733C9929C}"/>
+              </a:ext>
+            </a:extLst>
+          </p:cNvPr>
+          <p:cNvSpPr txBox="1"/>
+          <p:nvPr/>
+        </p:nvSpPr>
+        <p:spPr>
+          <a:xfrm>
+            <a:off x="4542401" y="3648648"/>
+            <a:ext cx="444352" cy="369332"/>
+          </a:xfrm>
+          <a:prstGeom prst="rect">
+            <a:avLst/>
+          </a:prstGeom>
+          <a:noFill/>
+        </p:spPr>
+        <p:txBody>
+          <a:bodyPr wrap="none" rtlCol="0">
+            <a:spAutoFit/>
+          </a:bodyPr>
+          <a:lstStyle/>
+          <a:p>
+            <a:r>
+              <a:rPr lang="en-US" dirty="0"/>
+              <a:t>3</a:t>
+            </a:r>
+            <a:r>
+              <a:rPr lang="en-DE" dirty="0"/>
+              <a:t>D</a:t>
+            </a:r>
+          </a:p>
+        </p:txBody>
+      </p:sp>
+      <p:cxnSp>
+        <p:nvCxnSpPr>
+          <p:cNvPr id="3" name="Straight Connector 2">
+            <a:extLst>
+              <a:ext uri="{FF2B5EF4-FFF2-40B4-BE49-F238E27FC236}">
+                <a16:creationId xmlns:a16="http://schemas.microsoft.com/office/drawing/2014/main" id="{7DC06080-BB6A-D971-734E-475AC18FB85E}"/>
+              </a:ext>
+            </a:extLst>
+          </p:cNvPr>
+          <p:cNvCxnSpPr>
+            <a:cxnSpLocks/>
+            <a:endCxn id="134" idx="1"/>
+          </p:cNvCxnSpPr>
+          <p:nvPr/>
+        </p:nvCxnSpPr>
+        <p:spPr>
+          <a:xfrm>
+            <a:off x="3294185" y="3248802"/>
+            <a:ext cx="615166" cy="0"/>
+          </a:xfrm>
+          <a:prstGeom prst="line">
+            <a:avLst/>
+          </a:prstGeom>
+        </p:spPr>
+        <p:style>
+          <a:lnRef idx="2">
+            <a:schemeClr val="dk1"/>
+          </a:lnRef>
+          <a:fillRef idx="0">
+            <a:schemeClr val="dk1"/>
+          </a:fillRef>
+          <a:effectRef idx="1">
+            <a:schemeClr val="dk1"/>
+          </a:effectRef>
+          <a:fontRef idx="minor">
+            <a:schemeClr val="tx1"/>
+          </a:fontRef>
+        </p:style>
+      </p:cxnSp>
+      <p:sp>
+        <p:nvSpPr>
+          <p:cNvPr id="18" name="TextBox 17">
+            <a:extLst>
+              <a:ext uri="{FF2B5EF4-FFF2-40B4-BE49-F238E27FC236}">
+                <a16:creationId xmlns:a16="http://schemas.microsoft.com/office/drawing/2014/main" id="{2E52A763-ACC9-B387-5160-348CDD214FA4}"/>
+              </a:ext>
+            </a:extLst>
+          </p:cNvPr>
+          <p:cNvSpPr txBox="1"/>
+          <p:nvPr/>
+        </p:nvSpPr>
+        <p:spPr>
+          <a:xfrm>
+            <a:off x="6667437" y="3677145"/>
+            <a:ext cx="1006558" cy="369332"/>
+          </a:xfrm>
+          <a:prstGeom prst="rect">
+            <a:avLst/>
+          </a:prstGeom>
+          <a:noFill/>
+        </p:spPr>
+        <p:txBody>
+          <a:bodyPr wrap="square" rtlCol="0">
+            <a:spAutoFit/>
+          </a:bodyPr>
+          <a:lstStyle/>
+          <a:p>
+            <a:r>
+              <a:rPr lang="en-US" dirty="0"/>
+              <a:t>magenta</a:t>
+            </a:r>
+          </a:p>
+        </p:txBody>
+      </p:sp>
+      <p:sp>
+        <p:nvSpPr>
+          <p:cNvPr id="19" name="TextBox 18">
+            <a:extLst>
+              <a:ext uri="{FF2B5EF4-FFF2-40B4-BE49-F238E27FC236}">
+                <a16:creationId xmlns:a16="http://schemas.microsoft.com/office/drawing/2014/main" id="{1DEB07A2-8E78-12CC-F6A1-8A219B0D15F6}"/>
+              </a:ext>
+            </a:extLst>
+          </p:cNvPr>
+          <p:cNvSpPr txBox="1"/>
+          <p:nvPr/>
+        </p:nvSpPr>
+        <p:spPr>
+          <a:xfrm>
+            <a:off x="6666565" y="4344167"/>
+            <a:ext cx="1006558" cy="369332"/>
+          </a:xfrm>
+          <a:prstGeom prst="rect">
+            <a:avLst/>
+          </a:prstGeom>
+          <a:noFill/>
+        </p:spPr>
+        <p:txBody>
+          <a:bodyPr wrap="square" rtlCol="0">
+            <a:spAutoFit/>
+          </a:bodyPr>
+          <a:lstStyle/>
+          <a:p>
+            <a:pPr algn="ctr"/>
+            <a:r>
+              <a:rPr lang="en-US" dirty="0"/>
+              <a:t>cyan</a:t>
+            </a:r>
+          </a:p>
+        </p:txBody>
+      </p:sp>
+      <p:sp>
+        <p:nvSpPr>
+          <p:cNvPr id="20" name="TextBox 19">
+            <a:extLst>
+              <a:ext uri="{FF2B5EF4-FFF2-40B4-BE49-F238E27FC236}">
+                <a16:creationId xmlns:a16="http://schemas.microsoft.com/office/drawing/2014/main" id="{F012944B-33F1-2F48-67BD-B412992405CA}"/>
+              </a:ext>
+            </a:extLst>
+          </p:cNvPr>
+          <p:cNvSpPr txBox="1"/>
+          <p:nvPr/>
+        </p:nvSpPr>
+        <p:spPr>
+          <a:xfrm>
+            <a:off x="6673684" y="4017980"/>
+            <a:ext cx="1006558" cy="369332"/>
+          </a:xfrm>
+          <a:prstGeom prst="rect">
+            <a:avLst/>
+          </a:prstGeom>
+          <a:noFill/>
+        </p:spPr>
+        <p:txBody>
+          <a:bodyPr wrap="square" rtlCol="0">
+            <a:spAutoFit/>
+          </a:bodyPr>
+          <a:lstStyle/>
+          <a:p>
+            <a:pPr algn="ctr"/>
+            <a:r>
+              <a:rPr lang="en-US" dirty="0"/>
+              <a:t>yellow</a:t>
+            </a:r>
+          </a:p>
+        </p:txBody>
+      </p:sp>
+      <p:sp>
+        <p:nvSpPr>
+          <p:cNvPr id="21" name="TextBox 20">
+            <a:extLst>
+              <a:ext uri="{FF2B5EF4-FFF2-40B4-BE49-F238E27FC236}">
+                <a16:creationId xmlns:a16="http://schemas.microsoft.com/office/drawing/2014/main" id="{50220190-326C-4B39-5AFF-4A9C2660E4C3}"/>
+              </a:ext>
+            </a:extLst>
+          </p:cNvPr>
+          <p:cNvSpPr txBox="1"/>
+          <p:nvPr/>
+        </p:nvSpPr>
+        <p:spPr>
+          <a:xfrm>
+            <a:off x="5066306" y="5397899"/>
+            <a:ext cx="2038763" cy="369332"/>
+          </a:xfrm>
+          <a:prstGeom prst="rect">
+            <a:avLst/>
+          </a:prstGeom>
+          <a:noFill/>
+        </p:spPr>
+        <p:txBody>
+          <a:bodyPr wrap="none" rtlCol="0">
+            <a:spAutoFit/>
+          </a:bodyPr>
+          <a:lstStyle/>
+          <a:p>
+            <a:r>
+              <a:rPr lang="en-DE" dirty="0"/>
+              <a:t>Array shape (X, Y, C)</a:t>
+            </a:r>
+          </a:p>
+        </p:txBody>
+      </p:sp>
+    </p:spTree>
+    <p:extLst>
+      <p:ext uri="{BB962C8B-B14F-4D97-AF65-F5344CB8AC3E}">
+        <p14:creationId xmlns:p14="http://schemas.microsoft.com/office/powerpoint/2010/main" val="1418238196"/>
+      </p:ext>
+    </p:extLst>
+  </p:cSld>
+  <p:clrMapOvr>
+    <a:masterClrMapping/>
+  </p:clrMapOvr>
+</p:sld>
+</file>
+
 <file path=ppt/theme/theme1.xml><?xml version="1.0" encoding="utf-8"?>
 <a:theme xmlns:a="http://schemas.openxmlformats.org/drawingml/2006/main" name="Office Theme">
   <a:themeElements>
